--- a/examples/pptx/immersion-2-1-choosing-the-stack.pptx
+++ b/examples/pptx/immersion-2-1-choosing-the-stack.pptx
@@ -550,7 +550,7 @@
           <a:lstStyle/>
           <a:p>
             <a:r>
-              <a:t>Day 2 opens. Yesterday was all talk and diagrams by design. This is the first session where they name real tools, and the last one before they start building in 2.2.</a:t>
+              <a:t>This is session 2.1, Choosing the Stack. Day 2 opens, and this is the first session where we name real tools.</a:t>
             </a:r>
           </a:p>
         </p:txBody>
@@ -620,7 +620,7 @@
           <a:lstStyle/>
           <a:p>
             <a:r>
-              <a:t>State the rule plainly and hold them to it. An undecided box is a box that blocks its owner tomorrow morning. A box marked "faked" is not a failure — it is a scoped decision.</a:t>
+              <a:t>The rule for this hour: every box gets one tool name, no box may stay undecided, “we fake it” counts as decided, and you write it on the board now.</a:t>
             </a:r>
           </a:p>
         </p:txBody>
@@ -690,7 +690,7 @@
           <a:lstStyle/>
           <a:p>
             <a:r>
-              <a:t>Four sources, in priority order. The fourth line is the trap: this week is not the week to learn a new framework. Learning happens after the demo ships, not on the critical path to it.</a:t>
+              <a:t>Tool names come from what your team already uses, what the workshop hands you, and what has a free tier today. Not from what you meant to learn this week.</a:t>
             </a:r>
           </a:p>
         </p:txBody>
@@ -760,7 +760,7 @@
           <a:lstStyle/>
           <a:p>
             <a:r>
-              <a:t>Almost every prototype in the room reduces to these four jobs. Have teams sort their boxes into these buckets — it usually collapses eight boxes into four decisions.</a:t>
+              <a:t>Almost every prototype reduces to four jobs. Intake, getting the input in. Think, the model doing the work. Store, anything you look up later. And show, what the user actually sees.</a:t>
             </a:r>
           </a:p>
         </p:txBody>
@@ -830,7 +830,7 @@
           <a:lstStyle/>
           <a:p>
             <a:r>
-              <a:t>An example mapping, not a template to copy. Point at how unglamorous every right-hand cell is. Four of the five are things they could stand up before lunch.</a:t>
+              <a:t>Here is a worked mapping. Collect the input with a form or a paste box. Understand it with one Claude prompt. Look things up in Claude Project files. Produce the output as an Artifact. And show a stranger with a hosted page.</a:t>
             </a:r>
           </a:p>
         </p:txBody>
@@ -900,7 +900,7 @@
           <a:lstStyle/>
           <a:p>
             <a:r>
-              <a:t>Four smells. Any one of them is survivable; two together means pick again. The cost of switching tools now is minutes; the cost of switching at 4pm tomorrow is the demo.</a:t>
+              <a:t>Four signs you picked wrong: nobody on the team has used it, setup is measured in hours, it needs a key you do not have, or the docs assume you are running in production.</a:t>
             </a:r>
           </a:p>
         </p:txBody>
@@ -970,7 +970,7 @@
           <a:lstStyle/>
           <a:p>
             <a:r>
-              <a:t>The core distinction of the session. Build only what carries the claim you are making. Everything else exists to let that claim be shown, and can be as fake as it needs to be.</a:t>
+              <a:t>Build it when it is the thing you claim, when the demo touches it live, and when nobody would believe it faked. Stub it when it is plumbing rather than proof, when the demo never opens it, and when it works but is boring.</a:t>
             </a:r>
           </a:p>
         </p:txBody>
@@ -1040,7 +1040,7 @@
           <a:lstStyle/>
           <a:p>
             <a:r>
-              <a:t>Stress the second half. A stub is not a lie — it is a deliberate placeholder you can name out loud. The moment you forget which parts are stubbed, you are demoing something you do not understand.</a:t>
+              <a:t>A stub is a fake that is honest about being fake.</a:t>
             </a:r>
           </a:p>
         </p:txBody>
@@ -1110,7 +1110,7 @@
           <a:lstStyle/>
           <a:p>
             <a:r>
-              <a:t>Three questions, thirty seconds per box. Run them out loud as a team so the decisions are shared. A box that survives all three is a box worth an afternoon.</a:t>
+              <a:t>Three questions per box. What does it prove — if nothing, it is plumbing. Who sees it — if nobody, stub it. What does it cost — anything over an hour needs a reason.</a:t>
             </a:r>
           </a:p>
         </p:txBody>
@@ -1180,7 +1180,7 @@
           <a:lstStyle/>
           <a:p>
             <a:r>
-              <a:t>Four things no prototype in this room needs. Each is days of work and none is what they are being judged on. If a demo needs a user, hardcode one.</a:t>
+              <a:t>Four things always safe to stub: login and user accounts, payments of any kind, email and notifications, and anything needing a real database.</a:t>
             </a:r>
           </a:p>
         </p:txBody>
@@ -1250,7 +1250,7 @@
           <a:lstStyle/>
           <a:p>
             <a:r>
-              <a:t>The mirror image. If the interesting claim is stubbed, there is no prototype — there is a slideshow. Day 3's red team will find this faster than you would like.</a:t>
+              <a:t>Four things never safe to stub: the step your idea rests on, whatever you claim is novel, the output a stranger reads, and the path the demo walks.</a:t>
             </a:r>
           </a:p>
         </p:txBody>
@@ -1320,7 +1320,7 @@
           <a:lstStyle/>
           <a:p>
             <a:r>
-              <a:t>Short session, hard deliverable. By 9:55 every box on their 1.2 map has a named tool beside it and a stub-or-build decision. No box may be left undecided, even if the decision is "we fake it".</a:t>
+              <a:t>Thirty-five minutes, and you leave with a named tool beside every box on your map.</a:t>
             </a:r>
           </a:p>
         </p:txBody>
@@ -1390,7 +1390,7 @@
           <a:lstStyle/>
           <a:p>
             <a:r>
-              <a:t>Apply these to each tool name they just wrote. Any tool failing two of three gets replaced now, while replacing it is free. The third test is the one teams never think about until Day 3.</a:t>
+              <a:t>Three tests before you commit to a tool. Under an hour, so you can have it running before lunch. Someone knows it, meaning one person has shipped with it. And it fails quietly, so when it breaks the demo still walks.</a:t>
             </a:r>
           </a:p>
         </p:txBody>
@@ -1460,7 +1460,7 @@
           <a:lstStyle/>
           <a:p>
             <a:r>
-              <a:t>The recurring argument, resolved. The better tool wins on ceiling, and the ceiling is irrelevant in a two-day build. Highlight setup and demo risk — those are the only rows that pay out this week.</a:t>
+              <a:t>The familiar tool sets up in minutes with low demo risk; the better tool takes half a day and carries unknown risk. The better tool only wins on ceiling, and ceiling does not pay out in two days.</a:t>
             </a:r>
           </a:p>
         </p:txBody>
@@ -1530,7 +1530,7 @@
           <a:lstStyle/>
           <a:p>
             <a:r>
-              <a:t>Illustrative, not measured — say so. The point stands regardless: choosing tools that wire together quickly buys back the only hours that matter. Every stub is a direct transfer from the left column to the right.</a:t>
+              <a:t>Roughly eighty percent of your time goes on wiring things together and twenty percent on the idea itself — and the idea is what you are judged on. Those figures are illustrative rather than measured.</a:t>
             </a:r>
           </a:p>
         </p:txBody>
@@ -1600,7 +1600,7 @@
           <a:lstStyle/>
           <a:p>
             <a:r>
-              <a:t>Second objective, and the most expensive mistake available to them today. Teams build retrieval systems for problems that fit in a single prompt. This section exists to stop that.</a:t>
+              <a:t>Second objective: telling the difference between needing RAG and just needing more context in the window.</a:t>
             </a:r>
           </a:p>
         </p:txBody>
@@ -1670,7 +1670,7 @@
           <a:lstStyle/>
           <a:p>
             <a:r>
-              <a:t>Strip the acronym down. Retrieval-augmented generation is a search step bolted in front of a prompt. That is all. Once it sounds that ordinary, the question of whether you need it gets easier.</a:t>
+              <a:t>RAG means fetching the few relevant bits first, then asking. It is a search step bolted in front of a prompt.</a:t>
             </a:r>
           </a:p>
         </p:txBody>
@@ -1740,7 +1740,7 @@
           <a:lstStyle/>
           <a:p>
             <a:r>
-              <a:t>The whole section in five words. Ask it before any architecture discussion. For most teams in this room the honest answer is yes, and that answer saves them an afternoon.</a:t>
+              <a:t>Before any architecture discussion: does it all fit already? For most of you in this room the honest answer is yes.</a:t>
             </a:r>
           </a:p>
         </p:txBody>
@@ -1810,7 +1810,7 @@
           <a:lstStyle/>
           <a:p>
             <a:r>
-              <a:t>Frame them as the same goal with different costs. Pasting is free to build and costs tokens. Fetching costs a build and saves tokens. Which is cheaper depends entirely on how much you have.</a:t>
+              <a:t>Two ways to give context. Paste it, meaning everything every time. Or fetch it, meaning only what is relevant.</a:t>
             </a:r>
           </a:p>
         </p:txBody>
@@ -1880,7 +1880,7 @@
           <a:lstStyle/>
           <a:p>
             <a:r>
-              <a:t>Calibrate their intuition. Modern windows are much larger than people assume, and the assumption is usually years out of date. Have them estimate their corpus out loud before deciding.</a:t>
+              <a:t>A context window today holds a long policy document, a few hundred support tickets, or a codebase of modest size. That is almost certainly more than you have.</a:t>
             </a:r>
           </a:p>
         </p:txBody>
@@ -1950,7 +1950,7 @@
           <a:lstStyle/>
           <a:p>
             <a:r>
-              <a:t>Insist on step one. Teams argue about retrieval for twenty minutes without ever checking how much text they have. Measuring usually ends the argument in under a minute.</a:t>
+              <a:t>The decision has an order. Measure the corpus — its actual size, not your guess. Try pasting it, and if it fits you are done. Only then retrieve, and keep it as small as you can.</a:t>
             </a:r>
           </a:p>
         </p:txBody>
@@ -2020,7 +2020,7 @@
           <a:lstStyle/>
           <a:p>
             <a:r>
-              <a:t>Three discriminators. Note they must answer yes to most of a column, not just one line. One matching line is a coincidence; three is an architecture.</a:t>
+              <a:t>You need just context when it fits in one window, the corpus barely changes, and every question sees all of it. You need real retrieval when there is far more than fits, it changes constantly, and questions need a slice.</a:t>
             </a:r>
           </a:p>
         </p:txBody>
@@ -2090,7 +2090,7 @@
           <a:lstStyle/>
           <a:p>
             <a:r>
-              <a:t>Three syllabus objectives, four moves. The second is the one teams skip and the one that saves the most time. The third is where most of the wasted effort in the room will otherwise go.</a:t>
+              <a:t>Four things this session. We give every step a named tool, decide what to stub rather than build, work out whether you need RAG or just more context, and stand up the smallest retrieval layer.</a:t>
             </a:r>
           </a:p>
         </p:txBody>
@@ -2160,7 +2160,7 @@
           <a:lstStyle/>
           <a:p>
             <a:r>
-              <a:t>Retrieval trades build time for run cost. In a two-day prototype you have almost no build time and almost no run volume, which is exactly the regime where pasting wins.</a:t>
+              <a:t>Here is what each costs. Pasting is zero build time but more tokens per question, and it breaks when the corpus grows. Retrieval costs hours to build, uses fewer tokens, breaks when search misses, and is harder to debug.</a:t>
             </a:r>
           </a:p>
         </p:txBody>
@@ -2230,7 +2230,7 @@
           <a:lstStyle/>
           <a:p>
             <a:r>
-              <a:t>The build cost of RAG is not the vector store; it is these four. Each is a quiet afternoon. The last one bites on Day 3 when a red-teamer asks why the system missed an obvious document.</a:t>
+              <a:t>Four costs nobody budgets for: chunking the documents well, deciding how many to fetch, debugging what it missed, and explaining it in the demo.</a:t>
             </a:r>
           </a:p>
         </p:txBody>
@@ -2300,7 +2300,7 @@
           <a:lstStyle/>
           <a:p>
             <a:r>
-              <a:t>Run this live if you can. One command settles a debate teams will otherwise have for half an hour. Words times roughly 1.3 gets you close enough to tokens for this decision.</a:t>
+              <a:t>Measure before you architect. One word count says forty-one thousand words, roughly fifty-five thousand tokens — it fits, so no retrieval is needed today.</a:t>
             </a:r>
           </a:p>
         </p:txBody>
@@ -2370,7 +2370,7 @@
           <a:lstStyle/>
           <a:p>
             <a:r>
-              <a:t>Four warnings, any of which should stop them. The third is the sharpest: if you cannot describe a question that pasting fails to answer, you do not have a retrieval problem yet.</a:t>
+              <a:t>You are over-building if you picked a vector database first, your corpus is under twenty files, you cannot name a query that pasting misses, or it is not even tomorrow's demo step.</a:t>
             </a:r>
           </a:p>
         </p:txBody>
@@ -2440,7 +2440,7 @@
           <a:lstStyle/>
           <a:p>
             <a:r>
-              <a:t>The syllabus says pick the cheaper one that works. Both halves bind — cheapest is not an excuse for something that does not answer the question, and working is not an excuse for spending the afternoon.</a:t>
+              <a:t>The cheapest thing that works. Both halves of that bind — cheapest is no excuse for not answering the question.</a:t>
             </a:r>
           </a:p>
         </p:txBody>
@@ -2510,7 +2510,7 @@
           <a:lstStyle/>
           <a:p>
             <a:r>
-              <a:t>Third objective. For teams that genuinely need retrieval, this is how to get it in minutes rather than hours — and how to prove it was worth building at all.</a:t>
+              <a:t>Third objective: standing up the smallest retrieval layer that answers your questions.</a:t>
             </a:r>
           </a:p>
         </p:txBody>
@@ -2580,7 +2580,7 @@
           <a:lstStyle/>
           <a:p>
             <a:r>
-              <a:t>Introduce it as the baseline, not as a compromise. A Project keeps instructions and files attached to every conversation, which is exactly the cheap end of the retrieval spectrum.</a:t>
+              <a:t>A Claude Project is a workspace with your files always in context.</a:t>
             </a:r>
           </a:p>
         </p:txBody>
@@ -2650,7 +2650,7 @@
           <a:lstStyle/>
           <a:p>
             <a:r>
-              <a:t>Four reasons it is the thing to beat. The fourth matters most for a team demo: a teammate who did not build it can still run it, which is not true of a hand-rolled pipeline.</a:t>
+              <a:t>It is the baseline because standing it up takes minutes, there are no keys, no store and no code, your files are simply there, and anyone on the team can drive it.</a:t>
             </a:r>
           </a:p>
         </p:txBody>
@@ -2720,7 +2720,7 @@
           <a:lstStyle/>
           <a:p>
             <a:r>
-              <a:t>Ten minutes, live, right now if there is time. Step two is where teams cheat by uploading a toy file — the whole point is finding out whether the real corpus behaves.</a:t>
+              <a:t>Three steps. Create the Project and name it after the problem. Add your documents — the real ones, not samples. Then write the instructions, saying how to answer and how not to.</a:t>
             </a:r>
           </a:p>
         </p:txBody>
@@ -2790,7 +2790,7 @@
           <a:lstStyle/>
           <a:p>
             <a:r>
-              <a:t>Four lines that do most of the work. The third and fourth are what make the baseline honest — without them you cannot tell a retrieval failure from a confident invention.</a:t>
+              <a:t>Four lines worth writing: answer only from the attached files, quote the filename you used, and if the files do not cover it say so plainly rather than guessing.</a:t>
             </a:r>
           </a:p>
         </p:txBody>
@@ -2860,7 +2860,7 @@
           <a:lstStyle/>
           <a:p>
             <a:r>
-              <a:t>Open here rather than with tools. Every team arrives eager to list what they will build; almost none has decided what they will refuse. The refusals are what make a 2-day prototype possible.</a:t>
+              <a:t>Before we name a single tool: what will you not build? You arrive knowing what you want to build, and almost nobody has decided what to refuse.</a:t>
             </a:r>
           </a:p>
         </p:txBody>
@@ -2930,7 +2930,7 @@
           <a:lstStyle/>
           <a:p>
             <a:r>
-              <a:t>Curate rather than dump. A single strong example answer improves output more than ten extra documents. The last line is a privacy reminder worth saying out loud.</a:t>
+              <a:t>Put in the documents you must cite, one example of a good answer, your glossary and odd terms — and nothing you would not be willing to ship.</a:t>
             </a:r>
           </a:p>
         </p:txBody>
@@ -3000,7 +3000,7 @@
           <a:lstStyle/>
           <a:p>
             <a:r>
-              <a:t>This is what "baseline to beat" means concretely. If a hand-built retrieval layer does not win at least two rows, the Project was the right answer and you just bought back an afternoon.</a:t>
+              <a:t>This is what beating the baseline means, concretely. More questions answered than the Project, fewer wrong answers, under one afternoon to build, and a teammate can still run it.</a:t>
             </a:r>
           </a:p>
         </p:txBody>
@@ -3070,7 +3070,7 @@
           <a:lstStyle/>
           <a:p>
             <a:r>
-              <a:t>A ten-minute evaluation that prevents a lost afternoon. Writing the questions first is essential — questions written afterwards are always written to flatter whatever you built.</a:t>
+              <a:t>Three steps to find out. Write ten real questions before you build anything. Run both on the same questions, Project first. Then count rather than vibe, and keep whichever wins.</a:t>
             </a:r>
           </a:p>
         </p:txBody>
@@ -3140,7 +3140,7 @@
           <a:lstStyle/>
           <a:p>
             <a:r>
-              <a:t>The ladder, and the rule for climbing it: you may only take a step up when you can point at a specific failure of the step below. Most teams will spend Day 2 on the middle rung.</a:t>
+              <a:t>Three layers, cheapest first. Paste it in — zero build, fine while the corpus is small. A Claude Project — minutes to stand up, and the baseline to beat. Real retrieval — only once you can name what the others missed.</a:t>
             </a:r>
           </a:p>
         </p:txBody>
@@ -3210,7 +3210,7 @@
           <a:lstStyle/>
           <a:p>
             <a:r>
-              <a:t>All four, not any one. A team that can tick all four has a genuine retrieval problem and should build. A team ticking two is about to lose tomorrow morning to plumbing.</a:t>
+              <a:t>Graduate when all four are true: the Project cannot hold it all, you can name what it missed, the corpus changes daily, and you have the afternoon spare.</a:t>
             </a:r>
           </a:p>
         </p:txBody>
@@ -3280,7 +3280,7 @@
           <a:lstStyle/>
           <a:p>
             <a:r>
-              <a:t>A composite of what happens most weeks, not a specific case. The middle row is the one that stings: a demo that shows retrieval working is less persuasive than one that shows the answer being right.</a:t>
+              <a:t>Two teams with the same corpus. One spent an afternoon on chunking, has a search step in the demo, and nobody else can run it. The other spent twenty minutes, has an answer in the demo, and the whole team can run it.</a:t>
             </a:r>
           </a:p>
         </p:txBody>
@@ -3350,7 +3350,7 @@
           <a:lstStyle/>
           <a:p>
             <a:r>
-              <a:t>The exit checklist. Read it slowly and have each team check itself against it. Any unticked line is a conversation to finish in the ten minutes before 2.2, not during it.</a:t>
+              <a:t>You are leaving with every box having a tool name, every box marked build or stub, retrieval decided rather than deferred, and the baseline standing up.</a:t>
             </a:r>
           </a:p>
         </p:txBody>
@@ -3420,7 +3420,7 @@
           <a:lstStyle/>
           <a:p>
             <a:r>
-              <a:t>Four answers to capture in the repo before the break. These become the opening lines of tomorrow's demo caveats, and the first thing Day 3's red team will read.</a:t>
+              <a:t>Four answers to write into the repo now: your riskiest tool choice, your biggest stub, retrieval yes or no, and what would prove it works.</a:t>
             </a:r>
           </a:p>
         </p:txBody>
@@ -3490,7 +3490,7 @@
           <a:lstStyle/>
           <a:p>
             <a:r>
-              <a:t>The gate into 2.2. If a team cannot answer yes, the missing piece is almost always an undecided box rather than a hard technical problem. Find it now.</a:t>
+              <a:t>Last question: can you start building? If not, it is almost always an undecided box rather than a hard technical problem.</a:t>
             </a:r>
           </a:p>
         </p:txBody>
@@ -3560,7 +3560,7 @@
           <a:lstStyle/>
           <a:p>
             <a:r>
-              <a:t>Set up 2.2 so the break has a purpose. Their stack decisions are what make the next session a build session instead of another design session. Nothing chosen here is permanent — but everything chosen here is started.</a:t>
+              <a:t>Next session we take one known-good input end to end, with no edge cases and no error handling, driving each step with Claude Code — and commit the moment it works.</a:t>
             </a:r>
           </a:p>
         </p:txBody>
@@ -3630,7 +3630,7 @@
           <a:lstStyle/>
           <a:p>
             <a:r>
-              <a:t>The bridge from yesterday. They ended Day 1 with owners on every step. An owner still cannot start without knowing which tool they are opening. That is the gap this hour closes.</a:t>
+              <a:t>Yesterday ended with a board saying who does each step. A board is not enough — an owner still cannot start without knowing what their step runs on.</a:t>
             </a:r>
           </a:p>
         </p:txBody>
@@ -3700,7 +3700,7 @@
           <a:lstStyle/>
           <a:p>
             <a:r>
-              <a:t>The shape of the session. Emphasise the order — tools before retrieval. Teams that debate RAG first end up designing a retrieval system for a step that turns out to be stubbed anyway.</a:t>
+              <a:t>Four moves: reopen yesterday's diagram, name one tool per step, mark what stays fake, and reach for retrieval only if you must.</a:t>
             </a:r>
           </a:p>
         </p:txBody>
@@ -3770,7 +3770,7 @@
           <a:lstStyle/>
           <a:p>
             <a:r>
-              <a:t>Set the tone for tool selection. Their novelty budget was already spent on the problem they chose yesterday. Spending it again on the stack is how prototypes die before the demo.</a:t>
+              <a:t>Boring tools, interesting problem. Your novelty budget was spent on the problem you chose yesterday.</a:t>
             </a:r>
           </a:p>
         </p:txBody>
@@ -3840,7 +3840,7 @@
           <a:lstStyle/>
           <a:p>
             <a:r>
-              <a:t>First objective. Walk the map left to right and write a tool name in each box. This is mechanical work, and it should be — the thinking happened yesterday.</a:t>
+              <a:t>First objective: a named tool for every step on the map.</a:t>
             </a:r>
           </a:p>
         </p:txBody>
@@ -3910,7 +3910,7 @@
           <a:lstStyle/>
           <a:p>
             <a:r>
-              <a:t>Define it before they resist it. Low-code is not a lesser tier of engineering; it is a decision about where your effort goes. You are still responsible for the design, just not for the plumbing.</a:t>
+              <a:t>Low-code means assembling pieces that are already built instead of writing them yourself.</a:t>
             </a:r>
           </a:p>
         </p:txBody>

--- a/examples/pptx/immersion-2-1-choosing-the-stack.pptx
+++ b/examples/pptx/immersion-2-1-choosing-the-stack.pptx
@@ -5398,7 +5398,7 @@
             <a:r>
               <a:rPr sz="3400" b="1" i="0">
                 <a:solidFill>
-                  <a:srgbClr val="123A6B"/>
+                  <a:srgbClr val="0072CE"/>
                 </a:solidFill>
                 <a:latin typeface="Arial"/>
               </a:rPr>
@@ -5435,7 +5435,7 @@
             <a:r>
               <a:rPr sz="3400" b="1" i="0">
                 <a:solidFill>
-                  <a:srgbClr val="123A6B"/>
+                  <a:srgbClr val="0072CE"/>
                 </a:solidFill>
                 <a:latin typeface="Arial"/>
               </a:rPr>
@@ -6327,6 +6327,43 @@
         <p:spPr>
           <a:xfrm>
             <a:off x="6233160" y="1499616"/>
+            <a:ext cx="5958840" cy="609600"/>
+          </a:xfrm>
+          <a:prstGeom prst="rect">
+            <a:avLst/>
+          </a:prstGeom>
+          <a:noFill/>
+        </p:spPr>
+        <p:txBody>
+          <a:bodyPr wrap="none" lIns="0" rIns="0">
+            <a:noAutofit/>
+          </a:bodyPr>
+          <a:lstStyle/>
+          <a:p>
+            <a:pPr algn="l"/>
+            <a:r>
+              <a:rPr sz="3400" b="0" i="0">
+                <a:solidFill>
+                  <a:srgbClr val="0A2240"/>
+                </a:solidFill>
+                <a:latin typeface="Arial"/>
+              </a:rPr>
+              <a:t>Built with customers.</a:t>
+            </a:r>
+          </a:p>
+        </p:txBody>
+      </p:sp>
+      <p:sp>
+        <p:nvSpPr>
+          <p:cNvPr id="7" name="TextBox 6"/>
+          <p:cNvSpPr/>
+          <p:nvPr>
+            <p:ph type="body" idx="2"/>
+          </p:nvPr>
+        </p:nvSpPr>
+        <p:spPr>
+          <a:xfrm>
+            <a:off x="6233160" y="2383536"/>
             <a:ext cx="5501640" cy="1127760"/>
           </a:xfrm>
           <a:prstGeom prst="rect">
@@ -6348,44 +6385,7 @@
                 </a:solidFill>
                 <a:latin typeface="Arial"/>
               </a:rPr>
-              <a:t>Built with customers, not just for them.</a:t>
-            </a:r>
-          </a:p>
-        </p:txBody>
-      </p:sp>
-      <p:sp>
-        <p:nvSpPr>
-          <p:cNvPr id="7" name="TextBox 6"/>
-          <p:cNvSpPr/>
-          <p:nvPr>
-            <p:ph type="body" idx="2"/>
-          </p:nvPr>
-        </p:nvSpPr>
-        <p:spPr>
-          <a:xfrm>
-            <a:off x="6233160" y="2901696"/>
-            <a:ext cx="5501640" cy="1127760"/>
-          </a:xfrm>
-          <a:prstGeom prst="rect">
-            <a:avLst/>
-          </a:prstGeom>
-          <a:noFill/>
-        </p:spPr>
-        <p:txBody>
-          <a:bodyPr wrap="square" lIns="0" rIns="0">
-            <a:noAutofit/>
-          </a:bodyPr>
-          <a:lstStyle/>
-          <a:p>
-            <a:pPr algn="l"/>
-            <a:r>
-              <a:rPr sz="3400" b="0" i="0">
-                <a:solidFill>
-                  <a:srgbClr val="0A2240"/>
-                </a:solidFill>
-                <a:latin typeface="Arial"/>
-              </a:rPr>
-              <a:t>60% faster rollout; 50% fewer tickets.</a:t>
+              <a:t>60% faster; 50% fewer tickets</a:t>
             </a:r>
           </a:p>
         </p:txBody>
@@ -6404,405 +6404,6 @@
 </file>
 
 <file path=ppt/slideLayouts/slideLayout18.xml><?xml version="1.0" encoding="utf-8"?>
-<p:sldLayout xmlns:a="http://schemas.openxmlformats.org/drawingml/2006/main" xmlns:r="http://schemas.openxmlformats.org/officeDocument/2006/relationships" xmlns:p="http://schemas.openxmlformats.org/presentationml/2006/main" type="blank" preserve="1">
-  <p:cSld name="slidekit · Card Grid">
-    <p:bg>
-      <p:bgPr>
-        <a:solidFill>
-          <a:srgbClr val="FFFFFF"/>
-        </a:solidFill>
-        <a:effectLst/>
-      </p:bgPr>
-    </p:bg>
-    <p:spTree>
-      <p:nvGrpSpPr>
-        <p:cNvPr id="1" name=""/>
-        <p:cNvGrpSpPr/>
-        <p:nvPr/>
-      </p:nvGrpSpPr>
-      <p:grpSpPr>
-        <a:xfrm>
-          <a:off x="0" y="0"/>
-          <a:ext cx="0" cy="0"/>
-          <a:chOff x="0" y="0"/>
-          <a:chExt cx="0" cy="0"/>
-        </a:xfrm>
-      </p:grpSpPr>
-      <p:sp>
-        <p:nvSpPr>
-          <p:cNvPr id="4" name="Slide Number Placeholder 3"/>
-          <p:cNvSpPr>
-            <a:spLocks noGrp="1"/>
-          </p:cNvSpPr>
-          <p:nvPr>
-            <p:ph type="sldNum" sz="quarter" idx="12"/>
-          </p:nvPr>
-        </p:nvSpPr>
-        <p:spPr>
-          <a:xfrm>
-            <a:off x="11186160" y="6035040"/>
-            <a:ext cx="548640" cy="365760"/>
-          </a:xfrm>
-        </p:spPr>
-        <p:txBody>
-          <a:bodyPr/>
-          <a:lstStyle/>
-          <a:p>
-            <a:fld id="{C1FF6DA9-008F-8B48-92A6-B652298478BF}" type="slidenum">
-              <a:rPr lang="en-US" smtClean="0"/>
-              <a:t>‹#›</a:t>
-            </a:fld>
-            <a:endParaRPr lang="en-US"/>
-          </a:p>
-        </p:txBody>
-      </p:sp>
-      <p:sp>
-        <p:nvSpPr>
-          <p:cNvPr id="5" name="TextBox 4"/>
-          <p:cNvSpPr/>
-          <p:nvPr>
-            <p:ph type="title"/>
-          </p:nvPr>
-        </p:nvSpPr>
-        <p:spPr>
-          <a:xfrm>
-            <a:off x="457200" y="457200"/>
-            <a:ext cx="11277600" cy="768096"/>
-          </a:xfrm>
-          <a:prstGeom prst="rect">
-            <a:avLst/>
-          </a:prstGeom>
-          <a:noFill/>
-        </p:spPr>
-        <p:txBody>
-          <a:bodyPr wrap="none" lIns="0" rIns="0">
-            <a:noAutofit/>
-          </a:bodyPr>
-          <a:lstStyle/>
-          <a:p>
-            <a:pPr algn="l"/>
-            <a:r>
-              <a:rPr sz="4200" b="1" i="0">
-                <a:solidFill>
-                  <a:srgbClr val="0072CE"/>
-                </a:solidFill>
-                <a:latin typeface="Arial"/>
-              </a:rPr>
-              <a:t>What We Offer</a:t>
-            </a:r>
-          </a:p>
-        </p:txBody>
-      </p:sp>
-      <p:sp>
-        <p:nvSpPr>
-          <p:cNvPr id="6" name="TextBox 5"/>
-          <p:cNvSpPr/>
-          <p:nvPr>
-            <p:ph type="body" idx="1"/>
-          </p:nvPr>
-        </p:nvSpPr>
-        <p:spPr>
-          <a:xfrm>
-            <a:off x="457200" y="1499616"/>
-            <a:ext cx="2831366" cy="518159"/>
-          </a:xfrm>
-          <a:prstGeom prst="rect">
-            <a:avLst/>
-          </a:prstGeom>
-          <a:noFill/>
-        </p:spPr>
-        <p:txBody>
-          <a:bodyPr wrap="none" lIns="0" rIns="0">
-            <a:noAutofit/>
-          </a:bodyPr>
-          <a:lstStyle/>
-          <a:p>
-            <a:pPr algn="l"/>
-            <a:r>
-              <a:rPr sz="3400" b="1" i="0">
-                <a:solidFill>
-                  <a:srgbClr val="0A2240"/>
-                </a:solidFill>
-                <a:latin typeface="Arial"/>
-              </a:rPr>
-              <a:t>Insights</a:t>
-            </a:r>
-          </a:p>
-        </p:txBody>
-      </p:sp>
-      <p:sp>
-        <p:nvSpPr>
-          <p:cNvPr id="7" name="TextBox 6"/>
-          <p:cNvSpPr/>
-          <p:nvPr>
-            <p:ph type="body" idx="2"/>
-          </p:nvPr>
-        </p:nvSpPr>
-        <p:spPr>
-          <a:xfrm>
-            <a:off x="457200" y="2154935"/>
-            <a:ext cx="2613660" cy="3605785"/>
-          </a:xfrm>
-          <a:prstGeom prst="rect">
-            <a:avLst/>
-          </a:prstGeom>
-          <a:noFill/>
-        </p:spPr>
-        <p:txBody>
-          <a:bodyPr wrap="square" lIns="0" rIns="0">
-            <a:noAutofit/>
-          </a:bodyPr>
-          <a:lstStyle/>
-          <a:p>
-            <a:pPr algn="l"/>
-            <a:r>
-              <a:rPr sz="3400" b="0" i="0">
-                <a:solidFill>
-                  <a:srgbClr val="0A2240"/>
-                </a:solidFill>
-                <a:latin typeface="Arial"/>
-              </a:rPr>
-              <a:t>Live data and AI analytics.</a:t>
-            </a:r>
-          </a:p>
-        </p:txBody>
-      </p:sp>
-      <p:sp>
-        <p:nvSpPr>
-          <p:cNvPr id="8" name="TextBox 7"/>
-          <p:cNvSpPr/>
-          <p:nvPr>
-            <p:ph type="body" idx="3"/>
-          </p:nvPr>
-        </p:nvSpPr>
-        <p:spPr>
-          <a:xfrm>
-            <a:off x="3345180" y="1499616"/>
-            <a:ext cx="2909292" cy="518159"/>
-          </a:xfrm>
-          <a:prstGeom prst="rect">
-            <a:avLst/>
-          </a:prstGeom>
-          <a:noFill/>
-        </p:spPr>
-        <p:txBody>
-          <a:bodyPr wrap="none" lIns="0" rIns="0">
-            <a:noAutofit/>
-          </a:bodyPr>
-          <a:lstStyle/>
-          <a:p>
-            <a:pPr algn="l"/>
-            <a:r>
-              <a:rPr sz="3400" b="1" i="0">
-                <a:solidFill>
-                  <a:srgbClr val="0A2240"/>
-                </a:solidFill>
-                <a:latin typeface="Arial"/>
-              </a:rPr>
-              <a:t>Security</a:t>
-            </a:r>
-          </a:p>
-        </p:txBody>
-      </p:sp>
-      <p:sp>
-        <p:nvSpPr>
-          <p:cNvPr id="9" name="TextBox 8"/>
-          <p:cNvSpPr/>
-          <p:nvPr>
-            <p:ph type="body" idx="4"/>
-          </p:nvPr>
-        </p:nvSpPr>
-        <p:spPr>
-          <a:xfrm>
-            <a:off x="3345180" y="2154935"/>
-            <a:ext cx="2613660" cy="3605785"/>
-          </a:xfrm>
-          <a:prstGeom prst="rect">
-            <a:avLst/>
-          </a:prstGeom>
-          <a:noFill/>
-        </p:spPr>
-        <p:txBody>
-          <a:bodyPr wrap="square" lIns="0" rIns="0">
-            <a:noAutofit/>
-          </a:bodyPr>
-          <a:lstStyle/>
-          <a:p>
-            <a:pPr algn="l"/>
-            <a:r>
-              <a:rPr sz="3400" b="0" i="0">
-                <a:solidFill>
-                  <a:srgbClr val="0A2240"/>
-                </a:solidFill>
-                <a:latin typeface="Arial"/>
-              </a:rPr>
-              <a:t>Zero-trust, SOC 2 ready.</a:t>
-            </a:r>
-          </a:p>
-        </p:txBody>
-      </p:sp>
-      <p:sp>
-        <p:nvSpPr>
-          <p:cNvPr id="10" name="TextBox 9"/>
-          <p:cNvSpPr/>
-          <p:nvPr>
-            <p:ph type="body" idx="5"/>
-          </p:nvPr>
-        </p:nvSpPr>
-        <p:spPr>
-          <a:xfrm>
-            <a:off x="6233160" y="1499616"/>
-            <a:ext cx="2613660" cy="518159"/>
-          </a:xfrm>
-          <a:prstGeom prst="rect">
-            <a:avLst/>
-          </a:prstGeom>
-          <a:noFill/>
-        </p:spPr>
-        <p:txBody>
-          <a:bodyPr wrap="none" lIns="0" rIns="0">
-            <a:noAutofit/>
-          </a:bodyPr>
-          <a:lstStyle/>
-          <a:p>
-            <a:pPr algn="l"/>
-            <a:r>
-              <a:rPr sz="3400" b="1" i="0">
-                <a:solidFill>
-                  <a:srgbClr val="0A2240"/>
-                </a:solidFill>
-                <a:latin typeface="Arial"/>
-              </a:rPr>
-              <a:t>Speed</a:t>
-            </a:r>
-          </a:p>
-        </p:txBody>
-      </p:sp>
-      <p:sp>
-        <p:nvSpPr>
-          <p:cNvPr id="11" name="TextBox 10"/>
-          <p:cNvSpPr/>
-          <p:nvPr>
-            <p:ph type="body" idx="6"/>
-          </p:nvPr>
-        </p:nvSpPr>
-        <p:spPr>
-          <a:xfrm>
-            <a:off x="6233160" y="2154935"/>
-            <a:ext cx="2613660" cy="3605785"/>
-          </a:xfrm>
-          <a:prstGeom prst="rect">
-            <a:avLst/>
-          </a:prstGeom>
-          <a:noFill/>
-        </p:spPr>
-        <p:txBody>
-          <a:bodyPr wrap="square" lIns="0" rIns="0">
-            <a:noAutofit/>
-          </a:bodyPr>
-          <a:lstStyle/>
-          <a:p>
-            <a:pPr algn="l"/>
-            <a:r>
-              <a:rPr sz="3400" b="0" i="0">
-                <a:solidFill>
-                  <a:srgbClr val="0A2240"/>
-                </a:solidFill>
-                <a:latin typeface="Arial"/>
-              </a:rPr>
-              <a:t>Sub-100ms p99 latency.</a:t>
-            </a:r>
-          </a:p>
-        </p:txBody>
-      </p:sp>
-      <p:sp>
-        <p:nvSpPr>
-          <p:cNvPr id="12" name="TextBox 11"/>
-          <p:cNvSpPr/>
-          <p:nvPr>
-            <p:ph type="body" idx="7"/>
-          </p:nvPr>
-        </p:nvSpPr>
-        <p:spPr>
-          <a:xfrm>
-            <a:off x="9121140" y="1499616"/>
-            <a:ext cx="2613660" cy="518159"/>
-          </a:xfrm>
-          <a:prstGeom prst="rect">
-            <a:avLst/>
-          </a:prstGeom>
-          <a:noFill/>
-        </p:spPr>
-        <p:txBody>
-          <a:bodyPr wrap="none" lIns="0" rIns="0">
-            <a:noAutofit/>
-          </a:bodyPr>
-          <a:lstStyle/>
-          <a:p>
-            <a:pPr algn="l"/>
-            <a:r>
-              <a:rPr sz="3400" b="1" i="0">
-                <a:solidFill>
-                  <a:srgbClr val="0A2240"/>
-                </a:solidFill>
-                <a:latin typeface="Arial"/>
-              </a:rPr>
-              <a:t>APIs</a:t>
-            </a:r>
-          </a:p>
-        </p:txBody>
-      </p:sp>
-      <p:sp>
-        <p:nvSpPr>
-          <p:cNvPr id="13" name="TextBox 12"/>
-          <p:cNvSpPr/>
-          <p:nvPr>
-            <p:ph type="body" idx="8"/>
-          </p:nvPr>
-        </p:nvSpPr>
-        <p:spPr>
-          <a:xfrm>
-            <a:off x="9121140" y="2154935"/>
-            <a:ext cx="2613660" cy="3605785"/>
-          </a:xfrm>
-          <a:prstGeom prst="rect">
-            <a:avLst/>
-          </a:prstGeom>
-          <a:noFill/>
-        </p:spPr>
-        <p:txBody>
-          <a:bodyPr wrap="square" lIns="0" rIns="0">
-            <a:noAutofit/>
-          </a:bodyPr>
-          <a:lstStyle/>
-          <a:p>
-            <a:pPr algn="l"/>
-            <a:r>
-              <a:rPr sz="3400" b="0" i="0">
-                <a:solidFill>
-                  <a:srgbClr val="0A2240"/>
-                </a:solidFill>
-                <a:latin typeface="Arial"/>
-              </a:rPr>
-              <a:t>300+ open connectors.</a:t>
-            </a:r>
-          </a:p>
-        </p:txBody>
-      </p:sp>
-    </p:spTree>
-    <p:extLst>
-      <p:ext uri="{BB962C8B-B14F-4D97-AF65-F5344CB8AC3E}">
-        <p14:creationId xmlns:p14="http://schemas.microsoft.com/office/powerpoint/2010/main" val="1212999818"/>
-      </p:ext>
-    </p:extLst>
-  </p:cSld>
-  <p:clrMapOvr>
-    <a:masterClrMapping/>
-  </p:clrMapOvr>
-</p:sldLayout>
-</file>
-
-<file path=ppt/slideLayouts/slideLayout19.xml><?xml version="1.0" encoding="utf-8"?>
 <p:sldLayout xmlns:a="http://schemas.openxmlformats.org/drawingml/2006/main" xmlns:r="http://schemas.openxmlformats.org/officeDocument/2006/relationships" xmlns:p="http://schemas.openxmlformats.org/presentationml/2006/main" type="blank" preserve="1">
   <p:cSld name="slidekit · Section Divider">
     <p:bg>
@@ -6957,6 +6558,511 @@
                 <a:latin typeface="Arial"/>
               </a:rPr>
               <a:t>Where We Stand Today</a:t>
+            </a:r>
+          </a:p>
+        </p:txBody>
+      </p:sp>
+    </p:spTree>
+    <p:extLst>
+      <p:ext uri="{BB962C8B-B14F-4D97-AF65-F5344CB8AC3E}">
+        <p14:creationId xmlns:p14="http://schemas.microsoft.com/office/powerpoint/2010/main" val="1212999818"/>
+      </p:ext>
+    </p:extLst>
+  </p:cSld>
+  <p:clrMapOvr>
+    <a:masterClrMapping/>
+  </p:clrMapOvr>
+</p:sldLayout>
+</file>
+
+<file path=ppt/slideLayouts/slideLayout19.xml><?xml version="1.0" encoding="utf-8"?>
+<p:sldLayout xmlns:a="http://schemas.openxmlformats.org/drawingml/2006/main" xmlns:r="http://schemas.openxmlformats.org/officeDocument/2006/relationships" xmlns:p="http://schemas.openxmlformats.org/presentationml/2006/main" type="blank" preserve="1">
+  <p:cSld name="slidekit · Agenda">
+    <p:bg>
+      <p:bgPr>
+        <a:solidFill>
+          <a:srgbClr val="FFFFFF"/>
+        </a:solidFill>
+        <a:effectLst/>
+      </p:bgPr>
+    </p:bg>
+    <p:spTree>
+      <p:nvGrpSpPr>
+        <p:cNvPr id="1" name=""/>
+        <p:cNvGrpSpPr/>
+        <p:nvPr/>
+      </p:nvGrpSpPr>
+      <p:grpSpPr>
+        <a:xfrm>
+          <a:off x="0" y="0"/>
+          <a:ext cx="0" cy="0"/>
+          <a:chOff x="0" y="0"/>
+          <a:chExt cx="0" cy="0"/>
+        </a:xfrm>
+      </p:grpSpPr>
+      <p:sp>
+        <p:nvSpPr>
+          <p:cNvPr id="4" name="Slide Number Placeholder 3"/>
+          <p:cNvSpPr>
+            <a:spLocks noGrp="1"/>
+          </p:cNvSpPr>
+          <p:nvPr>
+            <p:ph type="sldNum" sz="quarter" idx="12"/>
+          </p:nvPr>
+        </p:nvSpPr>
+        <p:spPr>
+          <a:xfrm>
+            <a:off x="11186160" y="6035040"/>
+            <a:ext cx="548640" cy="365760"/>
+          </a:xfrm>
+        </p:spPr>
+        <p:txBody>
+          <a:bodyPr/>
+          <a:lstStyle/>
+          <a:p>
+            <a:fld id="{C1FF6DA9-008F-8B48-92A6-B652298478BF}" type="slidenum">
+              <a:rPr lang="en-US" smtClean="0"/>
+              <a:t>‹#›</a:t>
+            </a:fld>
+            <a:endParaRPr lang="en-US"/>
+          </a:p>
+        </p:txBody>
+      </p:sp>
+      <p:sp>
+        <p:nvSpPr>
+          <p:cNvPr id="5" name="TextBox 4"/>
+          <p:cNvSpPr/>
+          <p:nvPr>
+            <p:ph type="title"/>
+          </p:nvPr>
+        </p:nvSpPr>
+        <p:spPr>
+          <a:xfrm>
+            <a:off x="457200" y="457200"/>
+            <a:ext cx="11277600" cy="768096"/>
+          </a:xfrm>
+          <a:prstGeom prst="rect">
+            <a:avLst/>
+          </a:prstGeom>
+          <a:noFill/>
+        </p:spPr>
+        <p:txBody>
+          <a:bodyPr wrap="none" lIns="0" rIns="0">
+            <a:noAutofit/>
+          </a:bodyPr>
+          <a:lstStyle/>
+          <a:p>
+            <a:pPr algn="l"/>
+            <a:r>
+              <a:rPr sz="4200" b="1" i="0">
+                <a:solidFill>
+                  <a:srgbClr val="0072CE"/>
+                </a:solidFill>
+                <a:latin typeface="Arial"/>
+              </a:rPr>
+              <a:t>What We Will Cover</a:t>
+            </a:r>
+          </a:p>
+        </p:txBody>
+      </p:sp>
+      <p:sp>
+        <p:nvSpPr>
+          <p:cNvPr id="6" name="Rectangle 5"/>
+          <p:cNvSpPr/>
+          <p:nvPr>
+            <p:ph type="body" idx="1"/>
+          </p:nvPr>
+        </p:nvSpPr>
+        <p:spPr>
+          <a:xfrm>
+            <a:off x="457200" y="1280160"/>
+            <a:ext cx="11277600" cy="64008"/>
+          </a:xfrm>
+          <a:prstGeom prst="rect">
+            <a:avLst/>
+          </a:prstGeom>
+          <a:solidFill>
+            <a:srgbClr val="0072CE"/>
+          </a:solidFill>
+          <a:ln>
+            <a:noFill/>
+          </a:ln>
+          <a:effectLst/>
+        </p:spPr>
+        <p:txBody>
+          <a:bodyPr rtlCol="0" anchor="ctr"/>
+          <a:lstStyle/>
+          <a:p>
+            <a:pPr algn="ctr"/>
+          </a:p>
+        </p:txBody>
+      </p:sp>
+      <p:sp>
+        <p:nvSpPr>
+          <p:cNvPr id="7" name="TextBox 6"/>
+          <p:cNvSpPr/>
+          <p:nvPr>
+            <p:ph type="body" idx="2"/>
+          </p:nvPr>
+        </p:nvSpPr>
+        <p:spPr>
+          <a:xfrm>
+            <a:off x="457200" y="1618488"/>
+            <a:ext cx="951348" cy="518159"/>
+          </a:xfrm>
+          <a:prstGeom prst="rect">
+            <a:avLst/>
+          </a:prstGeom>
+          <a:noFill/>
+        </p:spPr>
+        <p:txBody>
+          <a:bodyPr wrap="none" lIns="0" rIns="0">
+            <a:noAutofit/>
+          </a:bodyPr>
+          <a:lstStyle/>
+          <a:p>
+            <a:pPr algn="l"/>
+            <a:r>
+              <a:rPr sz="3400" b="1" i="0">
+                <a:solidFill>
+                  <a:srgbClr val="0072CE"/>
+                </a:solidFill>
+                <a:latin typeface="Arial"/>
+              </a:rPr>
+              <a:t>01</a:t>
+            </a:r>
+          </a:p>
+        </p:txBody>
+      </p:sp>
+      <p:sp>
+        <p:nvSpPr>
+          <p:cNvPr id="8" name="TextBox 7"/>
+          <p:cNvSpPr/>
+          <p:nvPr>
+            <p:ph type="body" idx="3"/>
+          </p:nvPr>
+        </p:nvSpPr>
+        <p:spPr>
+          <a:xfrm>
+            <a:off x="1371600" y="1618488"/>
+            <a:ext cx="10363200" cy="518159"/>
+          </a:xfrm>
+          <a:prstGeom prst="rect">
+            <a:avLst/>
+          </a:prstGeom>
+          <a:noFill/>
+        </p:spPr>
+        <p:txBody>
+          <a:bodyPr wrap="none" lIns="0" rIns="0">
+            <a:noAutofit/>
+          </a:bodyPr>
+          <a:lstStyle/>
+          <a:p>
+            <a:pPr algn="l"/>
+            <a:r>
+              <a:rPr sz="3400" b="0" i="0">
+                <a:solidFill>
+                  <a:srgbClr val="0A2240"/>
+                </a:solidFill>
+                <a:latin typeface="Arial"/>
+              </a:rPr>
+              <a:t>Performance against targets</a:t>
+            </a:r>
+          </a:p>
+        </p:txBody>
+      </p:sp>
+      <p:sp>
+        <p:nvSpPr>
+          <p:cNvPr id="9" name="TextBox 8"/>
+          <p:cNvSpPr/>
+          <p:nvPr>
+            <p:ph type="body" idx="4"/>
+          </p:nvPr>
+        </p:nvSpPr>
+        <p:spPr>
+          <a:xfrm>
+            <a:off x="457200" y="2501798"/>
+            <a:ext cx="951348" cy="518159"/>
+          </a:xfrm>
+          <a:prstGeom prst="rect">
+            <a:avLst/>
+          </a:prstGeom>
+          <a:noFill/>
+        </p:spPr>
+        <p:txBody>
+          <a:bodyPr wrap="none" lIns="0" rIns="0">
+            <a:noAutofit/>
+          </a:bodyPr>
+          <a:lstStyle/>
+          <a:p>
+            <a:pPr algn="l"/>
+            <a:r>
+              <a:rPr sz="3400" b="1" i="0">
+                <a:solidFill>
+                  <a:srgbClr val="0072CE"/>
+                </a:solidFill>
+                <a:latin typeface="Arial"/>
+              </a:rPr>
+              <a:t>02</a:t>
+            </a:r>
+          </a:p>
+        </p:txBody>
+      </p:sp>
+      <p:sp>
+        <p:nvSpPr>
+          <p:cNvPr id="10" name="TextBox 9"/>
+          <p:cNvSpPr/>
+          <p:nvPr>
+            <p:ph type="body" idx="5"/>
+          </p:nvPr>
+        </p:nvSpPr>
+        <p:spPr>
+          <a:xfrm>
+            <a:off x="1371600" y="2501798"/>
+            <a:ext cx="10363200" cy="518159"/>
+          </a:xfrm>
+          <a:prstGeom prst="rect">
+            <a:avLst/>
+          </a:prstGeom>
+          <a:noFill/>
+        </p:spPr>
+        <p:txBody>
+          <a:bodyPr wrap="none" lIns="0" rIns="0">
+            <a:noAutofit/>
+          </a:bodyPr>
+          <a:lstStyle/>
+          <a:p>
+            <a:pPr algn="l"/>
+            <a:r>
+              <a:rPr sz="3400" b="0" i="0">
+                <a:solidFill>
+                  <a:srgbClr val="0A2240"/>
+                </a:solidFill>
+                <a:latin typeface="Arial"/>
+              </a:rPr>
+              <a:t>Customer and market signals</a:t>
+            </a:r>
+          </a:p>
+        </p:txBody>
+      </p:sp>
+      <p:sp>
+        <p:nvSpPr>
+          <p:cNvPr id="11" name="TextBox 10"/>
+          <p:cNvSpPr/>
+          <p:nvPr>
+            <p:ph type="body" idx="6"/>
+          </p:nvPr>
+        </p:nvSpPr>
+        <p:spPr>
+          <a:xfrm>
+            <a:off x="457200" y="3385108"/>
+            <a:ext cx="951348" cy="518159"/>
+          </a:xfrm>
+          <a:prstGeom prst="rect">
+            <a:avLst/>
+          </a:prstGeom>
+          <a:noFill/>
+        </p:spPr>
+        <p:txBody>
+          <a:bodyPr wrap="none" lIns="0" rIns="0">
+            <a:noAutofit/>
+          </a:bodyPr>
+          <a:lstStyle/>
+          <a:p>
+            <a:pPr algn="l"/>
+            <a:r>
+              <a:rPr sz="3400" b="1" i="0">
+                <a:solidFill>
+                  <a:srgbClr val="0072CE"/>
+                </a:solidFill>
+                <a:latin typeface="Arial"/>
+              </a:rPr>
+              <a:t>03</a:t>
+            </a:r>
+          </a:p>
+        </p:txBody>
+      </p:sp>
+      <p:sp>
+        <p:nvSpPr>
+          <p:cNvPr id="12" name="TextBox 11"/>
+          <p:cNvSpPr/>
+          <p:nvPr>
+            <p:ph type="body" idx="7"/>
+          </p:nvPr>
+        </p:nvSpPr>
+        <p:spPr>
+          <a:xfrm>
+            <a:off x="1371600" y="3385108"/>
+            <a:ext cx="10363200" cy="518159"/>
+          </a:xfrm>
+          <a:prstGeom prst="rect">
+            <a:avLst/>
+          </a:prstGeom>
+          <a:noFill/>
+        </p:spPr>
+        <p:txBody>
+          <a:bodyPr wrap="none" lIns="0" rIns="0">
+            <a:noAutofit/>
+          </a:bodyPr>
+          <a:lstStyle/>
+          <a:p>
+            <a:pPr algn="l"/>
+            <a:r>
+              <a:rPr sz="3400" b="0" i="0">
+                <a:solidFill>
+                  <a:srgbClr val="0A2240"/>
+                </a:solidFill>
+                <a:latin typeface="Arial"/>
+              </a:rPr>
+              <a:t>Operational health and risks</a:t>
+            </a:r>
+          </a:p>
+        </p:txBody>
+      </p:sp>
+      <p:sp>
+        <p:nvSpPr>
+          <p:cNvPr id="13" name="TextBox 12"/>
+          <p:cNvSpPr/>
+          <p:nvPr>
+            <p:ph type="body" idx="8"/>
+          </p:nvPr>
+        </p:nvSpPr>
+        <p:spPr>
+          <a:xfrm>
+            <a:off x="457200" y="4268418"/>
+            <a:ext cx="951348" cy="518159"/>
+          </a:xfrm>
+          <a:prstGeom prst="rect">
+            <a:avLst/>
+          </a:prstGeom>
+          <a:noFill/>
+        </p:spPr>
+        <p:txBody>
+          <a:bodyPr wrap="none" lIns="0" rIns="0">
+            <a:noAutofit/>
+          </a:bodyPr>
+          <a:lstStyle/>
+          <a:p>
+            <a:pPr algn="l"/>
+            <a:r>
+              <a:rPr sz="3400" b="1" i="0">
+                <a:solidFill>
+                  <a:srgbClr val="0072CE"/>
+                </a:solidFill>
+                <a:latin typeface="Arial"/>
+              </a:rPr>
+              <a:t>04</a:t>
+            </a:r>
+          </a:p>
+        </p:txBody>
+      </p:sp>
+      <p:sp>
+        <p:nvSpPr>
+          <p:cNvPr id="14" name="TextBox 13"/>
+          <p:cNvSpPr/>
+          <p:nvPr>
+            <p:ph type="body" idx="9"/>
+          </p:nvPr>
+        </p:nvSpPr>
+        <p:spPr>
+          <a:xfrm>
+            <a:off x="1371600" y="4268418"/>
+            <a:ext cx="10363200" cy="518159"/>
+          </a:xfrm>
+          <a:prstGeom prst="rect">
+            <a:avLst/>
+          </a:prstGeom>
+          <a:noFill/>
+        </p:spPr>
+        <p:txBody>
+          <a:bodyPr wrap="none" lIns="0" rIns="0">
+            <a:noAutofit/>
+          </a:bodyPr>
+          <a:lstStyle/>
+          <a:p>
+            <a:pPr algn="l"/>
+            <a:r>
+              <a:rPr sz="3400" b="0" i="0">
+                <a:solidFill>
+                  <a:srgbClr val="0A2240"/>
+                </a:solidFill>
+                <a:latin typeface="Arial"/>
+              </a:rPr>
+              <a:t>Roadmap for next quarter</a:t>
+            </a:r>
+          </a:p>
+        </p:txBody>
+      </p:sp>
+      <p:sp>
+        <p:nvSpPr>
+          <p:cNvPr id="15" name="TextBox 14"/>
+          <p:cNvSpPr/>
+          <p:nvPr>
+            <p:ph type="body" idx="13"/>
+          </p:nvPr>
+        </p:nvSpPr>
+        <p:spPr>
+          <a:xfrm>
+            <a:off x="457200" y="5151728"/>
+            <a:ext cx="951348" cy="518159"/>
+          </a:xfrm>
+          <a:prstGeom prst="rect">
+            <a:avLst/>
+          </a:prstGeom>
+          <a:noFill/>
+        </p:spPr>
+        <p:txBody>
+          <a:bodyPr wrap="none" lIns="0" rIns="0">
+            <a:noAutofit/>
+          </a:bodyPr>
+          <a:lstStyle/>
+          <a:p>
+            <a:pPr algn="l"/>
+            <a:r>
+              <a:rPr sz="3400" b="1" i="0">
+                <a:solidFill>
+                  <a:srgbClr val="0072CE"/>
+                </a:solidFill>
+                <a:latin typeface="Arial"/>
+              </a:rPr>
+              <a:t>05</a:t>
+            </a:r>
+          </a:p>
+        </p:txBody>
+      </p:sp>
+      <p:sp>
+        <p:nvSpPr>
+          <p:cNvPr id="16" name="TextBox 15"/>
+          <p:cNvSpPr/>
+          <p:nvPr>
+            <p:ph type="body" idx="14"/>
+          </p:nvPr>
+        </p:nvSpPr>
+        <p:spPr>
+          <a:xfrm>
+            <a:off x="1371600" y="5151728"/>
+            <a:ext cx="10363200" cy="518159"/>
+          </a:xfrm>
+          <a:prstGeom prst="rect">
+            <a:avLst/>
+          </a:prstGeom>
+          <a:noFill/>
+        </p:spPr>
+        <p:txBody>
+          <a:bodyPr wrap="none" lIns="0" rIns="0">
+            <a:noAutofit/>
+          </a:bodyPr>
+          <a:lstStyle/>
+          <a:p>
+            <a:pPr algn="l"/>
+            <a:r>
+              <a:rPr sz="3400" b="0" i="0">
+                <a:solidFill>
+                  <a:srgbClr val="0A2240"/>
+                </a:solidFill>
+                <a:latin typeface="Arial"/>
+              </a:rPr>
+              <a:t>Decisions we need today</a:t>
             </a:r>
           </a:p>
         </p:txBody>
@@ -7146,511 +7252,6 @@
 
 <file path=ppt/slideLayouts/slideLayout20.xml><?xml version="1.0" encoding="utf-8"?>
 <p:sldLayout xmlns:a="http://schemas.openxmlformats.org/drawingml/2006/main" xmlns:r="http://schemas.openxmlformats.org/officeDocument/2006/relationships" xmlns:p="http://schemas.openxmlformats.org/presentationml/2006/main" type="blank" preserve="1">
-  <p:cSld name="slidekit · Agenda">
-    <p:bg>
-      <p:bgPr>
-        <a:solidFill>
-          <a:srgbClr val="FFFFFF"/>
-        </a:solidFill>
-        <a:effectLst/>
-      </p:bgPr>
-    </p:bg>
-    <p:spTree>
-      <p:nvGrpSpPr>
-        <p:cNvPr id="1" name=""/>
-        <p:cNvGrpSpPr/>
-        <p:nvPr/>
-      </p:nvGrpSpPr>
-      <p:grpSpPr>
-        <a:xfrm>
-          <a:off x="0" y="0"/>
-          <a:ext cx="0" cy="0"/>
-          <a:chOff x="0" y="0"/>
-          <a:chExt cx="0" cy="0"/>
-        </a:xfrm>
-      </p:grpSpPr>
-      <p:sp>
-        <p:nvSpPr>
-          <p:cNvPr id="4" name="Slide Number Placeholder 3"/>
-          <p:cNvSpPr>
-            <a:spLocks noGrp="1"/>
-          </p:cNvSpPr>
-          <p:nvPr>
-            <p:ph type="sldNum" sz="quarter" idx="12"/>
-          </p:nvPr>
-        </p:nvSpPr>
-        <p:spPr>
-          <a:xfrm>
-            <a:off x="11186160" y="6035040"/>
-            <a:ext cx="548640" cy="365760"/>
-          </a:xfrm>
-        </p:spPr>
-        <p:txBody>
-          <a:bodyPr/>
-          <a:lstStyle/>
-          <a:p>
-            <a:fld id="{C1FF6DA9-008F-8B48-92A6-B652298478BF}" type="slidenum">
-              <a:rPr lang="en-US" smtClean="0"/>
-              <a:t>‹#›</a:t>
-            </a:fld>
-            <a:endParaRPr lang="en-US"/>
-          </a:p>
-        </p:txBody>
-      </p:sp>
-      <p:sp>
-        <p:nvSpPr>
-          <p:cNvPr id="5" name="TextBox 4"/>
-          <p:cNvSpPr/>
-          <p:nvPr>
-            <p:ph type="title"/>
-          </p:nvPr>
-        </p:nvSpPr>
-        <p:spPr>
-          <a:xfrm>
-            <a:off x="457200" y="457200"/>
-            <a:ext cx="11277600" cy="768096"/>
-          </a:xfrm>
-          <a:prstGeom prst="rect">
-            <a:avLst/>
-          </a:prstGeom>
-          <a:noFill/>
-        </p:spPr>
-        <p:txBody>
-          <a:bodyPr wrap="none" lIns="0" rIns="0">
-            <a:noAutofit/>
-          </a:bodyPr>
-          <a:lstStyle/>
-          <a:p>
-            <a:pPr algn="l"/>
-            <a:r>
-              <a:rPr sz="4200" b="1" i="0">
-                <a:solidFill>
-                  <a:srgbClr val="0072CE"/>
-                </a:solidFill>
-                <a:latin typeface="Arial"/>
-              </a:rPr>
-              <a:t>What We Will Cover</a:t>
-            </a:r>
-          </a:p>
-        </p:txBody>
-      </p:sp>
-      <p:sp>
-        <p:nvSpPr>
-          <p:cNvPr id="6" name="Rectangle 5"/>
-          <p:cNvSpPr/>
-          <p:nvPr>
-            <p:ph type="body" idx="1"/>
-          </p:nvPr>
-        </p:nvSpPr>
-        <p:spPr>
-          <a:xfrm>
-            <a:off x="457200" y="1280160"/>
-            <a:ext cx="11277600" cy="64008"/>
-          </a:xfrm>
-          <a:prstGeom prst="rect">
-            <a:avLst/>
-          </a:prstGeom>
-          <a:solidFill>
-            <a:srgbClr val="0072CE"/>
-          </a:solidFill>
-          <a:ln>
-            <a:noFill/>
-          </a:ln>
-          <a:effectLst/>
-        </p:spPr>
-        <p:txBody>
-          <a:bodyPr rtlCol="0" anchor="ctr"/>
-          <a:lstStyle/>
-          <a:p>
-            <a:pPr algn="ctr"/>
-          </a:p>
-        </p:txBody>
-      </p:sp>
-      <p:sp>
-        <p:nvSpPr>
-          <p:cNvPr id="7" name="TextBox 6"/>
-          <p:cNvSpPr/>
-          <p:nvPr>
-            <p:ph type="body" idx="2"/>
-          </p:nvPr>
-        </p:nvSpPr>
-        <p:spPr>
-          <a:xfrm>
-            <a:off x="457200" y="1618488"/>
-            <a:ext cx="951348" cy="518159"/>
-          </a:xfrm>
-          <a:prstGeom prst="rect">
-            <a:avLst/>
-          </a:prstGeom>
-          <a:noFill/>
-        </p:spPr>
-        <p:txBody>
-          <a:bodyPr wrap="none" lIns="0" rIns="0">
-            <a:noAutofit/>
-          </a:bodyPr>
-          <a:lstStyle/>
-          <a:p>
-            <a:pPr algn="l"/>
-            <a:r>
-              <a:rPr sz="3400" b="1" i="0">
-                <a:solidFill>
-                  <a:srgbClr val="0072CE"/>
-                </a:solidFill>
-                <a:latin typeface="Arial"/>
-              </a:rPr>
-              <a:t>01</a:t>
-            </a:r>
-          </a:p>
-        </p:txBody>
-      </p:sp>
-      <p:sp>
-        <p:nvSpPr>
-          <p:cNvPr id="8" name="TextBox 7"/>
-          <p:cNvSpPr/>
-          <p:nvPr>
-            <p:ph type="body" idx="3"/>
-          </p:nvPr>
-        </p:nvSpPr>
-        <p:spPr>
-          <a:xfrm>
-            <a:off x="1371600" y="1618488"/>
-            <a:ext cx="10363200" cy="518159"/>
-          </a:xfrm>
-          <a:prstGeom prst="rect">
-            <a:avLst/>
-          </a:prstGeom>
-          <a:noFill/>
-        </p:spPr>
-        <p:txBody>
-          <a:bodyPr wrap="none" lIns="0" rIns="0">
-            <a:noAutofit/>
-          </a:bodyPr>
-          <a:lstStyle/>
-          <a:p>
-            <a:pPr algn="l"/>
-            <a:r>
-              <a:rPr sz="3400" b="0" i="0">
-                <a:solidFill>
-                  <a:srgbClr val="0A2240"/>
-                </a:solidFill>
-                <a:latin typeface="Arial"/>
-              </a:rPr>
-              <a:t>Performance against targets</a:t>
-            </a:r>
-          </a:p>
-        </p:txBody>
-      </p:sp>
-      <p:sp>
-        <p:nvSpPr>
-          <p:cNvPr id="9" name="TextBox 8"/>
-          <p:cNvSpPr/>
-          <p:nvPr>
-            <p:ph type="body" idx="4"/>
-          </p:nvPr>
-        </p:nvSpPr>
-        <p:spPr>
-          <a:xfrm>
-            <a:off x="457200" y="2501798"/>
-            <a:ext cx="951348" cy="518159"/>
-          </a:xfrm>
-          <a:prstGeom prst="rect">
-            <a:avLst/>
-          </a:prstGeom>
-          <a:noFill/>
-        </p:spPr>
-        <p:txBody>
-          <a:bodyPr wrap="none" lIns="0" rIns="0">
-            <a:noAutofit/>
-          </a:bodyPr>
-          <a:lstStyle/>
-          <a:p>
-            <a:pPr algn="l"/>
-            <a:r>
-              <a:rPr sz="3400" b="1" i="0">
-                <a:solidFill>
-                  <a:srgbClr val="0072CE"/>
-                </a:solidFill>
-                <a:latin typeface="Arial"/>
-              </a:rPr>
-              <a:t>02</a:t>
-            </a:r>
-          </a:p>
-        </p:txBody>
-      </p:sp>
-      <p:sp>
-        <p:nvSpPr>
-          <p:cNvPr id="10" name="TextBox 9"/>
-          <p:cNvSpPr/>
-          <p:nvPr>
-            <p:ph type="body" idx="5"/>
-          </p:nvPr>
-        </p:nvSpPr>
-        <p:spPr>
-          <a:xfrm>
-            <a:off x="1371600" y="2501798"/>
-            <a:ext cx="10363200" cy="518159"/>
-          </a:xfrm>
-          <a:prstGeom prst="rect">
-            <a:avLst/>
-          </a:prstGeom>
-          <a:noFill/>
-        </p:spPr>
-        <p:txBody>
-          <a:bodyPr wrap="none" lIns="0" rIns="0">
-            <a:noAutofit/>
-          </a:bodyPr>
-          <a:lstStyle/>
-          <a:p>
-            <a:pPr algn="l"/>
-            <a:r>
-              <a:rPr sz="3400" b="0" i="0">
-                <a:solidFill>
-                  <a:srgbClr val="0A2240"/>
-                </a:solidFill>
-                <a:latin typeface="Arial"/>
-              </a:rPr>
-              <a:t>Customer and market signals</a:t>
-            </a:r>
-          </a:p>
-        </p:txBody>
-      </p:sp>
-      <p:sp>
-        <p:nvSpPr>
-          <p:cNvPr id="11" name="TextBox 10"/>
-          <p:cNvSpPr/>
-          <p:nvPr>
-            <p:ph type="body" idx="6"/>
-          </p:nvPr>
-        </p:nvSpPr>
-        <p:spPr>
-          <a:xfrm>
-            <a:off x="457200" y="3385108"/>
-            <a:ext cx="951348" cy="518159"/>
-          </a:xfrm>
-          <a:prstGeom prst="rect">
-            <a:avLst/>
-          </a:prstGeom>
-          <a:noFill/>
-        </p:spPr>
-        <p:txBody>
-          <a:bodyPr wrap="none" lIns="0" rIns="0">
-            <a:noAutofit/>
-          </a:bodyPr>
-          <a:lstStyle/>
-          <a:p>
-            <a:pPr algn="l"/>
-            <a:r>
-              <a:rPr sz="3400" b="1" i="0">
-                <a:solidFill>
-                  <a:srgbClr val="0072CE"/>
-                </a:solidFill>
-                <a:latin typeface="Arial"/>
-              </a:rPr>
-              <a:t>03</a:t>
-            </a:r>
-          </a:p>
-        </p:txBody>
-      </p:sp>
-      <p:sp>
-        <p:nvSpPr>
-          <p:cNvPr id="12" name="TextBox 11"/>
-          <p:cNvSpPr/>
-          <p:nvPr>
-            <p:ph type="body" idx="7"/>
-          </p:nvPr>
-        </p:nvSpPr>
-        <p:spPr>
-          <a:xfrm>
-            <a:off x="1371600" y="3385108"/>
-            <a:ext cx="10363200" cy="518159"/>
-          </a:xfrm>
-          <a:prstGeom prst="rect">
-            <a:avLst/>
-          </a:prstGeom>
-          <a:noFill/>
-        </p:spPr>
-        <p:txBody>
-          <a:bodyPr wrap="none" lIns="0" rIns="0">
-            <a:noAutofit/>
-          </a:bodyPr>
-          <a:lstStyle/>
-          <a:p>
-            <a:pPr algn="l"/>
-            <a:r>
-              <a:rPr sz="3400" b="0" i="0">
-                <a:solidFill>
-                  <a:srgbClr val="0A2240"/>
-                </a:solidFill>
-                <a:latin typeface="Arial"/>
-              </a:rPr>
-              <a:t>Operational health and risks</a:t>
-            </a:r>
-          </a:p>
-        </p:txBody>
-      </p:sp>
-      <p:sp>
-        <p:nvSpPr>
-          <p:cNvPr id="13" name="TextBox 12"/>
-          <p:cNvSpPr/>
-          <p:nvPr>
-            <p:ph type="body" idx="8"/>
-          </p:nvPr>
-        </p:nvSpPr>
-        <p:spPr>
-          <a:xfrm>
-            <a:off x="457200" y="4268418"/>
-            <a:ext cx="951348" cy="518159"/>
-          </a:xfrm>
-          <a:prstGeom prst="rect">
-            <a:avLst/>
-          </a:prstGeom>
-          <a:noFill/>
-        </p:spPr>
-        <p:txBody>
-          <a:bodyPr wrap="none" lIns="0" rIns="0">
-            <a:noAutofit/>
-          </a:bodyPr>
-          <a:lstStyle/>
-          <a:p>
-            <a:pPr algn="l"/>
-            <a:r>
-              <a:rPr sz="3400" b="1" i="0">
-                <a:solidFill>
-                  <a:srgbClr val="0072CE"/>
-                </a:solidFill>
-                <a:latin typeface="Arial"/>
-              </a:rPr>
-              <a:t>04</a:t>
-            </a:r>
-          </a:p>
-        </p:txBody>
-      </p:sp>
-      <p:sp>
-        <p:nvSpPr>
-          <p:cNvPr id="14" name="TextBox 13"/>
-          <p:cNvSpPr/>
-          <p:nvPr>
-            <p:ph type="body" idx="9"/>
-          </p:nvPr>
-        </p:nvSpPr>
-        <p:spPr>
-          <a:xfrm>
-            <a:off x="1371600" y="4268418"/>
-            <a:ext cx="10363200" cy="518159"/>
-          </a:xfrm>
-          <a:prstGeom prst="rect">
-            <a:avLst/>
-          </a:prstGeom>
-          <a:noFill/>
-        </p:spPr>
-        <p:txBody>
-          <a:bodyPr wrap="none" lIns="0" rIns="0">
-            <a:noAutofit/>
-          </a:bodyPr>
-          <a:lstStyle/>
-          <a:p>
-            <a:pPr algn="l"/>
-            <a:r>
-              <a:rPr sz="3400" b="0" i="0">
-                <a:solidFill>
-                  <a:srgbClr val="0A2240"/>
-                </a:solidFill>
-                <a:latin typeface="Arial"/>
-              </a:rPr>
-              <a:t>Roadmap for next quarter</a:t>
-            </a:r>
-          </a:p>
-        </p:txBody>
-      </p:sp>
-      <p:sp>
-        <p:nvSpPr>
-          <p:cNvPr id="15" name="TextBox 14"/>
-          <p:cNvSpPr/>
-          <p:nvPr>
-            <p:ph type="body" idx="13"/>
-          </p:nvPr>
-        </p:nvSpPr>
-        <p:spPr>
-          <a:xfrm>
-            <a:off x="457200" y="5151728"/>
-            <a:ext cx="951348" cy="518159"/>
-          </a:xfrm>
-          <a:prstGeom prst="rect">
-            <a:avLst/>
-          </a:prstGeom>
-          <a:noFill/>
-        </p:spPr>
-        <p:txBody>
-          <a:bodyPr wrap="none" lIns="0" rIns="0">
-            <a:noAutofit/>
-          </a:bodyPr>
-          <a:lstStyle/>
-          <a:p>
-            <a:pPr algn="l"/>
-            <a:r>
-              <a:rPr sz="3400" b="1" i="0">
-                <a:solidFill>
-                  <a:srgbClr val="0072CE"/>
-                </a:solidFill>
-                <a:latin typeface="Arial"/>
-              </a:rPr>
-              <a:t>05</a:t>
-            </a:r>
-          </a:p>
-        </p:txBody>
-      </p:sp>
-      <p:sp>
-        <p:nvSpPr>
-          <p:cNvPr id="16" name="TextBox 15"/>
-          <p:cNvSpPr/>
-          <p:nvPr>
-            <p:ph type="body" idx="14"/>
-          </p:nvPr>
-        </p:nvSpPr>
-        <p:spPr>
-          <a:xfrm>
-            <a:off x="1371600" y="5151728"/>
-            <a:ext cx="10363200" cy="518159"/>
-          </a:xfrm>
-          <a:prstGeom prst="rect">
-            <a:avLst/>
-          </a:prstGeom>
-          <a:noFill/>
-        </p:spPr>
-        <p:txBody>
-          <a:bodyPr wrap="none" lIns="0" rIns="0">
-            <a:noAutofit/>
-          </a:bodyPr>
-          <a:lstStyle/>
-          <a:p>
-            <a:pPr algn="l"/>
-            <a:r>
-              <a:rPr sz="3400" b="0" i="0">
-                <a:solidFill>
-                  <a:srgbClr val="0A2240"/>
-                </a:solidFill>
-                <a:latin typeface="Arial"/>
-              </a:rPr>
-              <a:t>Decisions we need today</a:t>
-            </a:r>
-          </a:p>
-        </p:txBody>
-      </p:sp>
-    </p:spTree>
-    <p:extLst>
-      <p:ext uri="{BB962C8B-B14F-4D97-AF65-F5344CB8AC3E}">
-        <p14:creationId xmlns:p14="http://schemas.microsoft.com/office/powerpoint/2010/main" val="1212999818"/>
-      </p:ext>
-    </p:extLst>
-  </p:cSld>
-  <p:clrMapOvr>
-    <a:masterClrMapping/>
-  </p:clrMapOvr>
-</p:sldLayout>
-</file>
-
-<file path=ppt/slideLayouts/slideLayout21.xml><?xml version="1.0" encoding="utf-8"?>
-<p:sldLayout xmlns:a="http://schemas.openxmlformats.org/drawingml/2006/main" xmlns:r="http://schemas.openxmlformats.org/officeDocument/2006/relationships" xmlns:p="http://schemas.openxmlformats.org/presentationml/2006/main" type="blank" preserve="1">
   <p:cSld name="slidekit · Big Number">
     <p:bg>
       <p:bgPr>
@@ -7821,7 +7422,7 @@
 </p:sldLayout>
 </file>
 
-<file path=ppt/slideLayouts/slideLayout22.xml><?xml version="1.0" encoding="utf-8"?>
+<file path=ppt/slideLayouts/slideLayout21.xml><?xml version="1.0" encoding="utf-8"?>
 <p:sldLayout xmlns:a="http://schemas.openxmlformats.org/drawingml/2006/main" xmlns:r="http://schemas.openxmlformats.org/officeDocument/2006/relationships" xmlns:p="http://schemas.openxmlformats.org/presentationml/2006/main" type="blank" preserve="1">
   <p:cSld name="slidekit · Pull Quote">
     <p:bg>
@@ -7884,8 +7485,8 @@
         </p:nvSpPr>
         <p:spPr>
           <a:xfrm>
-            <a:off x="457200" y="2301240"/>
-            <a:ext cx="128016" cy="2255520"/>
+            <a:off x="457200" y="2621280"/>
+            <a:ext cx="128016" cy="1615440"/>
           </a:xfrm>
           <a:prstGeom prst="rect">
             <a:avLst/>
@@ -7916,16 +7517,16 @@
         </p:nvSpPr>
         <p:spPr>
           <a:xfrm>
-            <a:off x="996696" y="2301240"/>
-            <a:ext cx="10738104" cy="1371600"/>
-          </a:xfrm>
-          <a:prstGeom prst="rect">
-            <a:avLst/>
-          </a:prstGeom>
-          <a:noFill/>
-        </p:spPr>
-        <p:txBody>
-          <a:bodyPr wrap="square" lIns="0" rIns="0">
+            <a:off x="996696" y="2621280"/>
+            <a:ext cx="11195304" cy="731520"/>
+          </a:xfrm>
+          <a:prstGeom prst="rect">
+            <a:avLst/>
+          </a:prstGeom>
+          <a:noFill/>
+        </p:spPr>
+        <p:txBody>
+          <a:bodyPr wrap="none" lIns="0" rIns="0">
             <a:noAutofit/>
           </a:bodyPr>
           <a:lstStyle/>
@@ -7938,7 +7539,7 @@
                 </a:solidFill>
                 <a:latin typeface="Arial"/>
               </a:rPr>
-              <a:t>"We stopped buying tools and started buying outcomes."</a:t>
+              <a:t>"We buy outcomes, not tools."</a:t>
             </a:r>
           </a:p>
         </p:txBody>
@@ -7953,7 +7554,7 @@
         </p:nvSpPr>
         <p:spPr>
           <a:xfrm>
-            <a:off x="996696" y="3947160"/>
+            <a:off x="996696" y="3627120"/>
             <a:ext cx="11195304" cy="609600"/>
           </a:xfrm>
           <a:prstGeom prst="rect">
@@ -7971,7 +7572,7 @@
             <a:r>
               <a:rPr sz="3400" b="0" i="0">
                 <a:solidFill>
-                  <a:srgbClr val="5B6B82"/>
+                  <a:srgbClr val="0A2240"/>
                 </a:solidFill>
                 <a:latin typeface="Arial"/>
               </a:rPr>
@@ -7993,7 +7594,7 @@
 </p:sldLayout>
 </file>
 
-<file path=ppt/slideLayouts/slideLayout23.xml><?xml version="1.0" encoding="utf-8"?>
+<file path=ppt/slideLayouts/slideLayout22.xml><?xml version="1.0" encoding="utf-8"?>
 <p:sldLayout xmlns:a="http://schemas.openxmlformats.org/drawingml/2006/main" xmlns:r="http://schemas.openxmlformats.org/officeDocument/2006/relationships" xmlns:p="http://schemas.openxmlformats.org/presentationml/2006/main" type="blank" preserve="1">
   <p:cSld name="slidekit · Definition">
     <p:bg>
@@ -8056,8 +7657,8 @@
         </p:nvSpPr>
         <p:spPr>
           <a:xfrm>
-            <a:off x="457200" y="1965960"/>
-            <a:ext cx="128016" cy="2926080"/>
+            <a:off x="457200" y="2484120"/>
+            <a:ext cx="128016" cy="1889760"/>
           </a:xfrm>
           <a:prstGeom prst="rect">
             <a:avLst/>
@@ -8088,7 +7689,7 @@
         </p:nvSpPr>
         <p:spPr>
           <a:xfrm>
-            <a:off x="996696" y="1965960"/>
+            <a:off x="996696" y="2484120"/>
             <a:ext cx="11195304" cy="1005840"/>
           </a:xfrm>
           <a:prstGeom prst="rect">
@@ -8125,16 +7726,16 @@
         </p:nvSpPr>
         <p:spPr>
           <a:xfrm>
-            <a:off x="996696" y="3246120"/>
-            <a:ext cx="10738104" cy="1645920"/>
-          </a:xfrm>
-          <a:prstGeom prst="rect">
-            <a:avLst/>
-          </a:prstGeom>
-          <a:noFill/>
-        </p:spPr>
-        <p:txBody>
-          <a:bodyPr wrap="square" lIns="0" rIns="0">
+            <a:off x="996696" y="3764280"/>
+            <a:ext cx="11195304" cy="609600"/>
+          </a:xfrm>
+          <a:prstGeom prst="rect">
+            <a:avLst/>
+          </a:prstGeom>
+          <a:noFill/>
+        </p:spPr>
+        <p:txBody>
+          <a:bodyPr wrap="none" lIns="0" rIns="0">
             <a:noAutofit/>
           </a:bodyPr>
           <a:lstStyle/>
@@ -8147,7 +7748,7 @@
                 </a:solidFill>
                 <a:latin typeface="Arial"/>
               </a:rPr>
-              <a:t>The percentage of recurring revenue retained from existing customers over a period, including expansion and after churn.</a:t>
+              <a:t>Revenue kept from existing customers.</a:t>
             </a:r>
           </a:p>
         </p:txBody>
@@ -8165,7 +7766,7 @@
 </p:sldLayout>
 </file>
 
-<file path=ppt/slideLayouts/slideLayout24.xml><?xml version="1.0" encoding="utf-8"?>
+<file path=ppt/slideLayouts/slideLayout23.xml><?xml version="1.0" encoding="utf-8"?>
 <p:sldLayout xmlns:a="http://schemas.openxmlformats.org/drawingml/2006/main" xmlns:r="http://schemas.openxmlformats.org/officeDocument/2006/relationships" xmlns:p="http://schemas.openxmlformats.org/presentationml/2006/main" type="blank" preserve="1">
   <p:cSld name="slidekit · Question">
     <p:bg>
@@ -8228,8 +7829,8 @@
         </p:nvSpPr>
         <p:spPr>
           <a:xfrm>
-            <a:off x="457200" y="2011680"/>
-            <a:ext cx="128016" cy="2834640"/>
+            <a:off x="457200" y="2926080"/>
+            <a:ext cx="128016" cy="1005840"/>
           </a:xfrm>
           <a:prstGeom prst="rect">
             <a:avLst/>
@@ -8260,16 +7861,16 @@
         </p:nvSpPr>
         <p:spPr>
           <a:xfrm>
-            <a:off x="996696" y="2011680"/>
-            <a:ext cx="10738104" cy="2834640"/>
-          </a:xfrm>
-          <a:prstGeom prst="rect">
-            <a:avLst/>
-          </a:prstGeom>
-          <a:noFill/>
-        </p:spPr>
-        <p:txBody>
-          <a:bodyPr wrap="square" lIns="0" rIns="0">
+            <a:off x="996696" y="2926080"/>
+            <a:ext cx="11195304" cy="1005840"/>
+          </a:xfrm>
+          <a:prstGeom prst="rect">
+            <a:avLst/>
+          </a:prstGeom>
+          <a:noFill/>
+        </p:spPr>
+        <p:txBody>
+          <a:bodyPr wrap="none" lIns="0" rIns="0">
             <a:noAutofit/>
           </a:bodyPr>
           <a:lstStyle/>
@@ -8282,7 +7883,7 @@
                 </a:solidFill>
                 <a:latin typeface="Arial"/>
               </a:rPr>
-              <a:t>What would we build if we trusted our customers completely?</a:t>
+              <a:t>What if we trusted users?</a:t>
             </a:r>
           </a:p>
         </p:txBody>
@@ -8300,7 +7901,7 @@
 </p:sldLayout>
 </file>
 
-<file path=ppt/slideLayouts/slideLayout25.xml><?xml version="1.0" encoding="utf-8"?>
+<file path=ppt/slideLayouts/slideLayout24.xml><?xml version="1.0" encoding="utf-8"?>
 <p:sldLayout xmlns:a="http://schemas.openxmlformats.org/drawingml/2006/main" xmlns:r="http://schemas.openxmlformats.org/officeDocument/2006/relationships" xmlns:p="http://schemas.openxmlformats.org/presentationml/2006/main" type="blank" preserve="1">
   <p:cSld name="slidekit · Bullet List">
     <p:bg>
@@ -8514,7 +8115,7 @@
 </p:sldLayout>
 </file>
 
-<file path=ppt/slideLayouts/slideLayout26.xml><?xml version="1.0" encoding="utf-8"?>
+<file path=ppt/slideLayouts/slideLayout25.xml><?xml version="1.0" encoding="utf-8"?>
 <p:sldLayout xmlns:a="http://schemas.openxmlformats.org/drawingml/2006/main" xmlns:r="http://schemas.openxmlformats.org/officeDocument/2006/relationships" xmlns:p="http://schemas.openxmlformats.org/presentationml/2006/main" type="blank" preserve="1">
   <p:cSld name="slidekit · Code Block">
     <p:bg>
@@ -8584,7 +8185,7 @@
             <a:avLst/>
           </a:prstGeom>
           <a:solidFill>
-            <a:srgbClr val="FF5F56"/>
+            <a:srgbClr val="FFFFFF"/>
           </a:solidFill>
           <a:ln>
             <a:noFill/>
@@ -8616,7 +8217,7 @@
             <a:avLst/>
           </a:prstGeom>
           <a:solidFill>
-            <a:srgbClr val="FFBD2E"/>
+            <a:srgbClr val="FFFFFF"/>
           </a:solidFill>
           <a:ln>
             <a:noFill/>
@@ -8648,7 +8249,7 @@
             <a:avLst/>
           </a:prstGeom>
           <a:solidFill>
-            <a:srgbClr val="27C93F"/>
+            <a:srgbClr val="FFFFFF"/>
           </a:solidFill>
           <a:ln>
             <a:noFill/>
@@ -8691,7 +8292,7 @@
             <a:r>
               <a:rPr sz="4200" b="0" i="0">
                 <a:solidFill>
-                  <a:srgbClr val="D4D4D4"/>
+                  <a:srgbClr val="FFFFFF"/>
                 </a:solidFill>
                 <a:latin typeface="Arial"/>
               </a:rPr>
@@ -8728,7 +8329,7 @@
             <a:r>
               <a:rPr sz="3400" b="0" i="0">
                 <a:solidFill>
-                  <a:srgbClr val="6A9955"/>
+                  <a:srgbClr val="FFFFFF"/>
                 </a:solidFill>
                 <a:latin typeface="Arial"/>
               </a:rPr>
@@ -8785,7 +8386,7 @@
         <p:spPr>
           <a:xfrm>
             <a:off x="1057461" y="2356103"/>
-            <a:ext cx="302848" cy="518159"/>
+            <a:ext cx="2524382" cy="518159"/>
           </a:xfrm>
           <a:prstGeom prst="rect">
             <a:avLst/>
@@ -8802,11 +8403,11 @@
             <a:r>
               <a:rPr sz="3400" b="0" i="0">
                 <a:solidFill>
-                  <a:srgbClr val="D4D4D4"/>
-                </a:solidFill>
-                <a:latin typeface="Arial"/>
-              </a:rPr>
-              <a:t> </a:t>
+                  <a:srgbClr val="FFFFFF"/>
+                </a:solidFill>
+                <a:latin typeface="Arial"/>
+              </a:rPr>
+              <a:t> main():</a:t>
             </a:r>
           </a:p>
         </p:txBody>
@@ -8821,8 +8422,8 @@
         </p:nvSpPr>
         <p:spPr>
           <a:xfrm>
-            <a:off x="1177429" y="2356103"/>
-            <a:ext cx="1680348" cy="518159"/>
+            <a:off x="457200" y="2874262"/>
+            <a:ext cx="7046475" cy="518159"/>
           </a:xfrm>
           <a:prstGeom prst="rect">
             <a:avLst/>
@@ -8839,11 +8440,11 @@
             <a:r>
               <a:rPr sz="3400" b="0" i="0">
                 <a:solidFill>
-                  <a:srgbClr val="DCDCAA"/>
-                </a:solidFill>
-                <a:latin typeface="Arial"/>
-              </a:rPr>
-              <a:t>main</a:t>
+                  <a:srgbClr val="FFFFFF"/>
+                </a:solidFill>
+                <a:latin typeface="Arial"/>
+              </a:rPr>
+              <a:t>    print("Hello, world!")</a:t>
             </a:r>
           </a:p>
         </p:txBody>
@@ -8858,8 +8459,8 @@
         </p:nvSpPr>
         <p:spPr>
           <a:xfrm>
-            <a:off x="2113347" y="2356103"/>
-            <a:ext cx="834964" cy="518159"/>
+            <a:off x="457200" y="3910580"/>
+            <a:ext cx="2140486" cy="518159"/>
           </a:xfrm>
           <a:prstGeom prst="rect">
             <a:avLst/>
@@ -8876,11 +8477,11 @@
             <a:r>
               <a:rPr sz="3400" b="0" i="0">
                 <a:solidFill>
-                  <a:srgbClr val="D4D4D4"/>
-                </a:solidFill>
-                <a:latin typeface="Arial"/>
-              </a:rPr>
-              <a:t>():</a:t>
+                  <a:srgbClr val="FFFFFF"/>
+                </a:solidFill>
+                <a:latin typeface="Arial"/>
+              </a:rPr>
+              <a:t>main()</a:t>
             </a:r>
           </a:p>
         </p:txBody>
@@ -8891,265 +8492,6 @@
           <p:cNvSpPr/>
           <p:nvPr>
             <p:ph type="body" idx="13"/>
-          </p:nvPr>
-        </p:nvSpPr>
-        <p:spPr>
-          <a:xfrm>
-            <a:off x="457200" y="2874262"/>
-            <a:ext cx="662751" cy="518159"/>
-          </a:xfrm>
-          <a:prstGeom prst="rect">
-            <a:avLst/>
-          </a:prstGeom>
-          <a:noFill/>
-        </p:spPr>
-        <p:txBody>
-          <a:bodyPr wrap="none" lIns="0" rIns="0">
-            <a:noAutofit/>
-          </a:bodyPr>
-          <a:lstStyle/>
-          <a:p>
-            <a:pPr algn="l"/>
-            <a:r>
-              <a:rPr sz="3400" b="0" i="0">
-                <a:solidFill>
-                  <a:srgbClr val="D4D4D4"/>
-                </a:solidFill>
-                <a:latin typeface="Arial"/>
-              </a:rPr>
-              <a:t>    </a:t>
-            </a:r>
-          </a:p>
-        </p:txBody>
-      </p:sp>
-      <p:sp>
-        <p:nvSpPr>
-          <p:cNvPr id="15" name="TextBox 14"/>
-          <p:cNvSpPr/>
-          <p:nvPr>
-            <p:ph type="body" idx="14"/>
-          </p:nvPr>
-        </p:nvSpPr>
-        <p:spPr>
-          <a:xfrm>
-            <a:off x="937071" y="2874262"/>
-            <a:ext cx="1526857" cy="518159"/>
-          </a:xfrm>
-          <a:prstGeom prst="rect">
-            <a:avLst/>
-          </a:prstGeom>
-          <a:noFill/>
-        </p:spPr>
-        <p:txBody>
-          <a:bodyPr wrap="none" lIns="0" rIns="0">
-            <a:noAutofit/>
-          </a:bodyPr>
-          <a:lstStyle/>
-          <a:p>
-            <a:pPr algn="l"/>
-            <a:r>
-              <a:rPr sz="3400" b="0" i="0">
-                <a:solidFill>
-                  <a:srgbClr val="DCDCAA"/>
-                </a:solidFill>
-                <a:latin typeface="Arial"/>
-              </a:rPr>
-              <a:t>print</a:t>
-            </a:r>
-          </a:p>
-        </p:txBody>
-      </p:sp>
-      <p:sp>
-        <p:nvSpPr>
-          <p:cNvPr id="16" name="TextBox 15"/>
-          <p:cNvSpPr/>
-          <p:nvPr>
-            <p:ph type="body" idx="15"/>
-          </p:nvPr>
-        </p:nvSpPr>
-        <p:spPr>
-          <a:xfrm>
-            <a:off x="1777057" y="2874262"/>
-            <a:ext cx="412948" cy="518159"/>
-          </a:xfrm>
-          <a:prstGeom prst="rect">
-            <a:avLst/>
-          </a:prstGeom>
-          <a:noFill/>
-        </p:spPr>
-        <p:txBody>
-          <a:bodyPr wrap="none" lIns="0" rIns="0">
-            <a:noAutofit/>
-          </a:bodyPr>
-          <a:lstStyle/>
-          <a:p>
-            <a:pPr algn="l"/>
-            <a:r>
-              <a:rPr sz="3400" b="0" i="0">
-                <a:solidFill>
-                  <a:srgbClr val="D4D4D4"/>
-                </a:solidFill>
-                <a:latin typeface="Arial"/>
-              </a:rPr>
-              <a:t>(</a:t>
-            </a:r>
-          </a:p>
-        </p:txBody>
-      </p:sp>
-      <p:sp>
-        <p:nvSpPr>
-          <p:cNvPr id="17" name="TextBox 16"/>
-          <p:cNvSpPr/>
-          <p:nvPr>
-            <p:ph type="body" idx="16"/>
-          </p:nvPr>
-        </p:nvSpPr>
-        <p:spPr>
-          <a:xfrm>
-            <a:off x="1920850" y="2874262"/>
-            <a:ext cx="4474566" cy="518159"/>
-          </a:xfrm>
-          <a:prstGeom prst="rect">
-            <a:avLst/>
-          </a:prstGeom>
-          <a:noFill/>
-        </p:spPr>
-        <p:txBody>
-          <a:bodyPr wrap="none" lIns="0" rIns="0">
-            <a:noAutofit/>
-          </a:bodyPr>
-          <a:lstStyle/>
-          <a:p>
-            <a:pPr algn="l"/>
-            <a:r>
-              <a:rPr sz="3400" b="0" i="0">
-                <a:solidFill>
-                  <a:srgbClr val="CE9178"/>
-                </a:solidFill>
-                <a:latin typeface="Arial"/>
-              </a:rPr>
-              <a:t>"Hello, world!"</a:t>
-            </a:r>
-          </a:p>
-        </p:txBody>
-      </p:sp>
-      <p:sp>
-        <p:nvSpPr>
-          <p:cNvPr id="18" name="TextBox 17"/>
-          <p:cNvSpPr/>
-          <p:nvPr>
-            <p:ph type="body" idx="17"/>
-          </p:nvPr>
-        </p:nvSpPr>
-        <p:spPr>
-          <a:xfrm>
-            <a:off x="4603155" y="2874262"/>
-            <a:ext cx="412948" cy="518159"/>
-          </a:xfrm>
-          <a:prstGeom prst="rect">
-            <a:avLst/>
-          </a:prstGeom>
-          <a:noFill/>
-        </p:spPr>
-        <p:txBody>
-          <a:bodyPr wrap="none" lIns="0" rIns="0">
-            <a:noAutofit/>
-          </a:bodyPr>
-          <a:lstStyle/>
-          <a:p>
-            <a:pPr algn="l"/>
-            <a:r>
-              <a:rPr sz="3400" b="0" i="0">
-                <a:solidFill>
-                  <a:srgbClr val="D4D4D4"/>
-                </a:solidFill>
-                <a:latin typeface="Arial"/>
-              </a:rPr>
-              <a:t>)</a:t>
-            </a:r>
-          </a:p>
-        </p:txBody>
-      </p:sp>
-      <p:sp>
-        <p:nvSpPr>
-          <p:cNvPr id="19" name="TextBox 18"/>
-          <p:cNvSpPr/>
-          <p:nvPr>
-            <p:ph type="body" idx="18"/>
-          </p:nvPr>
-        </p:nvSpPr>
-        <p:spPr>
-          <a:xfrm>
-            <a:off x="457200" y="3910580"/>
-            <a:ext cx="1680348" cy="518159"/>
-          </a:xfrm>
-          <a:prstGeom prst="rect">
-            <a:avLst/>
-          </a:prstGeom>
-          <a:noFill/>
-        </p:spPr>
-        <p:txBody>
-          <a:bodyPr wrap="none" lIns="0" rIns="0">
-            <a:noAutofit/>
-          </a:bodyPr>
-          <a:lstStyle/>
-          <a:p>
-            <a:pPr algn="l"/>
-            <a:r>
-              <a:rPr sz="3400" b="0" i="0">
-                <a:solidFill>
-                  <a:srgbClr val="DCDCAA"/>
-                </a:solidFill>
-                <a:latin typeface="Arial"/>
-              </a:rPr>
-              <a:t>main</a:t>
-            </a:r>
-          </a:p>
-        </p:txBody>
-      </p:sp>
-      <p:sp>
-        <p:nvSpPr>
-          <p:cNvPr id="20" name="TextBox 19"/>
-          <p:cNvSpPr/>
-          <p:nvPr>
-            <p:ph type="body" idx="19"/>
-          </p:nvPr>
-        </p:nvSpPr>
-        <p:spPr>
-          <a:xfrm>
-            <a:off x="1393118" y="3910580"/>
-            <a:ext cx="643017" cy="518159"/>
-          </a:xfrm>
-          <a:prstGeom prst="rect">
-            <a:avLst/>
-          </a:prstGeom>
-          <a:noFill/>
-        </p:spPr>
-        <p:txBody>
-          <a:bodyPr wrap="none" lIns="0" rIns="0">
-            <a:noAutofit/>
-          </a:bodyPr>
-          <a:lstStyle/>
-          <a:p>
-            <a:pPr algn="l"/>
-            <a:r>
-              <a:rPr sz="3400" b="0" i="0">
-                <a:solidFill>
-                  <a:srgbClr val="D4D4D4"/>
-                </a:solidFill>
-                <a:latin typeface="Arial"/>
-              </a:rPr>
-              <a:t>()</a:t>
-            </a:r>
-          </a:p>
-        </p:txBody>
-      </p:sp>
-      <p:sp>
-        <p:nvSpPr>
-          <p:cNvPr id="21" name="TextBox 20"/>
-          <p:cNvSpPr/>
-          <p:nvPr>
-            <p:ph type="body" idx="20"/>
           </p:nvPr>
         </p:nvSpPr>
         <p:spPr>
@@ -9172,7 +8514,7 @@
             <a:r>
               <a:rPr sz="3400" b="0" i="0">
                 <a:solidFill>
-                  <a:srgbClr val="4EC9B0"/>
+                  <a:srgbClr val="569CD6"/>
                 </a:solidFill>
                 <a:latin typeface="Arial"/>
               </a:rPr>
@@ -9183,10 +8525,10 @@
       </p:sp>
       <p:sp>
         <p:nvSpPr>
-          <p:cNvPr id="22" name="TextBox 21"/>
-          <p:cNvSpPr/>
-          <p:nvPr>
-            <p:ph type="body" idx="21"/>
+          <p:cNvPr id="15" name="TextBox 14"/>
+          <p:cNvSpPr/>
+          <p:nvPr>
+            <p:ph type="body" idx="14"/>
           </p:nvPr>
         </p:nvSpPr>
         <p:spPr>
@@ -9209,7 +8551,7 @@
             <a:r>
               <a:rPr sz="3400" b="0" i="0">
                 <a:solidFill>
-                  <a:srgbClr val="D4D4D4"/>
+                  <a:srgbClr val="FFFFFF"/>
                 </a:solidFill>
                 <a:latin typeface="Arial"/>
               </a:rPr>
@@ -9220,10 +8562,10 @@
       </p:sp>
       <p:sp>
         <p:nvSpPr>
-          <p:cNvPr id="23" name="TextBox 22"/>
-          <p:cNvSpPr/>
-          <p:nvPr>
-            <p:ph type="body" idx="22"/>
+          <p:cNvPr id="16" name="TextBox 15"/>
+          <p:cNvSpPr/>
+          <p:nvPr>
+            <p:ph type="body" idx="15"/>
           </p:nvPr>
         </p:nvSpPr>
         <p:spPr>
@@ -9246,7 +8588,7 @@
             <a:r>
               <a:rPr sz="3400" b="0" i="0">
                 <a:solidFill>
-                  <a:srgbClr val="D4D4D4"/>
+                  <a:srgbClr val="FFFFFF"/>
                 </a:solidFill>
                 <a:latin typeface="Arial"/>
               </a:rPr>
@@ -9268,7 +8610,7 @@
 </p:sldLayout>
 </file>
 
-<file path=ppt/slideLayouts/slideLayout27.xml><?xml version="1.0" encoding="utf-8"?>
+<file path=ppt/slideLayouts/slideLayout26.xml><?xml version="1.0" encoding="utf-8"?>
 <p:sldLayout xmlns:a="http://schemas.openxmlformats.org/drawingml/2006/main" xmlns:r="http://schemas.openxmlformats.org/officeDocument/2006/relationships" xmlns:p="http://schemas.openxmlformats.org/presentationml/2006/main" type="blank" preserve="1">
   <p:cSld name="slidekit · File Tree">
     <p:bg>
@@ -9377,7 +8719,7 @@
             </a:avLst>
           </a:prstGeom>
           <a:solidFill>
-            <a:srgbClr val="0C1A1C"/>
+            <a:srgbClr val="0A2240"/>
           </a:solidFill>
           <a:ln>
             <a:noFill/>
@@ -9420,7 +8762,7 @@
             <a:r>
               <a:rPr sz="2600" b="1" i="0">
                 <a:solidFill>
-                  <a:srgbClr val="569CD6"/>
+                  <a:srgbClr val="0072CE"/>
                 </a:solidFill>
                 <a:latin typeface="Courier New"/>
               </a:rPr>
@@ -9457,7 +8799,7 @@
             <a:r>
               <a:rPr sz="2600" b="0" i="0">
                 <a:solidFill>
-                  <a:srgbClr val="55707A"/>
+                  <a:srgbClr val="0072CE"/>
                 </a:solidFill>
                 <a:latin typeface="Courier New"/>
               </a:rPr>
@@ -9494,7 +8836,7 @@
             <a:r>
               <a:rPr sz="2600" b="1" i="0">
                 <a:solidFill>
-                  <a:srgbClr val="569CD6"/>
+                  <a:srgbClr val="0072CE"/>
                 </a:solidFill>
                 <a:latin typeface="Courier New"/>
               </a:rPr>
@@ -9531,7 +8873,7 @@
             <a:r>
               <a:rPr sz="2600" b="0" i="0">
                 <a:solidFill>
-                  <a:srgbClr val="55707A"/>
+                  <a:srgbClr val="0072CE"/>
                 </a:solidFill>
                 <a:latin typeface="Courier New"/>
               </a:rPr>
@@ -9568,7 +8910,7 @@
             <a:r>
               <a:rPr sz="2600" b="1" i="0">
                 <a:solidFill>
-                  <a:srgbClr val="569CD6"/>
+                  <a:srgbClr val="0072CE"/>
                 </a:solidFill>
                 <a:latin typeface="Courier New"/>
               </a:rPr>
@@ -9605,7 +8947,7 @@
             <a:r>
               <a:rPr sz="2600" b="0" i="0">
                 <a:solidFill>
-                  <a:srgbClr val="55707A"/>
+                  <a:srgbClr val="0072CE"/>
                 </a:solidFill>
                 <a:latin typeface="Courier New"/>
               </a:rPr>
@@ -9642,7 +8984,7 @@
             <a:r>
               <a:rPr sz="2600" b="0" i="0">
                 <a:solidFill>
-                  <a:srgbClr val="D4D4D4"/>
+                  <a:srgbClr val="FFFFFF"/>
                 </a:solidFill>
                 <a:latin typeface="Courier New"/>
               </a:rPr>
@@ -9679,7 +9021,7 @@
             <a:r>
               <a:rPr sz="2600" b="0" i="0">
                 <a:solidFill>
-                  <a:srgbClr val="55707A"/>
+                  <a:srgbClr val="0072CE"/>
                 </a:solidFill>
                 <a:latin typeface="Courier New"/>
               </a:rPr>
@@ -9716,7 +9058,7 @@
             <a:r>
               <a:rPr sz="2600" b="0" i="0">
                 <a:solidFill>
-                  <a:srgbClr val="D4D4D4"/>
+                  <a:srgbClr val="FFFFFF"/>
                 </a:solidFill>
                 <a:latin typeface="Courier New"/>
               </a:rPr>
@@ -9753,7 +9095,7 @@
             <a:r>
               <a:rPr sz="2600" b="0" i="0">
                 <a:solidFill>
-                  <a:srgbClr val="55707A"/>
+                  <a:srgbClr val="0072CE"/>
                 </a:solidFill>
                 <a:latin typeface="Courier New"/>
               </a:rPr>
@@ -9790,7 +9132,7 @@
             <a:r>
               <a:rPr sz="2600" b="0" i="0">
                 <a:solidFill>
-                  <a:srgbClr val="D4D4D4"/>
+                  <a:srgbClr val="FFFFFF"/>
                 </a:solidFill>
                 <a:latin typeface="Courier New"/>
               </a:rPr>
@@ -9827,7 +9169,7 @@
             <a:r>
               <a:rPr sz="2600" b="0" i="0">
                 <a:solidFill>
-                  <a:srgbClr val="55707A"/>
+                  <a:srgbClr val="0072CE"/>
                 </a:solidFill>
                 <a:latin typeface="Courier New"/>
               </a:rPr>
@@ -9864,7 +9206,7 @@
             <a:r>
               <a:rPr sz="2600" b="0" i="0">
                 <a:solidFill>
-                  <a:srgbClr val="D4D4D4"/>
+                  <a:srgbClr val="FFFFFF"/>
                 </a:solidFill>
                 <a:latin typeface="Courier New"/>
               </a:rPr>
@@ -9901,7 +9243,7 @@
             <a:r>
               <a:rPr sz="2600" b="0" i="0">
                 <a:solidFill>
-                  <a:srgbClr val="55707A"/>
+                  <a:srgbClr val="0072CE"/>
                 </a:solidFill>
                 <a:latin typeface="Courier New"/>
               </a:rPr>
@@ -9938,7 +9280,7 @@
             <a:r>
               <a:rPr sz="2600" b="0" i="0">
                 <a:solidFill>
-                  <a:srgbClr val="D4D4D4"/>
+                  <a:srgbClr val="FFFFFF"/>
                 </a:solidFill>
                 <a:latin typeface="Courier New"/>
               </a:rPr>
@@ -9960,7 +9302,7 @@
 </p:sldLayout>
 </file>
 
-<file path=ppt/slideLayouts/slideLayout28.xml><?xml version="1.0" encoding="utf-8"?>
+<file path=ppt/slideLayouts/slideLayout27.xml><?xml version="1.0" encoding="utf-8"?>
 <p:sldLayout xmlns:a="http://schemas.openxmlformats.org/drawingml/2006/main" xmlns:r="http://schemas.openxmlformats.org/officeDocument/2006/relationships" xmlns:p="http://schemas.openxmlformats.org/presentationml/2006/main" type="blank" preserve="1">
   <p:cSld name="slidekit · Numbered Steps">
     <p:bg>
@@ -10078,7 +9420,7 @@
             <a:r>
               <a:rPr sz="4200" b="1" i="0">
                 <a:solidFill>
-                  <a:srgbClr val="123A6B"/>
+                  <a:srgbClr val="0072CE"/>
                 </a:solidFill>
                 <a:latin typeface="Arial"/>
               </a:rPr>
@@ -10115,7 +9457,7 @@
             <a:r>
               <a:rPr sz="4200" b="1" i="0">
                 <a:solidFill>
-                  <a:srgbClr val="123A6B"/>
+                  <a:srgbClr val="0072CE"/>
                 </a:solidFill>
                 <a:latin typeface="Arial"/>
               </a:rPr>
@@ -10189,7 +9531,7 @@
             <a:r>
               <a:rPr sz="4200" b="1" i="0">
                 <a:solidFill>
-                  <a:srgbClr val="123A6B"/>
+                  <a:srgbClr val="0072CE"/>
                 </a:solidFill>
                 <a:latin typeface="Arial"/>
               </a:rPr>
@@ -10226,7 +9568,7 @@
             <a:r>
               <a:rPr sz="4200" b="1" i="0">
                 <a:solidFill>
-                  <a:srgbClr val="123A6B"/>
+                  <a:srgbClr val="0072CE"/>
                 </a:solidFill>
                 <a:latin typeface="Arial"/>
               </a:rPr>
@@ -10300,7 +9642,7 @@
             <a:r>
               <a:rPr sz="4200" b="1" i="0">
                 <a:solidFill>
-                  <a:srgbClr val="123A6B"/>
+                  <a:srgbClr val="0072CE"/>
                 </a:solidFill>
                 <a:latin typeface="Arial"/>
               </a:rPr>
@@ -10337,7 +9679,7 @@
             <a:r>
               <a:rPr sz="4200" b="1" i="0">
                 <a:solidFill>
-                  <a:srgbClr val="123A6B"/>
+                  <a:srgbClr val="0072CE"/>
                 </a:solidFill>
                 <a:latin typeface="Arial"/>
               </a:rPr>
@@ -10396,7 +9738,7 @@
 </p:sldLayout>
 </file>
 
-<file path=ppt/slideLayouts/slideLayout29.xml><?xml version="1.0" encoding="utf-8"?>
+<file path=ppt/slideLayouts/slideLayout28.xml><?xml version="1.0" encoding="utf-8"?>
 <p:sldLayout xmlns:a="http://schemas.openxmlformats.org/drawingml/2006/main" xmlns:r="http://schemas.openxmlformats.org/officeDocument/2006/relationships" xmlns:p="http://schemas.openxmlformats.org/presentationml/2006/main" type="blank" preserve="1">
   <p:cSld name="slidekit · Two Panel List">
     <p:bg>
@@ -10514,7 +9856,7 @@
             <a:r>
               <a:rPr sz="3400" b="1" i="0">
                 <a:solidFill>
-                  <a:srgbClr val="123A6B"/>
+                  <a:srgbClr val="0072CE"/>
                 </a:solidFill>
                 <a:latin typeface="Arial"/>
               </a:rPr>
@@ -10533,14 +9875,14 @@
         </p:nvSpPr>
         <p:spPr>
           <a:xfrm>
-            <a:off x="548640" y="2176271"/>
-            <a:ext cx="1650492" cy="54864"/>
+            <a:off x="457200" y="2176271"/>
+            <a:ext cx="1367718" cy="54864"/>
           </a:xfrm>
           <a:prstGeom prst="rect">
             <a:avLst/>
           </a:prstGeom>
           <a:solidFill>
-            <a:srgbClr val="123A6B"/>
+            <a:srgbClr val="0072CE"/>
           </a:solidFill>
           <a:ln>
             <a:noFill/>
@@ -10583,7 +9925,7 @@
             <a:r>
               <a:rPr sz="3400" b="1" i="0">
                 <a:solidFill>
-                  <a:srgbClr val="5B6B82"/>
+                  <a:srgbClr val="0A2240"/>
                 </a:solidFill>
                 <a:latin typeface="Arial"/>
               </a:rPr>
@@ -10602,14 +9944,14 @@
         </p:nvSpPr>
         <p:spPr>
           <a:xfrm>
-            <a:off x="6324600" y="2176271"/>
-            <a:ext cx="1650492" cy="54864"/>
+            <a:off x="6233160" y="2176271"/>
+            <a:ext cx="1007604" cy="54864"/>
           </a:xfrm>
           <a:prstGeom prst="rect">
             <a:avLst/>
           </a:prstGeom>
           <a:solidFill>
-            <a:srgbClr val="5B6B82"/>
+            <a:srgbClr val="0A2240"/>
           </a:solidFill>
           <a:ln>
             <a:noFill/>
@@ -10842,6 +10184,294 @@
                 <a:latin typeface="Arial"/>
               </a:rPr>
               <a:t>In-product live chat</a:t>
+            </a:r>
+          </a:p>
+        </p:txBody>
+      </p:sp>
+    </p:spTree>
+    <p:extLst>
+      <p:ext uri="{BB962C8B-B14F-4D97-AF65-F5344CB8AC3E}">
+        <p14:creationId xmlns:p14="http://schemas.microsoft.com/office/powerpoint/2010/main" val="1212999818"/>
+      </p:ext>
+    </p:extLst>
+  </p:cSld>
+  <p:clrMapOvr>
+    <a:masterClrMapping/>
+  </p:clrMapOvr>
+</p:sldLayout>
+</file>
+
+<file path=ppt/slideLayouts/slideLayout29.xml><?xml version="1.0" encoding="utf-8"?>
+<p:sldLayout xmlns:a="http://schemas.openxmlformats.org/drawingml/2006/main" xmlns:r="http://schemas.openxmlformats.org/officeDocument/2006/relationships" xmlns:p="http://schemas.openxmlformats.org/presentationml/2006/main" type="blank" preserve="1">
+  <p:cSld name="slidekit · This vs That">
+    <p:bg>
+      <p:bgPr>
+        <a:solidFill>
+          <a:srgbClr val="FFFFFF"/>
+        </a:solidFill>
+        <a:effectLst/>
+      </p:bgPr>
+    </p:bg>
+    <p:spTree>
+      <p:nvGrpSpPr>
+        <p:cNvPr id="1" name=""/>
+        <p:cNvGrpSpPr/>
+        <p:nvPr/>
+      </p:nvGrpSpPr>
+      <p:grpSpPr>
+        <a:xfrm>
+          <a:off x="0" y="0"/>
+          <a:ext cx="0" cy="0"/>
+          <a:chOff x="0" y="0"/>
+          <a:chExt cx="0" cy="0"/>
+        </a:xfrm>
+      </p:grpSpPr>
+      <p:sp>
+        <p:nvSpPr>
+          <p:cNvPr id="4" name="Slide Number Placeholder 3"/>
+          <p:cNvSpPr>
+            <a:spLocks noGrp="1"/>
+          </p:cNvSpPr>
+          <p:nvPr>
+            <p:ph type="sldNum" sz="quarter" idx="12"/>
+          </p:nvPr>
+        </p:nvSpPr>
+        <p:spPr>
+          <a:xfrm>
+            <a:off x="11186160" y="6035040"/>
+            <a:ext cx="548640" cy="365760"/>
+          </a:xfrm>
+        </p:spPr>
+        <p:txBody>
+          <a:bodyPr/>
+          <a:lstStyle/>
+          <a:p>
+            <a:fld id="{C1FF6DA9-008F-8B48-92A6-B652298478BF}" type="slidenum">
+              <a:rPr lang="en-US" smtClean="0"/>
+              <a:t>‹#›</a:t>
+            </a:fld>
+            <a:endParaRPr lang="en-US"/>
+          </a:p>
+        </p:txBody>
+      </p:sp>
+      <p:sp>
+        <p:nvSpPr>
+          <p:cNvPr id="5" name="TextBox 4"/>
+          <p:cNvSpPr/>
+          <p:nvPr>
+            <p:ph type="title"/>
+          </p:nvPr>
+        </p:nvSpPr>
+        <p:spPr>
+          <a:xfrm>
+            <a:off x="457200" y="457200"/>
+            <a:ext cx="11277600" cy="768096"/>
+          </a:xfrm>
+          <a:prstGeom prst="rect">
+            <a:avLst/>
+          </a:prstGeom>
+          <a:noFill/>
+        </p:spPr>
+        <p:txBody>
+          <a:bodyPr wrap="none" lIns="0" rIns="0">
+            <a:noAutofit/>
+          </a:bodyPr>
+          <a:lstStyle/>
+          <a:p>
+            <a:pPr algn="l"/>
+            <a:r>
+              <a:rPr sz="4200" b="1" i="0">
+                <a:solidFill>
+                  <a:srgbClr val="0072CE"/>
+                </a:solidFill>
+                <a:latin typeface="Arial"/>
+              </a:rPr>
+              <a:t>Cloud or On-Prem</a:t>
+            </a:r>
+          </a:p>
+        </p:txBody>
+      </p:sp>
+      <p:sp>
+        <p:nvSpPr>
+          <p:cNvPr id="6" name="TextBox 5"/>
+          <p:cNvSpPr/>
+          <p:nvPr>
+            <p:ph type="body" idx="1"/>
+          </p:nvPr>
+        </p:nvSpPr>
+        <p:spPr>
+          <a:xfrm>
+            <a:off x="457200" y="2776728"/>
+            <a:ext cx="4792980" cy="914400"/>
+          </a:xfrm>
+          <a:prstGeom prst="rect">
+            <a:avLst/>
+          </a:prstGeom>
+          <a:noFill/>
+        </p:spPr>
+        <p:txBody>
+          <a:bodyPr wrap="none" lIns="0" rIns="0">
+            <a:noAutofit/>
+          </a:bodyPr>
+          <a:lstStyle/>
+          <a:p>
+            <a:pPr algn="ctr"/>
+            <a:r>
+              <a:rPr sz="6000" b="1" i="0">
+                <a:solidFill>
+                  <a:srgbClr val="0A2240"/>
+                </a:solidFill>
+                <a:latin typeface="Arial"/>
+              </a:rPr>
+              <a:t>3 wks</a:t>
+            </a:r>
+          </a:p>
+        </p:txBody>
+      </p:sp>
+      <p:sp>
+        <p:nvSpPr>
+          <p:cNvPr id="7" name="TextBox 6"/>
+          <p:cNvSpPr/>
+          <p:nvPr>
+            <p:ph type="body" idx="2"/>
+          </p:nvPr>
+        </p:nvSpPr>
+        <p:spPr>
+          <a:xfrm>
+            <a:off x="0" y="3965448"/>
+            <a:ext cx="5707380" cy="518159"/>
+          </a:xfrm>
+          <a:prstGeom prst="rect">
+            <a:avLst/>
+          </a:prstGeom>
+          <a:noFill/>
+        </p:spPr>
+        <p:txBody>
+          <a:bodyPr wrap="none" lIns="0" rIns="0">
+            <a:noAutofit/>
+          </a:bodyPr>
+          <a:lstStyle/>
+          <a:p>
+            <a:pPr algn="ctr"/>
+            <a:r>
+              <a:rPr sz="3400" b="0" i="0">
+                <a:solidFill>
+                  <a:srgbClr val="0A2240"/>
+                </a:solidFill>
+                <a:latin typeface="Arial"/>
+              </a:rPr>
+              <a:t>Cloud time-to-launch</a:t>
+            </a:r>
+          </a:p>
+        </p:txBody>
+      </p:sp>
+      <p:sp>
+        <p:nvSpPr>
+          <p:cNvPr id="8" name="TextBox 7"/>
+          <p:cNvSpPr/>
+          <p:nvPr>
+            <p:ph type="body" idx="3"/>
+          </p:nvPr>
+        </p:nvSpPr>
+        <p:spPr>
+          <a:xfrm>
+            <a:off x="6941820" y="2776728"/>
+            <a:ext cx="4792980" cy="914400"/>
+          </a:xfrm>
+          <a:prstGeom prst="rect">
+            <a:avLst/>
+          </a:prstGeom>
+          <a:noFill/>
+        </p:spPr>
+        <p:txBody>
+          <a:bodyPr wrap="none" lIns="0" rIns="0">
+            <a:noAutofit/>
+          </a:bodyPr>
+          <a:lstStyle/>
+          <a:p>
+            <a:pPr algn="ctr"/>
+            <a:r>
+              <a:rPr sz="6000" b="1" i="0">
+                <a:solidFill>
+                  <a:srgbClr val="0A2240"/>
+                </a:solidFill>
+                <a:latin typeface="Arial"/>
+              </a:rPr>
+              <a:t>6 mo</a:t>
+            </a:r>
+          </a:p>
+        </p:txBody>
+      </p:sp>
+      <p:sp>
+        <p:nvSpPr>
+          <p:cNvPr id="9" name="TextBox 8"/>
+          <p:cNvSpPr/>
+          <p:nvPr>
+            <p:ph type="body" idx="4"/>
+          </p:nvPr>
+        </p:nvSpPr>
+        <p:spPr>
+          <a:xfrm>
+            <a:off x="6484620" y="3965448"/>
+            <a:ext cx="5707380" cy="518159"/>
+          </a:xfrm>
+          <a:prstGeom prst="rect">
+            <a:avLst/>
+          </a:prstGeom>
+          <a:noFill/>
+        </p:spPr>
+        <p:txBody>
+          <a:bodyPr wrap="none" lIns="0" rIns="0">
+            <a:noAutofit/>
+          </a:bodyPr>
+          <a:lstStyle/>
+          <a:p>
+            <a:pPr algn="ctr"/>
+            <a:r>
+              <a:rPr sz="3400" b="0" i="0">
+                <a:solidFill>
+                  <a:srgbClr val="0A2240"/>
+                </a:solidFill>
+                <a:latin typeface="Arial"/>
+              </a:rPr>
+              <a:t>On-prem time-to-launch</a:t>
+            </a:r>
+          </a:p>
+        </p:txBody>
+      </p:sp>
+      <p:sp>
+        <p:nvSpPr>
+          <p:cNvPr id="10" name="TextBox 9"/>
+          <p:cNvSpPr/>
+          <p:nvPr>
+            <p:ph type="body" idx="5"/>
+          </p:nvPr>
+        </p:nvSpPr>
+        <p:spPr>
+          <a:xfrm>
+            <a:off x="5435323" y="3310127"/>
+            <a:ext cx="1321354" cy="640080"/>
+          </a:xfrm>
+          <a:prstGeom prst="rect">
+            <a:avLst/>
+          </a:prstGeom>
+          <a:noFill/>
+        </p:spPr>
+        <p:txBody>
+          <a:bodyPr wrap="none" lIns="0" rIns="0">
+            <a:noAutofit/>
+          </a:bodyPr>
+          <a:lstStyle/>
+          <a:p>
+            <a:pPr algn="ctr"/>
+            <a:r>
+              <a:rPr sz="4200" b="1" i="0">
+                <a:solidFill>
+                  <a:srgbClr val="0A2240"/>
+                </a:solidFill>
+                <a:latin typeface="Arial"/>
+              </a:rPr>
+              <a:t>VS</a:t>
             </a:r>
           </a:p>
         </p:txBody>
@@ -11107,294 +10737,6 @@
 
 <file path=ppt/slideLayouts/slideLayout30.xml><?xml version="1.0" encoding="utf-8"?>
 <p:sldLayout xmlns:a="http://schemas.openxmlformats.org/drawingml/2006/main" xmlns:r="http://schemas.openxmlformats.org/officeDocument/2006/relationships" xmlns:p="http://schemas.openxmlformats.org/presentationml/2006/main" type="blank" preserve="1">
-  <p:cSld name="slidekit · This vs That">
-    <p:bg>
-      <p:bgPr>
-        <a:solidFill>
-          <a:srgbClr val="FFFFFF"/>
-        </a:solidFill>
-        <a:effectLst/>
-      </p:bgPr>
-    </p:bg>
-    <p:spTree>
-      <p:nvGrpSpPr>
-        <p:cNvPr id="1" name=""/>
-        <p:cNvGrpSpPr/>
-        <p:nvPr/>
-      </p:nvGrpSpPr>
-      <p:grpSpPr>
-        <a:xfrm>
-          <a:off x="0" y="0"/>
-          <a:ext cx="0" cy="0"/>
-          <a:chOff x="0" y="0"/>
-          <a:chExt cx="0" cy="0"/>
-        </a:xfrm>
-      </p:grpSpPr>
-      <p:sp>
-        <p:nvSpPr>
-          <p:cNvPr id="4" name="Slide Number Placeholder 3"/>
-          <p:cNvSpPr>
-            <a:spLocks noGrp="1"/>
-          </p:cNvSpPr>
-          <p:nvPr>
-            <p:ph type="sldNum" sz="quarter" idx="12"/>
-          </p:nvPr>
-        </p:nvSpPr>
-        <p:spPr>
-          <a:xfrm>
-            <a:off x="11186160" y="6035040"/>
-            <a:ext cx="548640" cy="365760"/>
-          </a:xfrm>
-        </p:spPr>
-        <p:txBody>
-          <a:bodyPr/>
-          <a:lstStyle/>
-          <a:p>
-            <a:fld id="{C1FF6DA9-008F-8B48-92A6-B652298478BF}" type="slidenum">
-              <a:rPr lang="en-US" smtClean="0"/>
-              <a:t>‹#›</a:t>
-            </a:fld>
-            <a:endParaRPr lang="en-US"/>
-          </a:p>
-        </p:txBody>
-      </p:sp>
-      <p:sp>
-        <p:nvSpPr>
-          <p:cNvPr id="5" name="TextBox 4"/>
-          <p:cNvSpPr/>
-          <p:nvPr>
-            <p:ph type="title"/>
-          </p:nvPr>
-        </p:nvSpPr>
-        <p:spPr>
-          <a:xfrm>
-            <a:off x="457200" y="457200"/>
-            <a:ext cx="11277600" cy="768096"/>
-          </a:xfrm>
-          <a:prstGeom prst="rect">
-            <a:avLst/>
-          </a:prstGeom>
-          <a:noFill/>
-        </p:spPr>
-        <p:txBody>
-          <a:bodyPr wrap="none" lIns="0" rIns="0">
-            <a:noAutofit/>
-          </a:bodyPr>
-          <a:lstStyle/>
-          <a:p>
-            <a:pPr algn="l"/>
-            <a:r>
-              <a:rPr sz="4200" b="1" i="0">
-                <a:solidFill>
-                  <a:srgbClr val="0072CE"/>
-                </a:solidFill>
-                <a:latin typeface="Arial"/>
-              </a:rPr>
-              <a:t>Cloud or On-Prem</a:t>
-            </a:r>
-          </a:p>
-        </p:txBody>
-      </p:sp>
-      <p:sp>
-        <p:nvSpPr>
-          <p:cNvPr id="6" name="TextBox 5"/>
-          <p:cNvSpPr/>
-          <p:nvPr>
-            <p:ph type="body" idx="1"/>
-          </p:nvPr>
-        </p:nvSpPr>
-        <p:spPr>
-          <a:xfrm>
-            <a:off x="457200" y="2776728"/>
-            <a:ext cx="4792980" cy="914400"/>
-          </a:xfrm>
-          <a:prstGeom prst="rect">
-            <a:avLst/>
-          </a:prstGeom>
-          <a:noFill/>
-        </p:spPr>
-        <p:txBody>
-          <a:bodyPr wrap="none" lIns="0" rIns="0">
-            <a:noAutofit/>
-          </a:bodyPr>
-          <a:lstStyle/>
-          <a:p>
-            <a:pPr algn="ctr"/>
-            <a:r>
-              <a:rPr sz="6000" b="1" i="0">
-                <a:solidFill>
-                  <a:srgbClr val="0A2240"/>
-                </a:solidFill>
-                <a:latin typeface="Arial"/>
-              </a:rPr>
-              <a:t>3 wks</a:t>
-            </a:r>
-          </a:p>
-        </p:txBody>
-      </p:sp>
-      <p:sp>
-        <p:nvSpPr>
-          <p:cNvPr id="7" name="TextBox 6"/>
-          <p:cNvSpPr/>
-          <p:nvPr>
-            <p:ph type="body" idx="2"/>
-          </p:nvPr>
-        </p:nvSpPr>
-        <p:spPr>
-          <a:xfrm>
-            <a:off x="0" y="3965448"/>
-            <a:ext cx="5707380" cy="518159"/>
-          </a:xfrm>
-          <a:prstGeom prst="rect">
-            <a:avLst/>
-          </a:prstGeom>
-          <a:noFill/>
-        </p:spPr>
-        <p:txBody>
-          <a:bodyPr wrap="none" lIns="0" rIns="0">
-            <a:noAutofit/>
-          </a:bodyPr>
-          <a:lstStyle/>
-          <a:p>
-            <a:pPr algn="ctr"/>
-            <a:r>
-              <a:rPr sz="3400" b="0" i="0">
-                <a:solidFill>
-                  <a:srgbClr val="0A2240"/>
-                </a:solidFill>
-                <a:latin typeface="Arial"/>
-              </a:rPr>
-              <a:t>Cloud time-to-launch</a:t>
-            </a:r>
-          </a:p>
-        </p:txBody>
-      </p:sp>
-      <p:sp>
-        <p:nvSpPr>
-          <p:cNvPr id="8" name="TextBox 7"/>
-          <p:cNvSpPr/>
-          <p:nvPr>
-            <p:ph type="body" idx="3"/>
-          </p:nvPr>
-        </p:nvSpPr>
-        <p:spPr>
-          <a:xfrm>
-            <a:off x="6941820" y="2776728"/>
-            <a:ext cx="4792980" cy="914400"/>
-          </a:xfrm>
-          <a:prstGeom prst="rect">
-            <a:avLst/>
-          </a:prstGeom>
-          <a:noFill/>
-        </p:spPr>
-        <p:txBody>
-          <a:bodyPr wrap="none" lIns="0" rIns="0">
-            <a:noAutofit/>
-          </a:bodyPr>
-          <a:lstStyle/>
-          <a:p>
-            <a:pPr algn="ctr"/>
-            <a:r>
-              <a:rPr sz="6000" b="1" i="0">
-                <a:solidFill>
-                  <a:srgbClr val="0A2240"/>
-                </a:solidFill>
-                <a:latin typeface="Arial"/>
-              </a:rPr>
-              <a:t>6 mo</a:t>
-            </a:r>
-          </a:p>
-        </p:txBody>
-      </p:sp>
-      <p:sp>
-        <p:nvSpPr>
-          <p:cNvPr id="9" name="TextBox 8"/>
-          <p:cNvSpPr/>
-          <p:nvPr>
-            <p:ph type="body" idx="4"/>
-          </p:nvPr>
-        </p:nvSpPr>
-        <p:spPr>
-          <a:xfrm>
-            <a:off x="6484620" y="3965448"/>
-            <a:ext cx="5707380" cy="518159"/>
-          </a:xfrm>
-          <a:prstGeom prst="rect">
-            <a:avLst/>
-          </a:prstGeom>
-          <a:noFill/>
-        </p:spPr>
-        <p:txBody>
-          <a:bodyPr wrap="none" lIns="0" rIns="0">
-            <a:noAutofit/>
-          </a:bodyPr>
-          <a:lstStyle/>
-          <a:p>
-            <a:pPr algn="ctr"/>
-            <a:r>
-              <a:rPr sz="3400" b="0" i="0">
-                <a:solidFill>
-                  <a:srgbClr val="0A2240"/>
-                </a:solidFill>
-                <a:latin typeface="Arial"/>
-              </a:rPr>
-              <a:t>On-prem time-to-launch</a:t>
-            </a:r>
-          </a:p>
-        </p:txBody>
-      </p:sp>
-      <p:sp>
-        <p:nvSpPr>
-          <p:cNvPr id="10" name="TextBox 9"/>
-          <p:cNvSpPr/>
-          <p:nvPr>
-            <p:ph type="body" idx="5"/>
-          </p:nvPr>
-        </p:nvSpPr>
-        <p:spPr>
-          <a:xfrm>
-            <a:off x="5435323" y="3310127"/>
-            <a:ext cx="1321354" cy="640080"/>
-          </a:xfrm>
-          <a:prstGeom prst="rect">
-            <a:avLst/>
-          </a:prstGeom>
-          <a:noFill/>
-        </p:spPr>
-        <p:txBody>
-          <a:bodyPr wrap="none" lIns="0" rIns="0">
-            <a:noAutofit/>
-          </a:bodyPr>
-          <a:lstStyle/>
-          <a:p>
-            <a:pPr algn="ctr"/>
-            <a:r>
-              <a:rPr sz="4200" b="1" i="0">
-                <a:solidFill>
-                  <a:srgbClr val="5B6B82"/>
-                </a:solidFill>
-                <a:latin typeface="Arial"/>
-              </a:rPr>
-              <a:t>VS</a:t>
-            </a:r>
-          </a:p>
-        </p:txBody>
-      </p:sp>
-    </p:spTree>
-    <p:extLst>
-      <p:ext uri="{BB962C8B-B14F-4D97-AF65-F5344CB8AC3E}">
-        <p14:creationId xmlns:p14="http://schemas.microsoft.com/office/powerpoint/2010/main" val="1212999818"/>
-      </p:ext>
-    </p:extLst>
-  </p:cSld>
-  <p:clrMapOvr>
-    <a:masterClrMapping/>
-  </p:clrMapOvr>
-</p:sldLayout>
-</file>
-
-<file path=ppt/slideLayouts/slideLayout31.xml><?xml version="1.0" encoding="utf-8"?>
-<p:sldLayout xmlns:a="http://schemas.openxmlformats.org/drawingml/2006/main" xmlns:r="http://schemas.openxmlformats.org/officeDocument/2006/relationships" xmlns:p="http://schemas.openxmlformats.org/presentationml/2006/main" type="blank" preserve="1">
   <p:cSld name="slidekit · KPI Grid">
     <p:bg>
       <p:bgPr>
@@ -11917,7 +11259,7 @@
         </p:nvSpPr>
         <p:spPr>
           <a:xfrm>
-            <a:off x="4307840" y="3797808"/>
+            <a:off x="4307840" y="4056888"/>
             <a:ext cx="3576320" cy="640080"/>
           </a:xfrm>
           <a:prstGeom prst="rect">
@@ -11954,7 +11296,7 @@
         </p:nvSpPr>
         <p:spPr>
           <a:xfrm>
-            <a:off x="5559552" y="4492752"/>
+            <a:off x="5559552" y="4751832"/>
             <a:ext cx="1072896" cy="54864"/>
           </a:xfrm>
           <a:prstGeom prst="rect">
@@ -11986,16 +11328,16 @@
         </p:nvSpPr>
         <p:spPr>
           <a:xfrm>
-            <a:off x="4307840" y="4602480"/>
-            <a:ext cx="3576320" cy="1127760"/>
-          </a:xfrm>
-          <a:prstGeom prst="rect">
-            <a:avLst/>
-          </a:prstGeom>
-          <a:noFill/>
-        </p:spPr>
-        <p:txBody>
-          <a:bodyPr wrap="square" lIns="0" rIns="0">
+            <a:off x="3943896" y="4861560"/>
+            <a:ext cx="4304208" cy="609600"/>
+          </a:xfrm>
+          <a:prstGeom prst="rect">
+            <a:avLst/>
+          </a:prstGeom>
+          <a:noFill/>
+        </p:spPr>
+        <p:txBody>
+          <a:bodyPr wrap="none" lIns="0" rIns="0">
             <a:noAutofit/>
           </a:bodyPr>
           <a:lstStyle/>
@@ -12008,7 +11350,7 @@
                 </a:solidFill>
                 <a:latin typeface="Arial"/>
               </a:rPr>
-              <a:t>Avg. time to value</a:t>
+              <a:t>Time to value</a:t>
             </a:r>
           </a:p>
         </p:txBody>
@@ -12132,7 +11474,7 @@
 </p:sldLayout>
 </file>
 
-<file path=ppt/slideLayouts/slideLayout32.xml><?xml version="1.0" encoding="utf-8"?>
+<file path=ppt/slideLayouts/slideLayout31.xml><?xml version="1.0" encoding="utf-8"?>
 <p:sldLayout xmlns:a="http://schemas.openxmlformats.org/drawingml/2006/main" xmlns:r="http://schemas.openxmlformats.org/officeDocument/2006/relationships" xmlns:p="http://schemas.openxmlformats.org/presentationml/2006/main" type="blank" preserve="1">
   <p:cSld name="slidekit · Chart With Insight">
     <p:bg>
@@ -12319,7 +11661,7 @@
             <a:r>
               <a:rPr sz="2500" b="0" i="0">
                 <a:solidFill>
-                  <a:srgbClr val="5B6B82"/>
+                  <a:srgbClr val="0A2240"/>
                 </a:solidFill>
                 <a:latin typeface="Arial"/>
               </a:rPr>
@@ -12425,7 +11767,7 @@
             <a:r>
               <a:rPr sz="2500" b="0" i="0">
                 <a:solidFill>
-                  <a:srgbClr val="5B6B82"/>
+                  <a:srgbClr val="0A2240"/>
                 </a:solidFill>
                 <a:latin typeface="Arial"/>
               </a:rPr>
@@ -12531,7 +11873,7 @@
             <a:r>
               <a:rPr sz="2500" b="0" i="0">
                 <a:solidFill>
-                  <a:srgbClr val="5B6B82"/>
+                  <a:srgbClr val="0A2240"/>
                 </a:solidFill>
                 <a:latin typeface="Arial"/>
               </a:rPr>
@@ -12637,7 +11979,7 @@
             <a:r>
               <a:rPr sz="2500" b="0" i="0">
                 <a:solidFill>
-                  <a:srgbClr val="5B6B82"/>
+                  <a:srgbClr val="0A2240"/>
                 </a:solidFill>
                 <a:latin typeface="Arial"/>
               </a:rPr>
@@ -12656,8 +11998,8 @@
         </p:nvSpPr>
         <p:spPr>
           <a:xfrm>
-            <a:off x="7498080" y="1770888"/>
-            <a:ext cx="128016" cy="3718560"/>
+            <a:off x="7498080" y="3325368"/>
+            <a:ext cx="128016" cy="609600"/>
           </a:xfrm>
           <a:prstGeom prst="rect">
             <a:avLst/>
@@ -12688,16 +12030,16 @@
         </p:nvSpPr>
         <p:spPr>
           <a:xfrm>
-            <a:off x="8037576" y="1770888"/>
-            <a:ext cx="3697224" cy="3718560"/>
-          </a:xfrm>
-          <a:prstGeom prst="rect">
-            <a:avLst/>
-          </a:prstGeom>
-          <a:noFill/>
-        </p:spPr>
-        <p:txBody>
-          <a:bodyPr wrap="square" lIns="0" rIns="0">
+            <a:off x="8037576" y="3325368"/>
+            <a:ext cx="4154424" cy="609600"/>
+          </a:xfrm>
+          <a:prstGeom prst="rect">
+            <a:avLst/>
+          </a:prstGeom>
+          <a:noFill/>
+        </p:spPr>
+        <p:txBody>
+          <a:bodyPr wrap="none" lIns="0" rIns="0">
             <a:noAutofit/>
           </a:bodyPr>
           <a:lstStyle/>
@@ -12710,7 +12052,7 @@
                 </a:solidFill>
                 <a:latin typeface="Arial"/>
               </a:rPr>
-              <a:t>Activations nearly quadrupled once self-serve onboarding shipped in February.</a:t>
+              <a:t>Activations 4x.</a:t>
             </a:r>
           </a:p>
         </p:txBody>
@@ -12728,7 +12070,7 @@
 </p:sldLayout>
 </file>
 
-<file path=ppt/slideLayouts/slideLayout33.xml><?xml version="1.0" encoding="utf-8"?>
+<file path=ppt/slideLayouts/slideLayout32.xml><?xml version="1.0" encoding="utf-8"?>
 <p:sldLayout xmlns:a="http://schemas.openxmlformats.org/drawingml/2006/main" xmlns:r="http://schemas.openxmlformats.org/officeDocument/2006/relationships" xmlns:p="http://schemas.openxmlformats.org/presentationml/2006/main" type="blank" preserve="1">
   <p:cSld name="slidekit · Table">
     <p:bg>
@@ -12846,7 +12188,7 @@
             <a:r>
               <a:rPr sz="3400" b="1" i="0">
                 <a:solidFill>
-                  <a:srgbClr val="123A6B"/>
+                  <a:srgbClr val="0072CE"/>
                 </a:solidFill>
                 <a:latin typeface="Arial"/>
               </a:rPr>
@@ -12883,7 +12225,7 @@
             <a:r>
               <a:rPr sz="3400" b="1" i="0">
                 <a:solidFill>
-                  <a:srgbClr val="123A6B"/>
+                  <a:srgbClr val="0072CE"/>
                 </a:solidFill>
                 <a:latin typeface="Arial"/>
               </a:rPr>
@@ -12920,7 +12262,7 @@
             <a:r>
               <a:rPr sz="3400" b="1" i="0">
                 <a:solidFill>
-                  <a:srgbClr val="123A6B"/>
+                  <a:srgbClr val="0072CE"/>
                 </a:solidFill>
                 <a:latin typeface="Arial"/>
               </a:rPr>
@@ -13418,7 +12760,7 @@
 </p:sldLayout>
 </file>
 
-<file path=ppt/slideLayouts/slideLayout34.xml><?xml version="1.0" encoding="utf-8"?>
+<file path=ppt/slideLayouts/slideLayout33.xml><?xml version="1.0" encoding="utf-8"?>
 <p:sldLayout xmlns:a="http://schemas.openxmlformats.org/drawingml/2006/main" xmlns:r="http://schemas.openxmlformats.org/officeDocument/2006/relationships" xmlns:p="http://schemas.openxmlformats.org/presentationml/2006/main" type="blank" preserve="1">
   <p:cSld name="slidekit · Metric Comparison">
     <p:bg>
@@ -13518,7 +12860,7 @@
         </p:nvSpPr>
         <p:spPr>
           <a:xfrm>
-            <a:off x="457200" y="2075688"/>
+            <a:off x="457200" y="2334768"/>
             <a:ext cx="3576320" cy="914400"/>
           </a:xfrm>
           <a:prstGeom prst="rect">
@@ -13555,16 +12897,16 @@
         </p:nvSpPr>
         <p:spPr>
           <a:xfrm>
-            <a:off x="457200" y="3264408"/>
-            <a:ext cx="3576320" cy="1127760"/>
-          </a:xfrm>
-          <a:prstGeom prst="rect">
-            <a:avLst/>
-          </a:prstGeom>
-          <a:noFill/>
-        </p:spPr>
-        <p:txBody>
-          <a:bodyPr wrap="square" lIns="0" rIns="0">
+            <a:off x="457200" y="3523488"/>
+            <a:ext cx="3576320" cy="609600"/>
+          </a:xfrm>
+          <a:prstGeom prst="rect">
+            <a:avLst/>
+          </a:prstGeom>
+          <a:noFill/>
+        </p:spPr>
+        <p:txBody>
+          <a:bodyPr wrap="none" lIns="0" rIns="0">
             <a:noAutofit/>
           </a:bodyPr>
           <a:lstStyle/>
@@ -13577,7 +12919,7 @@
                 </a:solidFill>
                 <a:latin typeface="Arial"/>
               </a:rPr>
-              <a:t>Annual recurring revenue</a:t>
+              <a:t>Revenue</a:t>
             </a:r>
           </a:p>
         </p:txBody>
@@ -13592,7 +12934,7 @@
         </p:nvSpPr>
         <p:spPr>
           <a:xfrm>
-            <a:off x="1522569" y="4666488"/>
+            <a:off x="1522569" y="4407408"/>
             <a:ext cx="1445581" cy="518159"/>
           </a:xfrm>
           <a:prstGeom prst="rect">
@@ -13624,7 +12966,7 @@
         </p:nvSpPr>
         <p:spPr>
           <a:xfrm>
-            <a:off x="1260802" y="4666488"/>
+            <a:off x="1260802" y="4407408"/>
             <a:ext cx="1969115" cy="518159"/>
           </a:xfrm>
           <a:prstGeom prst="rect">
@@ -13661,7 +13003,7 @@
         </p:nvSpPr>
         <p:spPr>
           <a:xfrm>
-            <a:off x="4307840" y="2075688"/>
+            <a:off x="4307840" y="2334768"/>
             <a:ext cx="3576320" cy="914400"/>
           </a:xfrm>
           <a:prstGeom prst="rect">
@@ -13698,8 +13040,8 @@
         </p:nvSpPr>
         <p:spPr>
           <a:xfrm>
-            <a:off x="3834934" y="3264408"/>
-            <a:ext cx="4522132" cy="1127760"/>
+            <a:off x="3834934" y="3523488"/>
+            <a:ext cx="4522132" cy="609600"/>
           </a:xfrm>
           <a:prstGeom prst="rect">
             <a:avLst/>
@@ -13735,7 +13077,7 @@
         </p:nvSpPr>
         <p:spPr>
           <a:xfrm>
-            <a:off x="5175547" y="4666488"/>
+            <a:off x="5175547" y="4407408"/>
             <a:ext cx="1840906" cy="518159"/>
           </a:xfrm>
           <a:prstGeom prst="rect">
@@ -13767,7 +13109,7 @@
         </p:nvSpPr>
         <p:spPr>
           <a:xfrm>
-            <a:off x="4795183" y="4666488"/>
+            <a:off x="4795183" y="4407408"/>
             <a:ext cx="2601634" cy="518159"/>
           </a:xfrm>
           <a:prstGeom prst="rect">
@@ -13804,7 +13146,7 @@
         </p:nvSpPr>
         <p:spPr>
           <a:xfrm>
-            <a:off x="8158480" y="2075688"/>
+            <a:off x="8158480" y="2334768"/>
             <a:ext cx="3576320" cy="914400"/>
           </a:xfrm>
           <a:prstGeom prst="rect">
@@ -13841,16 +13183,16 @@
         </p:nvSpPr>
         <p:spPr>
           <a:xfrm>
-            <a:off x="8158480" y="3264408"/>
-            <a:ext cx="3576320" cy="1127760"/>
-          </a:xfrm>
-          <a:prstGeom prst="rect">
-            <a:avLst/>
-          </a:prstGeom>
-          <a:noFill/>
-        </p:spPr>
-        <p:txBody>
-          <a:bodyPr wrap="square" lIns="0" rIns="0">
+            <a:off x="7701280" y="3523488"/>
+            <a:ext cx="4490720" cy="609600"/>
+          </a:xfrm>
+          <a:prstGeom prst="rect">
+            <a:avLst/>
+          </a:prstGeom>
+          <a:noFill/>
+        </p:spPr>
+        <p:txBody>
+          <a:bodyPr wrap="none" lIns="0" rIns="0">
             <a:noAutofit/>
           </a:bodyPr>
           <a:lstStyle/>
@@ -13863,7 +13205,7 @@
                 </a:solidFill>
                 <a:latin typeface="Arial"/>
               </a:rPr>
-              <a:t>Net promoter score</a:t>
+              <a:t>Promoter score</a:t>
             </a:r>
           </a:p>
         </p:txBody>
@@ -13878,7 +13220,7 @@
         </p:nvSpPr>
         <p:spPr>
           <a:xfrm>
-            <a:off x="9427731" y="4666488"/>
+            <a:off x="9427731" y="4407408"/>
             <a:ext cx="1037817" cy="518159"/>
           </a:xfrm>
           <a:prstGeom prst="rect">
@@ -13910,7 +13252,7 @@
         </p:nvSpPr>
         <p:spPr>
           <a:xfrm>
-            <a:off x="9288294" y="4666488"/>
+            <a:off x="9288294" y="4407408"/>
             <a:ext cx="1316691" cy="518159"/>
           </a:xfrm>
           <a:prstGeom prst="rect">
@@ -13950,7 +13292,7 @@
 </p:sldLayout>
 </file>
 
-<file path=ppt/slideLayouts/slideLayout35.xml><?xml version="1.0" encoding="utf-8"?>
+<file path=ppt/slideLayouts/slideLayout34.xml><?xml version="1.0" encoding="utf-8"?>
 <p:sldLayout xmlns:a="http://schemas.openxmlformats.org/drawingml/2006/main" xmlns:r="http://schemas.openxmlformats.org/officeDocument/2006/relationships" xmlns:p="http://schemas.openxmlformats.org/presentationml/2006/main" type="blank" preserve="1">
   <p:cSld name="slidekit · Process Steps">
     <p:bg>
@@ -14068,7 +13410,7 @@
             <a:r>
               <a:rPr sz="4200" b="1" i="0">
                 <a:solidFill>
-                  <a:srgbClr val="123A6B"/>
+                  <a:srgbClr val="0072CE"/>
                 </a:solidFill>
                 <a:latin typeface="Arial"/>
               </a:rPr>
@@ -14088,13 +13430,13 @@
         <p:spPr>
           <a:xfrm>
             <a:off x="457200" y="2194560"/>
-            <a:ext cx="784098" cy="54864"/>
+            <a:ext cx="593303" cy="54864"/>
           </a:xfrm>
           <a:prstGeom prst="rect">
             <a:avLst/>
           </a:prstGeom>
           <a:solidFill>
-            <a:srgbClr val="123A6B"/>
+            <a:srgbClr val="0072CE"/>
           </a:solidFill>
           <a:ln>
             <a:noFill/>
@@ -14137,7 +13479,7 @@
             <a:r>
               <a:rPr sz="3400" b="1" i="0">
                 <a:solidFill>
-                  <a:srgbClr val="123A6B"/>
+                  <a:srgbClr val="0072CE"/>
                 </a:solidFill>
                 <a:latin typeface="Arial"/>
               </a:rPr>
@@ -14211,7 +13553,7 @@
             <a:r>
               <a:rPr sz="4200" b="1" i="0">
                 <a:solidFill>
-                  <a:srgbClr val="123A6B"/>
+                  <a:srgbClr val="0072CE"/>
                 </a:solidFill>
                 <a:latin typeface="Arial"/>
               </a:rPr>
@@ -14231,13 +13573,13 @@
         <p:spPr>
           <a:xfrm>
             <a:off x="3345180" y="2194560"/>
-            <a:ext cx="784098" cy="54864"/>
+            <a:ext cx="593303" cy="54864"/>
           </a:xfrm>
           <a:prstGeom prst="rect">
             <a:avLst/>
           </a:prstGeom>
           <a:solidFill>
-            <a:srgbClr val="123A6B"/>
+            <a:srgbClr val="0072CE"/>
           </a:solidFill>
           <a:ln>
             <a:noFill/>
@@ -14280,7 +13622,7 @@
             <a:r>
               <a:rPr sz="3400" b="1" i="0">
                 <a:solidFill>
-                  <a:srgbClr val="123A6B"/>
+                  <a:srgbClr val="0072CE"/>
                 </a:solidFill>
                 <a:latin typeface="Arial"/>
               </a:rPr>
@@ -14354,7 +13696,7 @@
             <a:r>
               <a:rPr sz="4200" b="1" i="0">
                 <a:solidFill>
-                  <a:srgbClr val="123A6B"/>
+                  <a:srgbClr val="0072CE"/>
                 </a:solidFill>
                 <a:latin typeface="Arial"/>
               </a:rPr>
@@ -14374,13 +13716,13 @@
         <p:spPr>
           <a:xfrm>
             <a:off x="6233160" y="2194560"/>
-            <a:ext cx="784098" cy="54864"/>
+            <a:ext cx="593303" cy="54864"/>
           </a:xfrm>
           <a:prstGeom prst="rect">
             <a:avLst/>
           </a:prstGeom>
           <a:solidFill>
-            <a:srgbClr val="123A6B"/>
+            <a:srgbClr val="0072CE"/>
           </a:solidFill>
           <a:ln>
             <a:noFill/>
@@ -14423,7 +13765,7 @@
             <a:r>
               <a:rPr sz="3400" b="1" i="0">
                 <a:solidFill>
-                  <a:srgbClr val="123A6B"/>
+                  <a:srgbClr val="0072CE"/>
                 </a:solidFill>
                 <a:latin typeface="Arial"/>
               </a:rPr>
@@ -14497,7 +13839,7 @@
             <a:r>
               <a:rPr sz="4200" b="1" i="0">
                 <a:solidFill>
-                  <a:srgbClr val="123A6B"/>
+                  <a:srgbClr val="0072CE"/>
                 </a:solidFill>
                 <a:latin typeface="Arial"/>
               </a:rPr>
@@ -14517,13 +13859,13 @@
         <p:spPr>
           <a:xfrm>
             <a:off x="9121140" y="2194560"/>
-            <a:ext cx="784098" cy="54864"/>
+            <a:ext cx="593303" cy="54864"/>
           </a:xfrm>
           <a:prstGeom prst="rect">
             <a:avLst/>
           </a:prstGeom>
           <a:solidFill>
-            <a:srgbClr val="123A6B"/>
+            <a:srgbClr val="0072CE"/>
           </a:solidFill>
           <a:ln>
             <a:noFill/>
@@ -14566,7 +13908,7 @@
             <a:r>
               <a:rPr sz="3400" b="1" i="0">
                 <a:solidFill>
-                  <a:srgbClr val="123A6B"/>
+                  <a:srgbClr val="0072CE"/>
                 </a:solidFill>
                 <a:latin typeface="Arial"/>
               </a:rPr>
@@ -14625,7 +13967,7 @@
 </p:sldLayout>
 </file>
 
-<file path=ppt/slideLayouts/slideLayout36.xml><?xml version="1.0" encoding="utf-8"?>
+<file path=ppt/slideLayouts/slideLayout35.xml><?xml version="1.0" encoding="utf-8"?>
 <p:sldLayout xmlns:a="http://schemas.openxmlformats.org/drawingml/2006/main" xmlns:r="http://schemas.openxmlformats.org/officeDocument/2006/relationships" xmlns:p="http://schemas.openxmlformats.org/presentationml/2006/main" type="blank" preserve="1">
   <p:cSld name="slidekit · Roadmap">
     <p:bg>
@@ -15157,7 +14499,7 @@
 </p:sldLayout>
 </file>
 
-<file path=ppt/slideLayouts/slideLayout37.xml><?xml version="1.0" encoding="utf-8"?>
+<file path=ppt/slideLayouts/slideLayout36.xml><?xml version="1.0" encoding="utf-8"?>
 <p:sldLayout xmlns:a="http://schemas.openxmlformats.org/drawingml/2006/main" xmlns:r="http://schemas.openxmlformats.org/officeDocument/2006/relationships" xmlns:p="http://schemas.openxmlformats.org/presentationml/2006/main" type="blank" preserve="1">
   <p:cSld name="slidekit · Funnel">
     <p:bg>
@@ -15536,7 +14878,7 @@
 </p:sldLayout>
 </file>
 
-<file path=ppt/slideLayouts/slideLayout38.xml><?xml version="1.0" encoding="utf-8"?>
+<file path=ppt/slideLayouts/slideLayout37.xml><?xml version="1.0" encoding="utf-8"?>
 <p:sldLayout xmlns:a="http://schemas.openxmlformats.org/drawingml/2006/main" xmlns:r="http://schemas.openxmlformats.org/officeDocument/2006/relationships" xmlns:p="http://schemas.openxmlformats.org/presentationml/2006/main" type="blank" preserve="1">
   <p:cSld name="slidekit · Nested Circles">
     <p:bg>
@@ -15643,7 +14985,7 @@
             <a:avLst/>
           </a:prstGeom>
           <a:solidFill>
-            <a:srgbClr val="5B6B82"/>
+            <a:srgbClr val="0A2240"/>
           </a:solidFill>
           <a:ln>
             <a:noFill/>
@@ -15707,7 +15049,7 @@
             <a:avLst/>
           </a:prstGeom>
           <a:solidFill>
-            <a:srgbClr val="123A6B"/>
+            <a:srgbClr val="0A2240"/>
           </a:solidFill>
           <a:ln>
             <a:noFill/>
@@ -15957,7 +15299,7 @@
 </p:sldLayout>
 </file>
 
-<file path=ppt/slideLayouts/slideLayout39.xml><?xml version="1.0" encoding="utf-8"?>
+<file path=ppt/slideLayouts/slideLayout38.xml><?xml version="1.0" encoding="utf-8"?>
 <p:sldLayout xmlns:a="http://schemas.openxmlformats.org/drawingml/2006/main" xmlns:r="http://schemas.openxmlformats.org/officeDocument/2006/relationships" xmlns:p="http://schemas.openxmlformats.org/presentationml/2006/main" type="blank" preserve="1">
   <p:cSld name="slidekit · Pyramid">
     <p:bg>
@@ -16064,7 +15406,7 @@
             <a:avLst/>
           </a:prstGeom>
           <a:solidFill>
-            <a:srgbClr val="123A6B"/>
+            <a:srgbClr val="0072CE"/>
           </a:solidFill>
           <a:ln>
             <a:noFill/>
@@ -16202,7 +15544,7 @@
             <a:avLst/>
           </a:prstGeom>
           <a:solidFill>
-            <a:srgbClr val="123A6B"/>
+            <a:srgbClr val="0072CE"/>
           </a:solidFill>
           <a:ln>
             <a:noFill/>
@@ -16319,6 +15661,533 @@
                 <a:latin typeface="Arial"/>
               </a:rPr>
               <a:t>Tactics</a:t>
+            </a:r>
+          </a:p>
+        </p:txBody>
+      </p:sp>
+    </p:spTree>
+    <p:extLst>
+      <p:ext uri="{BB962C8B-B14F-4D97-AF65-F5344CB8AC3E}">
+        <p14:creationId xmlns:p14="http://schemas.microsoft.com/office/powerpoint/2010/main" val="1212999818"/>
+      </p:ext>
+    </p:extLst>
+  </p:cSld>
+  <p:clrMapOvr>
+    <a:masterClrMapping/>
+  </p:clrMapOvr>
+</p:sldLayout>
+</file>
+
+<file path=ppt/slideLayouts/slideLayout39.xml><?xml version="1.0" encoding="utf-8"?>
+<p:sldLayout xmlns:a="http://schemas.openxmlformats.org/drawingml/2006/main" xmlns:r="http://schemas.openxmlformats.org/officeDocument/2006/relationships" xmlns:p="http://schemas.openxmlformats.org/presentationml/2006/main" type="blank" preserve="1">
+  <p:cSld name="slidekit · SWOT">
+    <p:bg>
+      <p:bgPr>
+        <a:solidFill>
+          <a:srgbClr val="FFFFFF"/>
+        </a:solidFill>
+        <a:effectLst/>
+      </p:bgPr>
+    </p:bg>
+    <p:spTree>
+      <p:nvGrpSpPr>
+        <p:cNvPr id="1" name=""/>
+        <p:cNvGrpSpPr/>
+        <p:nvPr/>
+      </p:nvGrpSpPr>
+      <p:grpSpPr>
+        <a:xfrm>
+          <a:off x="0" y="0"/>
+          <a:ext cx="0" cy="0"/>
+          <a:chOff x="0" y="0"/>
+          <a:chExt cx="0" cy="0"/>
+        </a:xfrm>
+      </p:grpSpPr>
+      <p:sp>
+        <p:nvSpPr>
+          <p:cNvPr id="4" name="Slide Number Placeholder 3"/>
+          <p:cNvSpPr>
+            <a:spLocks noGrp="1"/>
+          </p:cNvSpPr>
+          <p:nvPr>
+            <p:ph type="sldNum" sz="quarter" idx="12"/>
+          </p:nvPr>
+        </p:nvSpPr>
+        <p:spPr>
+          <a:xfrm>
+            <a:off x="11186160" y="6035040"/>
+            <a:ext cx="548640" cy="365760"/>
+          </a:xfrm>
+        </p:spPr>
+        <p:txBody>
+          <a:bodyPr/>
+          <a:lstStyle/>
+          <a:p>
+            <a:fld id="{C1FF6DA9-008F-8B48-92A6-B652298478BF}" type="slidenum">
+              <a:rPr lang="en-US" smtClean="0"/>
+              <a:t>‹#›</a:t>
+            </a:fld>
+            <a:endParaRPr lang="en-US"/>
+          </a:p>
+        </p:txBody>
+      </p:sp>
+      <p:sp>
+        <p:nvSpPr>
+          <p:cNvPr id="5" name="TextBox 4"/>
+          <p:cNvSpPr/>
+          <p:nvPr>
+            <p:ph type="title"/>
+          </p:nvPr>
+        </p:nvSpPr>
+        <p:spPr>
+          <a:xfrm>
+            <a:off x="457200" y="457200"/>
+            <a:ext cx="11277600" cy="768096"/>
+          </a:xfrm>
+          <a:prstGeom prst="rect">
+            <a:avLst/>
+          </a:prstGeom>
+          <a:noFill/>
+        </p:spPr>
+        <p:txBody>
+          <a:bodyPr wrap="none" lIns="0" rIns="0">
+            <a:noAutofit/>
+          </a:bodyPr>
+          <a:lstStyle/>
+          <a:p>
+            <a:pPr algn="l"/>
+            <a:r>
+              <a:rPr sz="4200" b="1" i="0">
+                <a:solidFill>
+                  <a:srgbClr val="0072CE"/>
+                </a:solidFill>
+                <a:latin typeface="Arial"/>
+              </a:rPr>
+              <a:t>SWOT Analysis</a:t>
+            </a:r>
+          </a:p>
+        </p:txBody>
+      </p:sp>
+      <p:sp>
+        <p:nvSpPr>
+          <p:cNvPr id="6" name="TextBox 5"/>
+          <p:cNvSpPr/>
+          <p:nvPr>
+            <p:ph type="body" idx="1"/>
+          </p:nvPr>
+        </p:nvSpPr>
+        <p:spPr>
+          <a:xfrm>
+            <a:off x="457200" y="1499616"/>
+            <a:ext cx="5501640" cy="621791"/>
+          </a:xfrm>
+          <a:prstGeom prst="rect">
+            <a:avLst/>
+          </a:prstGeom>
+          <a:noFill/>
+        </p:spPr>
+        <p:txBody>
+          <a:bodyPr wrap="none" lIns="0" rIns="0">
+            <a:noAutofit/>
+          </a:bodyPr>
+          <a:lstStyle/>
+          <a:p>
+            <a:pPr algn="l"/>
+            <a:r>
+              <a:rPr sz="3400" b="1" i="0">
+                <a:solidFill>
+                  <a:srgbClr val="0072CE"/>
+                </a:solidFill>
+                <a:latin typeface="Arial"/>
+              </a:rPr>
+              <a:t>Strengths</a:t>
+            </a:r>
+          </a:p>
+        </p:txBody>
+      </p:sp>
+      <p:sp>
+        <p:nvSpPr>
+          <p:cNvPr id="7" name="Rectangle 6"/>
+          <p:cNvSpPr/>
+          <p:nvPr>
+            <p:ph type="body" idx="2"/>
+          </p:nvPr>
+        </p:nvSpPr>
+        <p:spPr>
+          <a:xfrm>
+            <a:off x="457200" y="2176271"/>
+            <a:ext cx="2015207" cy="54864"/>
+          </a:xfrm>
+          <a:prstGeom prst="rect">
+            <a:avLst/>
+          </a:prstGeom>
+          <a:solidFill>
+            <a:srgbClr val="0072CE"/>
+          </a:solidFill>
+          <a:ln>
+            <a:noFill/>
+          </a:ln>
+          <a:effectLst/>
+        </p:spPr>
+        <p:txBody>
+          <a:bodyPr rtlCol="0" anchor="ctr"/>
+          <a:lstStyle/>
+          <a:p>
+            <a:pPr algn="ctr"/>
+          </a:p>
+        </p:txBody>
+      </p:sp>
+      <p:sp>
+        <p:nvSpPr>
+          <p:cNvPr id="8" name="TextBox 7"/>
+          <p:cNvSpPr/>
+          <p:nvPr>
+            <p:ph type="body" idx="3"/>
+          </p:nvPr>
+        </p:nvSpPr>
+        <p:spPr>
+          <a:xfrm>
+            <a:off x="457200" y="2395727"/>
+            <a:ext cx="7863523" cy="609600"/>
+          </a:xfrm>
+          <a:prstGeom prst="rect">
+            <a:avLst/>
+          </a:prstGeom>
+          <a:noFill/>
+        </p:spPr>
+        <p:txBody>
+          <a:bodyPr wrap="none" lIns="0" rIns="0">
+            <a:noAutofit/>
+          </a:bodyPr>
+          <a:lstStyle/>
+          <a:p>
+            <a:pPr algn="l"/>
+            <a:r>
+              <a:rPr sz="3400" b="0" i="0">
+                <a:solidFill>
+                  <a:srgbClr val="0A2240"/>
+                </a:solidFill>
+                <a:latin typeface="Arial"/>
+              </a:rPr>
+              <a:t>Strong brand, loyal users</a:t>
+            </a:r>
+          </a:p>
+        </p:txBody>
+      </p:sp>
+      <p:sp>
+        <p:nvSpPr>
+          <p:cNvPr id="9" name="TextBox 8"/>
+          <p:cNvSpPr/>
+          <p:nvPr>
+            <p:ph type="body" idx="4"/>
+          </p:nvPr>
+        </p:nvSpPr>
+        <p:spPr>
+          <a:xfrm>
+            <a:off x="6233160" y="1499616"/>
+            <a:ext cx="5501640" cy="621791"/>
+          </a:xfrm>
+          <a:prstGeom prst="rect">
+            <a:avLst/>
+          </a:prstGeom>
+          <a:noFill/>
+        </p:spPr>
+        <p:txBody>
+          <a:bodyPr wrap="none" lIns="0" rIns="0">
+            <a:noAutofit/>
+          </a:bodyPr>
+          <a:lstStyle/>
+          <a:p>
+            <a:pPr algn="l"/>
+            <a:r>
+              <a:rPr sz="3400" b="1" i="0">
+                <a:solidFill>
+                  <a:srgbClr val="0A2240"/>
+                </a:solidFill>
+                <a:latin typeface="Arial"/>
+              </a:rPr>
+              <a:t>Weaknesses</a:t>
+            </a:r>
+          </a:p>
+        </p:txBody>
+      </p:sp>
+      <p:sp>
+        <p:nvSpPr>
+          <p:cNvPr id="10" name="Rectangle 9"/>
+          <p:cNvSpPr/>
+          <p:nvPr>
+            <p:ph type="body" idx="5"/>
+          </p:nvPr>
+        </p:nvSpPr>
+        <p:spPr>
+          <a:xfrm>
+            <a:off x="6233160" y="2176271"/>
+            <a:ext cx="2584686" cy="54864"/>
+          </a:xfrm>
+          <a:prstGeom prst="rect">
+            <a:avLst/>
+          </a:prstGeom>
+          <a:solidFill>
+            <a:srgbClr val="0A2240"/>
+          </a:solidFill>
+          <a:ln>
+            <a:noFill/>
+          </a:ln>
+          <a:effectLst/>
+        </p:spPr>
+        <p:txBody>
+          <a:bodyPr rtlCol="0" anchor="ctr"/>
+          <a:lstStyle/>
+          <a:p>
+            <a:pPr algn="ctr"/>
+          </a:p>
+        </p:txBody>
+      </p:sp>
+      <p:sp>
+        <p:nvSpPr>
+          <p:cNvPr id="11" name="TextBox 10"/>
+          <p:cNvSpPr/>
+          <p:nvPr>
+            <p:ph type="body" idx="6"/>
+          </p:nvPr>
+        </p:nvSpPr>
+        <p:spPr>
+          <a:xfrm>
+            <a:off x="6233160" y="2395727"/>
+            <a:ext cx="5958840" cy="609600"/>
+          </a:xfrm>
+          <a:prstGeom prst="rect">
+            <a:avLst/>
+          </a:prstGeom>
+          <a:noFill/>
+        </p:spPr>
+        <p:txBody>
+          <a:bodyPr wrap="none" lIns="0" rIns="0">
+            <a:noAutofit/>
+          </a:bodyPr>
+          <a:lstStyle/>
+          <a:p>
+            <a:pPr algn="l"/>
+            <a:r>
+              <a:rPr sz="3400" b="0" i="0">
+                <a:solidFill>
+                  <a:srgbClr val="0A2240"/>
+                </a:solidFill>
+                <a:latin typeface="Arial"/>
+              </a:rPr>
+              <a:t>Thin margins, small team</a:t>
+            </a:r>
+          </a:p>
+        </p:txBody>
+      </p:sp>
+      <p:sp>
+        <p:nvSpPr>
+          <p:cNvPr id="12" name="TextBox 11"/>
+          <p:cNvSpPr/>
+          <p:nvPr>
+            <p:ph type="body" idx="7"/>
+          </p:nvPr>
+        </p:nvSpPr>
+        <p:spPr>
+          <a:xfrm>
+            <a:off x="457200" y="3767328"/>
+            <a:ext cx="5501640" cy="621791"/>
+          </a:xfrm>
+          <a:prstGeom prst="rect">
+            <a:avLst/>
+          </a:prstGeom>
+          <a:noFill/>
+        </p:spPr>
+        <p:txBody>
+          <a:bodyPr wrap="none" lIns="0" rIns="0">
+            <a:noAutofit/>
+          </a:bodyPr>
+          <a:lstStyle/>
+          <a:p>
+            <a:pPr algn="l"/>
+            <a:r>
+              <a:rPr sz="3400" b="1" i="0">
+                <a:solidFill>
+                  <a:srgbClr val="0072CE"/>
+                </a:solidFill>
+                <a:latin typeface="Arial"/>
+              </a:rPr>
+              <a:t>Opportunities</a:t>
+            </a:r>
+          </a:p>
+        </p:txBody>
+      </p:sp>
+      <p:sp>
+        <p:nvSpPr>
+          <p:cNvPr id="13" name="Rectangle 12"/>
+          <p:cNvSpPr/>
+          <p:nvPr>
+            <p:ph type="body" idx="8"/>
+          </p:nvPr>
+        </p:nvSpPr>
+        <p:spPr>
+          <a:xfrm>
+            <a:off x="457200" y="4443983"/>
+            <a:ext cx="2830525" cy="54864"/>
+          </a:xfrm>
+          <a:prstGeom prst="rect">
+            <a:avLst/>
+          </a:prstGeom>
+          <a:solidFill>
+            <a:srgbClr val="0072CE"/>
+          </a:solidFill>
+          <a:ln>
+            <a:noFill/>
+          </a:ln>
+          <a:effectLst/>
+        </p:spPr>
+        <p:txBody>
+          <a:bodyPr rtlCol="0" anchor="ctr"/>
+          <a:lstStyle/>
+          <a:p>
+            <a:pPr algn="ctr"/>
+          </a:p>
+        </p:txBody>
+      </p:sp>
+      <p:sp>
+        <p:nvSpPr>
+          <p:cNvPr id="14" name="TextBox 13"/>
+          <p:cNvSpPr/>
+          <p:nvPr>
+            <p:ph type="body" idx="9"/>
+          </p:nvPr>
+        </p:nvSpPr>
+        <p:spPr>
+          <a:xfrm>
+            <a:off x="457200" y="4663439"/>
+            <a:ext cx="8015326" cy="609600"/>
+          </a:xfrm>
+          <a:prstGeom prst="rect">
+            <a:avLst/>
+          </a:prstGeom>
+          <a:noFill/>
+        </p:spPr>
+        <p:txBody>
+          <a:bodyPr wrap="none" lIns="0" rIns="0">
+            <a:noAutofit/>
+          </a:bodyPr>
+          <a:lstStyle/>
+          <a:p>
+            <a:pPr algn="l"/>
+            <a:r>
+              <a:rPr sz="3400" b="0" i="0">
+                <a:solidFill>
+                  <a:srgbClr val="0A2240"/>
+                </a:solidFill>
+                <a:latin typeface="Arial"/>
+              </a:rPr>
+              <a:t>New markets via partners</a:t>
+            </a:r>
+          </a:p>
+        </p:txBody>
+      </p:sp>
+      <p:sp>
+        <p:nvSpPr>
+          <p:cNvPr id="15" name="TextBox 14"/>
+          <p:cNvSpPr/>
+          <p:nvPr>
+            <p:ph type="body" idx="13"/>
+          </p:nvPr>
+        </p:nvSpPr>
+        <p:spPr>
+          <a:xfrm>
+            <a:off x="6233160" y="3767328"/>
+            <a:ext cx="5501640" cy="621791"/>
+          </a:xfrm>
+          <a:prstGeom prst="rect">
+            <a:avLst/>
+          </a:prstGeom>
+          <a:noFill/>
+        </p:spPr>
+        <p:txBody>
+          <a:bodyPr wrap="none" lIns="0" rIns="0">
+            <a:noAutofit/>
+          </a:bodyPr>
+          <a:lstStyle/>
+          <a:p>
+            <a:pPr algn="l"/>
+            <a:r>
+              <a:rPr sz="3400" b="1" i="0">
+                <a:solidFill>
+                  <a:srgbClr val="0A2240"/>
+                </a:solidFill>
+                <a:latin typeface="Arial"/>
+              </a:rPr>
+              <a:t>Threats</a:t>
+            </a:r>
+          </a:p>
+        </p:txBody>
+      </p:sp>
+      <p:sp>
+        <p:nvSpPr>
+          <p:cNvPr id="16" name="Rectangle 15"/>
+          <p:cNvSpPr/>
+          <p:nvPr>
+            <p:ph type="body" idx="14"/>
+          </p:nvPr>
+        </p:nvSpPr>
+        <p:spPr>
+          <a:xfrm>
+            <a:off x="6233160" y="4443983"/>
+            <a:ext cx="1559793" cy="54864"/>
+          </a:xfrm>
+          <a:prstGeom prst="rect">
+            <a:avLst/>
+          </a:prstGeom>
+          <a:solidFill>
+            <a:srgbClr val="0A2240"/>
+          </a:solidFill>
+          <a:ln>
+            <a:noFill/>
+          </a:ln>
+          <a:effectLst/>
+        </p:spPr>
+        <p:txBody>
+          <a:bodyPr rtlCol="0" anchor="ctr"/>
+          <a:lstStyle/>
+          <a:p>
+            <a:pPr algn="ctr"/>
+          </a:p>
+        </p:txBody>
+      </p:sp>
+      <p:sp>
+        <p:nvSpPr>
+          <p:cNvPr id="17" name="TextBox 16"/>
+          <p:cNvSpPr/>
+          <p:nvPr>
+            <p:ph type="body" idx="15"/>
+          </p:nvPr>
+        </p:nvSpPr>
+        <p:spPr>
+          <a:xfrm>
+            <a:off x="6233160" y="4663439"/>
+            <a:ext cx="5958840" cy="609600"/>
+          </a:xfrm>
+          <a:prstGeom prst="rect">
+            <a:avLst/>
+          </a:prstGeom>
+          <a:noFill/>
+        </p:spPr>
+        <p:txBody>
+          <a:bodyPr wrap="none" lIns="0" rIns="0">
+            <a:noAutofit/>
+          </a:bodyPr>
+          <a:lstStyle/>
+          <a:p>
+            <a:pPr algn="l"/>
+            <a:r>
+              <a:rPr sz="3400" b="0" i="0">
+                <a:solidFill>
+                  <a:srgbClr val="0A2240"/>
+                </a:solidFill>
+                <a:latin typeface="Arial"/>
+              </a:rPr>
+              <a:t>New entrants cut prices</a:t>
             </a:r>
           </a:p>
         </p:txBody>
@@ -16625,533 +16494,6 @@
 </file>
 
 <file path=ppt/slideLayouts/slideLayout40.xml><?xml version="1.0" encoding="utf-8"?>
-<p:sldLayout xmlns:a="http://schemas.openxmlformats.org/drawingml/2006/main" xmlns:r="http://schemas.openxmlformats.org/officeDocument/2006/relationships" xmlns:p="http://schemas.openxmlformats.org/presentationml/2006/main" type="blank" preserve="1">
-  <p:cSld name="slidekit · SWOT">
-    <p:bg>
-      <p:bgPr>
-        <a:solidFill>
-          <a:srgbClr val="FFFFFF"/>
-        </a:solidFill>
-        <a:effectLst/>
-      </p:bgPr>
-    </p:bg>
-    <p:spTree>
-      <p:nvGrpSpPr>
-        <p:cNvPr id="1" name=""/>
-        <p:cNvGrpSpPr/>
-        <p:nvPr/>
-      </p:nvGrpSpPr>
-      <p:grpSpPr>
-        <a:xfrm>
-          <a:off x="0" y="0"/>
-          <a:ext cx="0" cy="0"/>
-          <a:chOff x="0" y="0"/>
-          <a:chExt cx="0" cy="0"/>
-        </a:xfrm>
-      </p:grpSpPr>
-      <p:sp>
-        <p:nvSpPr>
-          <p:cNvPr id="4" name="Slide Number Placeholder 3"/>
-          <p:cNvSpPr>
-            <a:spLocks noGrp="1"/>
-          </p:cNvSpPr>
-          <p:nvPr>
-            <p:ph type="sldNum" sz="quarter" idx="12"/>
-          </p:nvPr>
-        </p:nvSpPr>
-        <p:spPr>
-          <a:xfrm>
-            <a:off x="11186160" y="6035040"/>
-            <a:ext cx="548640" cy="365760"/>
-          </a:xfrm>
-        </p:spPr>
-        <p:txBody>
-          <a:bodyPr/>
-          <a:lstStyle/>
-          <a:p>
-            <a:fld id="{C1FF6DA9-008F-8B48-92A6-B652298478BF}" type="slidenum">
-              <a:rPr lang="en-US" smtClean="0"/>
-              <a:t>‹#›</a:t>
-            </a:fld>
-            <a:endParaRPr lang="en-US"/>
-          </a:p>
-        </p:txBody>
-      </p:sp>
-      <p:sp>
-        <p:nvSpPr>
-          <p:cNvPr id="5" name="TextBox 4"/>
-          <p:cNvSpPr/>
-          <p:nvPr>
-            <p:ph type="title"/>
-          </p:nvPr>
-        </p:nvSpPr>
-        <p:spPr>
-          <a:xfrm>
-            <a:off x="457200" y="457200"/>
-            <a:ext cx="11277600" cy="768096"/>
-          </a:xfrm>
-          <a:prstGeom prst="rect">
-            <a:avLst/>
-          </a:prstGeom>
-          <a:noFill/>
-        </p:spPr>
-        <p:txBody>
-          <a:bodyPr wrap="none" lIns="0" rIns="0">
-            <a:noAutofit/>
-          </a:bodyPr>
-          <a:lstStyle/>
-          <a:p>
-            <a:pPr algn="l"/>
-            <a:r>
-              <a:rPr sz="4200" b="1" i="0">
-                <a:solidFill>
-                  <a:srgbClr val="0072CE"/>
-                </a:solidFill>
-                <a:latin typeface="Arial"/>
-              </a:rPr>
-              <a:t>SWOT Analysis</a:t>
-            </a:r>
-          </a:p>
-        </p:txBody>
-      </p:sp>
-      <p:sp>
-        <p:nvSpPr>
-          <p:cNvPr id="6" name="TextBox 5"/>
-          <p:cNvSpPr/>
-          <p:nvPr>
-            <p:ph type="body" idx="1"/>
-          </p:nvPr>
-        </p:nvSpPr>
-        <p:spPr>
-          <a:xfrm>
-            <a:off x="457200" y="1499616"/>
-            <a:ext cx="5501640" cy="621791"/>
-          </a:xfrm>
-          <a:prstGeom prst="rect">
-            <a:avLst/>
-          </a:prstGeom>
-          <a:noFill/>
-        </p:spPr>
-        <p:txBody>
-          <a:bodyPr wrap="none" lIns="0" rIns="0">
-            <a:noAutofit/>
-          </a:bodyPr>
-          <a:lstStyle/>
-          <a:p>
-            <a:pPr algn="l"/>
-            <a:r>
-              <a:rPr sz="3400" b="1" i="0">
-                <a:solidFill>
-                  <a:srgbClr val="0072CE"/>
-                </a:solidFill>
-                <a:latin typeface="Arial"/>
-              </a:rPr>
-              <a:t>Strengths</a:t>
-            </a:r>
-          </a:p>
-        </p:txBody>
-      </p:sp>
-      <p:sp>
-        <p:nvSpPr>
-          <p:cNvPr id="7" name="Rectangle 6"/>
-          <p:cNvSpPr/>
-          <p:nvPr>
-            <p:ph type="body" idx="2"/>
-          </p:nvPr>
-        </p:nvSpPr>
-        <p:spPr>
-          <a:xfrm>
-            <a:off x="457200" y="2176271"/>
-            <a:ext cx="1650492" cy="54864"/>
-          </a:xfrm>
-          <a:prstGeom prst="rect">
-            <a:avLst/>
-          </a:prstGeom>
-          <a:solidFill>
-            <a:srgbClr val="0072CE"/>
-          </a:solidFill>
-          <a:ln>
-            <a:noFill/>
-          </a:ln>
-          <a:effectLst/>
-        </p:spPr>
-        <p:txBody>
-          <a:bodyPr rtlCol="0" anchor="ctr"/>
-          <a:lstStyle/>
-          <a:p>
-            <a:pPr algn="ctr"/>
-          </a:p>
-        </p:txBody>
-      </p:sp>
-      <p:sp>
-        <p:nvSpPr>
-          <p:cNvPr id="8" name="TextBox 7"/>
-          <p:cNvSpPr/>
-          <p:nvPr>
-            <p:ph type="body" idx="3"/>
-          </p:nvPr>
-        </p:nvSpPr>
-        <p:spPr>
-          <a:xfrm>
-            <a:off x="457200" y="2395727"/>
-            <a:ext cx="5501640" cy="1097281"/>
-          </a:xfrm>
-          <a:prstGeom prst="rect">
-            <a:avLst/>
-          </a:prstGeom>
-          <a:noFill/>
-        </p:spPr>
-        <p:txBody>
-          <a:bodyPr wrap="square" lIns="0" rIns="0">
-            <a:noAutofit/>
-          </a:bodyPr>
-          <a:lstStyle/>
-          <a:p>
-            <a:pPr algn="l"/>
-            <a:r>
-              <a:rPr sz="3400" b="0" i="0">
-                <a:solidFill>
-                  <a:srgbClr val="0A2240"/>
-                </a:solidFill>
-                <a:latin typeface="Arial"/>
-              </a:rPr>
-              <a:t>A strong brand with loyal users</a:t>
-            </a:r>
-          </a:p>
-        </p:txBody>
-      </p:sp>
-      <p:sp>
-        <p:nvSpPr>
-          <p:cNvPr id="9" name="TextBox 8"/>
-          <p:cNvSpPr/>
-          <p:nvPr>
-            <p:ph type="body" idx="4"/>
-          </p:nvPr>
-        </p:nvSpPr>
-        <p:spPr>
-          <a:xfrm>
-            <a:off x="6233160" y="1499616"/>
-            <a:ext cx="5501640" cy="621791"/>
-          </a:xfrm>
-          <a:prstGeom prst="rect">
-            <a:avLst/>
-          </a:prstGeom>
-          <a:noFill/>
-        </p:spPr>
-        <p:txBody>
-          <a:bodyPr wrap="none" lIns="0" rIns="0">
-            <a:noAutofit/>
-          </a:bodyPr>
-          <a:lstStyle/>
-          <a:p>
-            <a:pPr algn="l"/>
-            <a:r>
-              <a:rPr sz="3400" b="1" i="0">
-                <a:solidFill>
-                  <a:srgbClr val="5B6B82"/>
-                </a:solidFill>
-                <a:latin typeface="Arial"/>
-              </a:rPr>
-              <a:t>Weaknesses</a:t>
-            </a:r>
-          </a:p>
-        </p:txBody>
-      </p:sp>
-      <p:sp>
-        <p:nvSpPr>
-          <p:cNvPr id="10" name="Rectangle 9"/>
-          <p:cNvSpPr/>
-          <p:nvPr>
-            <p:ph type="body" idx="5"/>
-          </p:nvPr>
-        </p:nvSpPr>
-        <p:spPr>
-          <a:xfrm>
-            <a:off x="6233160" y="2176271"/>
-            <a:ext cx="1650492" cy="54864"/>
-          </a:xfrm>
-          <a:prstGeom prst="rect">
-            <a:avLst/>
-          </a:prstGeom>
-          <a:solidFill>
-            <a:srgbClr val="5B6B82"/>
-          </a:solidFill>
-          <a:ln>
-            <a:noFill/>
-          </a:ln>
-          <a:effectLst/>
-        </p:spPr>
-        <p:txBody>
-          <a:bodyPr rtlCol="0" anchor="ctr"/>
-          <a:lstStyle/>
-          <a:p>
-            <a:pPr algn="ctr"/>
-          </a:p>
-        </p:txBody>
-      </p:sp>
-      <p:sp>
-        <p:nvSpPr>
-          <p:cNvPr id="11" name="TextBox 10"/>
-          <p:cNvSpPr/>
-          <p:nvPr>
-            <p:ph type="body" idx="6"/>
-          </p:nvPr>
-        </p:nvSpPr>
-        <p:spPr>
-          <a:xfrm>
-            <a:off x="6233160" y="2395727"/>
-            <a:ext cx="5501640" cy="1097281"/>
-          </a:xfrm>
-          <a:prstGeom prst="rect">
-            <a:avLst/>
-          </a:prstGeom>
-          <a:noFill/>
-        </p:spPr>
-        <p:txBody>
-          <a:bodyPr wrap="square" lIns="0" rIns="0">
-            <a:noAutofit/>
-          </a:bodyPr>
-          <a:lstStyle/>
-          <a:p>
-            <a:pPr algn="l"/>
-            <a:r>
-              <a:rPr sz="3400" b="0" i="0">
-                <a:solidFill>
-                  <a:srgbClr val="0A2240"/>
-                </a:solidFill>
-                <a:latin typeface="Arial"/>
-              </a:rPr>
-              <a:t>Thin margins and a small team</a:t>
-            </a:r>
-          </a:p>
-        </p:txBody>
-      </p:sp>
-      <p:sp>
-        <p:nvSpPr>
-          <p:cNvPr id="12" name="TextBox 11"/>
-          <p:cNvSpPr/>
-          <p:nvPr>
-            <p:ph type="body" idx="7"/>
-          </p:nvPr>
-        </p:nvSpPr>
-        <p:spPr>
-          <a:xfrm>
-            <a:off x="457200" y="3767328"/>
-            <a:ext cx="5501640" cy="621791"/>
-          </a:xfrm>
-          <a:prstGeom prst="rect">
-            <a:avLst/>
-          </a:prstGeom>
-          <a:noFill/>
-        </p:spPr>
-        <p:txBody>
-          <a:bodyPr wrap="none" lIns="0" rIns="0">
-            <a:noAutofit/>
-          </a:bodyPr>
-          <a:lstStyle/>
-          <a:p>
-            <a:pPr algn="l"/>
-            <a:r>
-              <a:rPr sz="3400" b="1" i="0">
-                <a:solidFill>
-                  <a:srgbClr val="0072CE"/>
-                </a:solidFill>
-                <a:latin typeface="Arial"/>
-              </a:rPr>
-              <a:t>Opportunities</a:t>
-            </a:r>
-          </a:p>
-        </p:txBody>
-      </p:sp>
-      <p:sp>
-        <p:nvSpPr>
-          <p:cNvPr id="13" name="Rectangle 12"/>
-          <p:cNvSpPr/>
-          <p:nvPr>
-            <p:ph type="body" idx="8"/>
-          </p:nvPr>
-        </p:nvSpPr>
-        <p:spPr>
-          <a:xfrm>
-            <a:off x="457200" y="4443983"/>
-            <a:ext cx="1650492" cy="54864"/>
-          </a:xfrm>
-          <a:prstGeom prst="rect">
-            <a:avLst/>
-          </a:prstGeom>
-          <a:solidFill>
-            <a:srgbClr val="0072CE"/>
-          </a:solidFill>
-          <a:ln>
-            <a:noFill/>
-          </a:ln>
-          <a:effectLst/>
-        </p:spPr>
-        <p:txBody>
-          <a:bodyPr rtlCol="0" anchor="ctr"/>
-          <a:lstStyle/>
-          <a:p>
-            <a:pPr algn="ctr"/>
-          </a:p>
-        </p:txBody>
-      </p:sp>
-      <p:sp>
-        <p:nvSpPr>
-          <p:cNvPr id="14" name="TextBox 13"/>
-          <p:cNvSpPr/>
-          <p:nvPr>
-            <p:ph type="body" idx="9"/>
-          </p:nvPr>
-        </p:nvSpPr>
-        <p:spPr>
-          <a:xfrm>
-            <a:off x="457200" y="4663439"/>
-            <a:ext cx="5501640" cy="1097281"/>
-          </a:xfrm>
-          <a:prstGeom prst="rect">
-            <a:avLst/>
-          </a:prstGeom>
-          <a:noFill/>
-        </p:spPr>
-        <p:txBody>
-          <a:bodyPr wrap="square" lIns="0" rIns="0">
-            <a:noAutofit/>
-          </a:bodyPr>
-          <a:lstStyle/>
-          <a:p>
-            <a:pPr algn="l"/>
-            <a:r>
-              <a:rPr sz="3400" b="0" i="0">
-                <a:solidFill>
-                  <a:srgbClr val="0A2240"/>
-                </a:solidFill>
-                <a:latin typeface="Arial"/>
-              </a:rPr>
-              <a:t>New markets through partnerships</a:t>
-            </a:r>
-          </a:p>
-        </p:txBody>
-      </p:sp>
-      <p:sp>
-        <p:nvSpPr>
-          <p:cNvPr id="15" name="TextBox 14"/>
-          <p:cNvSpPr/>
-          <p:nvPr>
-            <p:ph type="body" idx="13"/>
-          </p:nvPr>
-        </p:nvSpPr>
-        <p:spPr>
-          <a:xfrm>
-            <a:off x="6233160" y="3767328"/>
-            <a:ext cx="5501640" cy="621791"/>
-          </a:xfrm>
-          <a:prstGeom prst="rect">
-            <a:avLst/>
-          </a:prstGeom>
-          <a:noFill/>
-        </p:spPr>
-        <p:txBody>
-          <a:bodyPr wrap="none" lIns="0" rIns="0">
-            <a:noAutofit/>
-          </a:bodyPr>
-          <a:lstStyle/>
-          <a:p>
-            <a:pPr algn="l"/>
-            <a:r>
-              <a:rPr sz="3400" b="1" i="0">
-                <a:solidFill>
-                  <a:srgbClr val="5B6B82"/>
-                </a:solidFill>
-                <a:latin typeface="Arial"/>
-              </a:rPr>
-              <a:t>Threats</a:t>
-            </a:r>
-          </a:p>
-        </p:txBody>
-      </p:sp>
-      <p:sp>
-        <p:nvSpPr>
-          <p:cNvPr id="16" name="Rectangle 15"/>
-          <p:cNvSpPr/>
-          <p:nvPr>
-            <p:ph type="body" idx="14"/>
-          </p:nvPr>
-        </p:nvSpPr>
-        <p:spPr>
-          <a:xfrm>
-            <a:off x="6233160" y="4443983"/>
-            <a:ext cx="1650492" cy="54864"/>
-          </a:xfrm>
-          <a:prstGeom prst="rect">
-            <a:avLst/>
-          </a:prstGeom>
-          <a:solidFill>
-            <a:srgbClr val="5B6B82"/>
-          </a:solidFill>
-          <a:ln>
-            <a:noFill/>
-          </a:ln>
-          <a:effectLst/>
-        </p:spPr>
-        <p:txBody>
-          <a:bodyPr rtlCol="0" anchor="ctr"/>
-          <a:lstStyle/>
-          <a:p>
-            <a:pPr algn="ctr"/>
-          </a:p>
-        </p:txBody>
-      </p:sp>
-      <p:sp>
-        <p:nvSpPr>
-          <p:cNvPr id="17" name="TextBox 16"/>
-          <p:cNvSpPr/>
-          <p:nvPr>
-            <p:ph type="body" idx="15"/>
-          </p:nvPr>
-        </p:nvSpPr>
-        <p:spPr>
-          <a:xfrm>
-            <a:off x="6233160" y="4663439"/>
-            <a:ext cx="5501640" cy="1097281"/>
-          </a:xfrm>
-          <a:prstGeom prst="rect">
-            <a:avLst/>
-          </a:prstGeom>
-          <a:noFill/>
-        </p:spPr>
-        <p:txBody>
-          <a:bodyPr wrap="square" lIns="0" rIns="0">
-            <a:noAutofit/>
-          </a:bodyPr>
-          <a:lstStyle/>
-          <a:p>
-            <a:pPr algn="l"/>
-            <a:r>
-              <a:rPr sz="3400" b="0" i="0">
-                <a:solidFill>
-                  <a:srgbClr val="0A2240"/>
-                </a:solidFill>
-                <a:latin typeface="Arial"/>
-              </a:rPr>
-              <a:t>New entrants driving price pressure</a:t>
-            </a:r>
-          </a:p>
-        </p:txBody>
-      </p:sp>
-    </p:spTree>
-    <p:extLst>
-      <p:ext uri="{BB962C8B-B14F-4D97-AF65-F5344CB8AC3E}">
-        <p14:creationId xmlns:p14="http://schemas.microsoft.com/office/powerpoint/2010/main" val="1212999818"/>
-      </p:ext>
-    </p:extLst>
-  </p:cSld>
-  <p:clrMapOvr>
-    <a:masterClrMapping/>
-  </p:clrMapOvr>
-</p:sldLayout>
-</file>
-
-<file path=ppt/slideLayouts/slideLayout41.xml><?xml version="1.0" encoding="utf-8"?>
 <p:sldLayout xmlns:a="http://schemas.openxmlformats.org/drawingml/2006/main" xmlns:r="http://schemas.openxmlformats.org/officeDocument/2006/relationships" xmlns:p="http://schemas.openxmlformats.org/presentationml/2006/main" type="blank" preserve="1">
   <p:cSld name="slidekit · Comparison Matrix">
     <p:bg>
@@ -19355,7 +18697,6 @@
     <p:sldLayoutId id="2147483738" r:id="rId39"/>
     <p:sldLayoutId id="2147483739" r:id="rId40"/>
     <p:sldLayoutId id="2147483740" r:id="rId41"/>
-    <p:sldLayoutId id="2147483741" r:id="rId42"/>
   </p:sldLayoutIdLst>
   <p:txStyles>
     <p:titleStyle>
@@ -19927,7 +19268,7 @@
             <a:fld id="{4B0E1F8A-6C1D-4E2A-9F3B-7A5C8D2E1F60}" type="slidenum">
               <a:rPr sz="1600" b="0" i="0">
                 <a:solidFill>
-                  <a:srgbClr val="5B6B82"/>
+                  <a:srgbClr val="0A2240"/>
                 </a:solidFill>
                 <a:latin typeface="Arial"/>
               </a:rPr>
@@ -20165,7 +19506,7 @@
             <a:fld id="{4B0E1F8A-6C1D-4E2A-9F3B-7A5C8D2E1F60}" type="slidenum">
               <a:rPr sz="1600" b="0" i="0">
                 <a:solidFill>
-                  <a:srgbClr val="5B6B82"/>
+                  <a:srgbClr val="0A2240"/>
                 </a:solidFill>
                 <a:latin typeface="Arial"/>
               </a:rPr>
@@ -20244,7 +19585,7 @@
         <p:spPr>
           <a:xfrm>
             <a:off x="457200" y="1499616"/>
-            <a:ext cx="2613660" cy="518159"/>
+            <a:ext cx="1542035" cy="518159"/>
           </a:xfrm>
           <a:prstGeom prst="rect">
             <a:avLst/>
@@ -20261,11 +19602,11 @@
             <a:r>
               <a:rPr sz="3400" b="1" i="0">
                 <a:solidFill>
-                  <a:srgbClr val="0A2240"/>
-                </a:solidFill>
-                <a:latin typeface="Arial"/>
-              </a:rPr>
-              <a:t>Intake</a:t>
+                  <a:srgbClr val="0072CE"/>
+                </a:solidFill>
+                <a:latin typeface="Arial"/>
+              </a:rPr>
+              <a:t>Job</a:t>
             </a:r>
           </a:p>
         </p:txBody>
@@ -20278,65 +19619,74 @@
         </p:nvSpPr>
         <p:spPr>
           <a:xfrm>
-            <a:off x="457200" y="2154935"/>
-            <a:ext cx="2613660" cy="3605785"/>
-          </a:xfrm>
-          <a:prstGeom prst="rect">
-            <a:avLst/>
-          </a:prstGeom>
-          <a:noFill/>
-        </p:spPr>
-        <p:txBody>
-          <a:bodyPr wrap="square" lIns="0" rIns="0">
-            <a:noAutofit/>
-          </a:bodyPr>
-          <a:lstStyle/>
-          <a:p>
-            <a:pPr algn="l"/>
-            <a:r>
-              <a:rPr sz="3400" b="0" i="0">
-                <a:solidFill>
-                  <a:srgbClr val="0A2240"/>
-                </a:solidFill>
-                <a:latin typeface="Arial"/>
-              </a:rPr>
-              <a:t>Getting the input in</a:t>
-            </a:r>
-          </a:p>
-        </p:txBody>
-      </p:sp>
-      <p:sp>
-        <p:nvSpPr>
-          <p:cNvPr id="5" name="TextBox 4"/>
-          <p:cNvSpPr txBox="1"/>
+            <a:off x="2547875" y="1499616"/>
+            <a:ext cx="5669858" cy="518159"/>
+          </a:xfrm>
+          <a:prstGeom prst="rect">
+            <a:avLst/>
+          </a:prstGeom>
+          <a:noFill/>
+        </p:spPr>
+        <p:txBody>
+          <a:bodyPr wrap="none" lIns="0" rIns="0">
+            <a:noAutofit/>
+          </a:bodyPr>
+          <a:lstStyle/>
+          <a:p>
+            <a:pPr algn="l"/>
+            <a:r>
+              <a:rPr sz="3400" b="1" i="0">
+                <a:solidFill>
+                  <a:srgbClr val="0072CE"/>
+                </a:solidFill>
+                <a:latin typeface="Arial"/>
+              </a:rPr>
+              <a:t>What it covers</a:t>
+            </a:r>
+          </a:p>
+        </p:txBody>
+      </p:sp>
+      <p:sp>
+        <p:nvSpPr>
+          <p:cNvPr id="5" name="Rectangle 4"/>
+          <p:cNvSpPr/>
           <p:nvPr/>
         </p:nvSpPr>
         <p:spPr>
           <a:xfrm>
-            <a:off x="3345180" y="1499616"/>
-            <a:ext cx="2613660" cy="518159"/>
-          </a:xfrm>
-          <a:prstGeom prst="rect">
-            <a:avLst/>
-          </a:prstGeom>
-          <a:noFill/>
-        </p:spPr>
-        <p:txBody>
-          <a:bodyPr wrap="none" lIns="0" rIns="0">
-            <a:noAutofit/>
-          </a:bodyPr>
-          <a:lstStyle/>
-          <a:p>
-            <a:pPr algn="l"/>
-            <a:r>
-              <a:rPr sz="3400" b="1" i="0">
-                <a:solidFill>
-                  <a:srgbClr val="0A2240"/>
-                </a:solidFill>
-                <a:latin typeface="Arial"/>
-              </a:rPr>
-              <a:t>Think</a:t>
-            </a:r>
+            <a:off x="457200" y="2072639"/>
+            <a:ext cx="7760533" cy="54864"/>
+          </a:xfrm>
+          <a:prstGeom prst="rect">
+            <a:avLst/>
+          </a:prstGeom>
+          <a:solidFill>
+            <a:srgbClr val="0072CE"/>
+          </a:solidFill>
+          <a:ln>
+            <a:noFill/>
+          </a:ln>
+          <a:effectLst/>
+        </p:spPr>
+        <p:style>
+          <a:lnRef idx="1">
+            <a:schemeClr val="accent1"/>
+          </a:lnRef>
+          <a:fillRef idx="3">
+            <a:schemeClr val="accent1"/>
+          </a:fillRef>
+          <a:effectRef idx="2">
+            <a:schemeClr val="accent1"/>
+          </a:effectRef>
+          <a:fontRef idx="minor">
+            <a:schemeClr val="lt1"/>
+          </a:fontRef>
+        </p:style>
+        <p:txBody>
+          <a:bodyPr rtlCol="0" anchor="ctr"/>
+          <a:lstStyle/>
+          <a:p>
+            <a:pPr algn="ctr"/>
           </a:p>
         </p:txBody>
       </p:sp>
@@ -20348,16 +19698,16 @@
         </p:nvSpPr>
         <p:spPr>
           <a:xfrm>
-            <a:off x="3345180" y="2154935"/>
-            <a:ext cx="2613660" cy="3605785"/>
-          </a:xfrm>
-          <a:prstGeom prst="rect">
-            <a:avLst/>
-          </a:prstGeom>
-          <a:noFill/>
-        </p:spPr>
-        <p:txBody>
-          <a:bodyPr wrap="square" lIns="0" rIns="0">
+            <a:off x="457200" y="2401823"/>
+            <a:ext cx="2064920" cy="633984"/>
+          </a:xfrm>
+          <a:prstGeom prst="rect">
+            <a:avLst/>
+          </a:prstGeom>
+          <a:noFill/>
+        </p:spPr>
+        <p:txBody>
+          <a:bodyPr wrap="none" lIns="0" rIns="0">
             <a:noAutofit/>
           </a:bodyPr>
           <a:lstStyle/>
@@ -20370,7 +19720,7 @@
                 </a:solidFill>
                 <a:latin typeface="Arial"/>
               </a:rPr>
-              <a:t>The model doing the work</a:t>
+              <a:t>Intake</a:t>
             </a:r>
           </a:p>
         </p:txBody>
@@ -20383,29 +19733,29 @@
         </p:nvSpPr>
         <p:spPr>
           <a:xfrm>
-            <a:off x="6233160" y="1499616"/>
-            <a:ext cx="2613660" cy="518159"/>
-          </a:xfrm>
-          <a:prstGeom prst="rect">
-            <a:avLst/>
-          </a:prstGeom>
-          <a:noFill/>
-        </p:spPr>
-        <p:txBody>
-          <a:bodyPr wrap="none" lIns="0" rIns="0">
-            <a:noAutofit/>
-          </a:bodyPr>
-          <a:lstStyle/>
-          <a:p>
-            <a:pPr algn="l"/>
-            <a:r>
-              <a:rPr sz="3400" b="1" i="0">
+            <a:off x="2547875" y="2401823"/>
+            <a:ext cx="5982494" cy="633984"/>
+          </a:xfrm>
+          <a:prstGeom prst="rect">
+            <a:avLst/>
+          </a:prstGeom>
+          <a:noFill/>
+        </p:spPr>
+        <p:txBody>
+          <a:bodyPr wrap="none" lIns="0" rIns="0">
+            <a:noAutofit/>
+          </a:bodyPr>
+          <a:lstStyle/>
+          <a:p>
+            <a:pPr algn="l"/>
+            <a:r>
+              <a:rPr sz="3400" b="0" i="0">
                 <a:solidFill>
                   <a:srgbClr val="0A2240"/>
                 </a:solidFill>
                 <a:latin typeface="Arial"/>
               </a:rPr>
-              <a:t>Store</a:t>
+              <a:t>Getting the input in</a:t>
             </a:r>
           </a:p>
         </p:txBody>
@@ -20418,16 +19768,16 @@
         </p:nvSpPr>
         <p:spPr>
           <a:xfrm>
-            <a:off x="6233160" y="2154935"/>
-            <a:ext cx="2613660" cy="3605785"/>
-          </a:xfrm>
-          <a:prstGeom prst="rect">
-            <a:avLst/>
-          </a:prstGeom>
-          <a:noFill/>
-        </p:spPr>
-        <p:txBody>
-          <a:bodyPr wrap="square" lIns="0" rIns="0">
+            <a:off x="457200" y="3310127"/>
+            <a:ext cx="1872297" cy="633984"/>
+          </a:xfrm>
+          <a:prstGeom prst="rect">
+            <a:avLst/>
+          </a:prstGeom>
+          <a:noFill/>
+        </p:spPr>
+        <p:txBody>
+          <a:bodyPr wrap="none" lIns="0" rIns="0">
             <a:noAutofit/>
           </a:bodyPr>
           <a:lstStyle/>
@@ -20440,7 +19790,7 @@
                 </a:solidFill>
                 <a:latin typeface="Arial"/>
               </a:rPr>
-              <a:t>Anything you look up later</a:t>
+              <a:t>Think</a:t>
             </a:r>
           </a:p>
         </p:txBody>
@@ -20453,29 +19803,29 @@
         </p:nvSpPr>
         <p:spPr>
           <a:xfrm>
-            <a:off x="9121140" y="1499616"/>
-            <a:ext cx="2613660" cy="518159"/>
-          </a:xfrm>
-          <a:prstGeom prst="rect">
-            <a:avLst/>
-          </a:prstGeom>
-          <a:noFill/>
-        </p:spPr>
-        <p:txBody>
-          <a:bodyPr wrap="none" lIns="0" rIns="0">
-            <a:noAutofit/>
-          </a:bodyPr>
-          <a:lstStyle/>
-          <a:p>
-            <a:pPr algn="l"/>
-            <a:r>
-              <a:rPr sz="3400" b="1" i="0">
+            <a:off x="2547875" y="3310127"/>
+            <a:ext cx="8132385" cy="633984"/>
+          </a:xfrm>
+          <a:prstGeom prst="rect">
+            <a:avLst/>
+          </a:prstGeom>
+          <a:noFill/>
+        </p:spPr>
+        <p:txBody>
+          <a:bodyPr wrap="none" lIns="0" rIns="0">
+            <a:noAutofit/>
+          </a:bodyPr>
+          <a:lstStyle/>
+          <a:p>
+            <a:pPr algn="l"/>
+            <a:r>
+              <a:rPr sz="3400" b="0" i="0">
                 <a:solidFill>
                   <a:srgbClr val="0A2240"/>
                 </a:solidFill>
                 <a:latin typeface="Arial"/>
               </a:rPr>
-              <a:t>Show</a:t>
+              <a:t>The model doing the work</a:t>
             </a:r>
           </a:p>
         </p:txBody>
@@ -20488,16 +19838,16 @@
         </p:nvSpPr>
         <p:spPr>
           <a:xfrm>
-            <a:off x="9121140" y="2154935"/>
-            <a:ext cx="2613660" cy="3605785"/>
-          </a:xfrm>
-          <a:prstGeom prst="rect">
-            <a:avLst/>
-          </a:prstGeom>
-          <a:noFill/>
-        </p:spPr>
-        <p:txBody>
-          <a:bodyPr wrap="square" lIns="0" rIns="0">
+            <a:off x="457200" y="4218431"/>
+            <a:ext cx="1834177" cy="633984"/>
+          </a:xfrm>
+          <a:prstGeom prst="rect">
+            <a:avLst/>
+          </a:prstGeom>
+          <a:noFill/>
+        </p:spPr>
+        <p:txBody>
+          <a:bodyPr wrap="none" lIns="0" rIns="0">
             <a:noAutofit/>
           </a:bodyPr>
           <a:lstStyle/>
@@ -20510,6 +19860,111 @@
                 </a:solidFill>
                 <a:latin typeface="Arial"/>
               </a:rPr>
+              <a:t>Store</a:t>
+            </a:r>
+          </a:p>
+        </p:txBody>
+      </p:sp>
+      <p:sp>
+        <p:nvSpPr>
+          <p:cNvPr id="11" name="TextBox 10"/>
+          <p:cNvSpPr txBox="1"/>
+          <p:nvPr/>
+        </p:nvSpPr>
+        <p:spPr>
+          <a:xfrm>
+            <a:off x="2547875" y="4218431"/>
+            <a:ext cx="8133060" cy="633984"/>
+          </a:xfrm>
+          <a:prstGeom prst="rect">
+            <a:avLst/>
+          </a:prstGeom>
+          <a:noFill/>
+        </p:spPr>
+        <p:txBody>
+          <a:bodyPr wrap="none" lIns="0" rIns="0">
+            <a:noAutofit/>
+          </a:bodyPr>
+          <a:lstStyle/>
+          <a:p>
+            <a:pPr algn="l"/>
+            <a:r>
+              <a:rPr sz="3400" b="0" i="0">
+                <a:solidFill>
+                  <a:srgbClr val="0A2240"/>
+                </a:solidFill>
+                <a:latin typeface="Arial"/>
+              </a:rPr>
+              <a:t>Anything you look up later</a:t>
+            </a:r>
+          </a:p>
+        </p:txBody>
+      </p:sp>
+      <p:sp>
+        <p:nvSpPr>
+          <p:cNvPr id="12" name="TextBox 11"/>
+          <p:cNvSpPr txBox="1"/>
+          <p:nvPr/>
+        </p:nvSpPr>
+        <p:spPr>
+          <a:xfrm>
+            <a:off x="457200" y="5126735"/>
+            <a:ext cx="1911092" cy="633984"/>
+          </a:xfrm>
+          <a:prstGeom prst="rect">
+            <a:avLst/>
+          </a:prstGeom>
+          <a:noFill/>
+        </p:spPr>
+        <p:txBody>
+          <a:bodyPr wrap="none" lIns="0" rIns="0">
+            <a:noAutofit/>
+          </a:bodyPr>
+          <a:lstStyle/>
+          <a:p>
+            <a:pPr algn="l"/>
+            <a:r>
+              <a:rPr sz="3400" b="0" i="0">
+                <a:solidFill>
+                  <a:srgbClr val="0A2240"/>
+                </a:solidFill>
+                <a:latin typeface="Arial"/>
+              </a:rPr>
+              <a:t>Show</a:t>
+            </a:r>
+          </a:p>
+        </p:txBody>
+      </p:sp>
+      <p:sp>
+        <p:nvSpPr>
+          <p:cNvPr id="13" name="TextBox 12"/>
+          <p:cNvSpPr txBox="1"/>
+          <p:nvPr/>
+        </p:nvSpPr>
+        <p:spPr>
+          <a:xfrm>
+            <a:off x="2547875" y="5126735"/>
+            <a:ext cx="8669436" cy="633984"/>
+          </a:xfrm>
+          <a:prstGeom prst="rect">
+            <a:avLst/>
+          </a:prstGeom>
+          <a:noFill/>
+        </p:spPr>
+        <p:txBody>
+          <a:bodyPr wrap="none" lIns="0" rIns="0">
+            <a:noAutofit/>
+          </a:bodyPr>
+          <a:lstStyle/>
+          <a:p>
+            <a:pPr algn="l"/>
+            <a:r>
+              <a:rPr sz="3400" b="0" i="0">
+                <a:solidFill>
+                  <a:srgbClr val="0A2240"/>
+                </a:solidFill>
+                <a:latin typeface="Arial"/>
+              </a:rPr>
               <a:t>What the user actually sees</a:t>
             </a:r>
           </a:p>
@@ -20517,7 +19972,7 @@
       </p:sp>
       <p:sp>
         <p:nvSpPr>
-          <p:cNvPr id="11" name="TextBox 10"/>
+          <p:cNvPr id="14" name="TextBox 13"/>
           <p:cNvSpPr/>
           <p:nvPr>
             <p:ph type="sldNum" idx="12"/>
@@ -20543,7 +19998,7 @@
             <a:fld id="{4B0E1F8A-6C1D-4E2A-9F3B-7A5C8D2E1F60}" type="slidenum">
               <a:rPr sz="1600" b="0" i="0">
                 <a:solidFill>
-                  <a:srgbClr val="5B6B82"/>
+                  <a:srgbClr val="0A2240"/>
                 </a:solidFill>
                 <a:latin typeface="Arial"/>
               </a:rPr>
@@ -20639,7 +20094,7 @@
             <a:r>
               <a:rPr sz="3400" b="1" i="0">
                 <a:solidFill>
-                  <a:srgbClr val="123A6B"/>
+                  <a:srgbClr val="0072CE"/>
                 </a:solidFill>
                 <a:latin typeface="Arial"/>
               </a:rPr>
@@ -20674,7 +20129,7 @@
             <a:r>
               <a:rPr sz="3400" b="1" i="0">
                 <a:solidFill>
-                  <a:srgbClr val="123A6B"/>
+                  <a:srgbClr val="0072CE"/>
                 </a:solidFill>
                 <a:latin typeface="Arial"/>
               </a:rPr>
@@ -21105,7 +20560,7 @@
             <a:fld id="{4B0E1F8A-6C1D-4E2A-9F3B-7A5C8D2E1F60}" type="slidenum">
               <a:rPr sz="1600" b="0" i="0">
                 <a:solidFill>
-                  <a:srgbClr val="5B6B82"/>
+                  <a:srgbClr val="0A2240"/>
                 </a:solidFill>
                 <a:latin typeface="Arial"/>
               </a:rPr>
@@ -21343,7 +20798,7 @@
             <a:fld id="{4B0E1F8A-6C1D-4E2A-9F3B-7A5C8D2E1F60}" type="slidenum">
               <a:rPr sz="1600" b="0" i="0">
                 <a:solidFill>
-                  <a:srgbClr val="5B6B82"/>
+                  <a:srgbClr val="0A2240"/>
                 </a:solidFill>
                 <a:latin typeface="Arial"/>
               </a:rPr>
@@ -21456,8 +20911,8 @@
         </p:nvSpPr>
         <p:spPr>
           <a:xfrm>
-            <a:off x="548640" y="2176271"/>
-            <a:ext cx="1650492" cy="54864"/>
+            <a:off x="457200" y="2176271"/>
+            <a:ext cx="1463018" cy="54864"/>
           </a:xfrm>
           <a:prstGeom prst="rect">
             <a:avLst/>
@@ -21518,7 +20973,7 @@
             <a:r>
               <a:rPr sz="3400" b="1" i="0">
                 <a:solidFill>
-                  <a:srgbClr val="5B6B82"/>
+                  <a:srgbClr val="0A2240"/>
                 </a:solidFill>
                 <a:latin typeface="Arial"/>
               </a:rPr>
@@ -21535,14 +20990,14 @@
         </p:nvSpPr>
         <p:spPr>
           <a:xfrm>
-            <a:off x="6324600" y="2176271"/>
-            <a:ext cx="1650492" cy="54864"/>
+            <a:off x="6233160" y="2176271"/>
+            <a:ext cx="1343050" cy="54864"/>
           </a:xfrm>
           <a:prstGeom prst="rect">
             <a:avLst/>
           </a:prstGeom>
           <a:solidFill>
-            <a:srgbClr val="5B6B82"/>
+            <a:srgbClr val="0A2240"/>
           </a:solidFill>
           <a:ln>
             <a:noFill/>
@@ -21809,7 +21264,7 @@
             <a:fld id="{4B0E1F8A-6C1D-4E2A-9F3B-7A5C8D2E1F60}" type="slidenum">
               <a:rPr sz="1600" b="0" i="0">
                 <a:solidFill>
-                  <a:srgbClr val="5B6B82"/>
+                  <a:srgbClr val="0A2240"/>
                 </a:solidFill>
                 <a:latin typeface="Arial"/>
               </a:rPr>
@@ -21986,7 +21441,7 @@
             <a:fld id="{4B0E1F8A-6C1D-4E2A-9F3B-7A5C8D2E1F60}" type="slidenum">
               <a:rPr sz="1600" b="0" i="0">
                 <a:solidFill>
-                  <a:srgbClr val="5B6B82"/>
+                  <a:srgbClr val="0A2240"/>
                 </a:solidFill>
                 <a:latin typeface="Arial"/>
               </a:rPr>
@@ -22082,7 +21537,7 @@
             <a:r>
               <a:rPr sz="4200" b="1" i="0">
                 <a:solidFill>
-                  <a:srgbClr val="123A6B"/>
+                  <a:srgbClr val="0072CE"/>
                 </a:solidFill>
                 <a:latin typeface="Arial"/>
               </a:rPr>
@@ -22117,7 +21572,7 @@
             <a:r>
               <a:rPr sz="4200" b="1" i="0">
                 <a:solidFill>
-                  <a:srgbClr val="123A6B"/>
+                  <a:srgbClr val="0072CE"/>
                 </a:solidFill>
                 <a:latin typeface="Arial"/>
               </a:rPr>
@@ -22187,7 +21642,7 @@
             <a:r>
               <a:rPr sz="4200" b="1" i="0">
                 <a:solidFill>
-                  <a:srgbClr val="123A6B"/>
+                  <a:srgbClr val="0072CE"/>
                 </a:solidFill>
                 <a:latin typeface="Arial"/>
               </a:rPr>
@@ -22222,7 +21677,7 @@
             <a:r>
               <a:rPr sz="4200" b="1" i="0">
                 <a:solidFill>
-                  <a:srgbClr val="123A6B"/>
+                  <a:srgbClr val="0072CE"/>
                 </a:solidFill>
                 <a:latin typeface="Arial"/>
               </a:rPr>
@@ -22292,7 +21747,7 @@
             <a:r>
               <a:rPr sz="4200" b="1" i="0">
                 <a:solidFill>
-                  <a:srgbClr val="123A6B"/>
+                  <a:srgbClr val="0072CE"/>
                 </a:solidFill>
                 <a:latin typeface="Arial"/>
               </a:rPr>
@@ -22327,7 +21782,7 @@
             <a:r>
               <a:rPr sz="4200" b="1" i="0">
                 <a:solidFill>
-                  <a:srgbClr val="123A6B"/>
+                  <a:srgbClr val="0072CE"/>
                 </a:solidFill>
                 <a:latin typeface="Arial"/>
               </a:rPr>
@@ -22399,7 +21854,7 @@
             <a:fld id="{4B0E1F8A-6C1D-4E2A-9F3B-7A5C8D2E1F60}" type="slidenum">
               <a:rPr sz="1600" b="0" i="0">
                 <a:solidFill>
-                  <a:srgbClr val="5B6B82"/>
+                  <a:srgbClr val="0A2240"/>
                 </a:solidFill>
                 <a:latin typeface="Arial"/>
               </a:rPr>
@@ -22637,7 +22092,7 @@
             <a:fld id="{4B0E1F8A-6C1D-4E2A-9F3B-7A5C8D2E1F60}" type="slidenum">
               <a:rPr sz="1600" b="0" i="0">
                 <a:solidFill>
-                  <a:srgbClr val="5B6B82"/>
+                  <a:srgbClr val="0A2240"/>
                 </a:solidFill>
                 <a:latin typeface="Arial"/>
               </a:rPr>
@@ -22875,7 +22330,7 @@
             <a:fld id="{4B0E1F8A-6C1D-4E2A-9F3B-7A5C8D2E1F60}" type="slidenum">
               <a:rPr sz="1600" b="0" i="0">
                 <a:solidFill>
-                  <a:srgbClr val="5B6B82"/>
+                  <a:srgbClr val="0A2240"/>
                 </a:solidFill>
                 <a:latin typeface="Arial"/>
               </a:rPr>
@@ -23050,7 +22505,7 @@
             <a:r>
               <a:rPr sz="3400" b="0" i="0">
                 <a:solidFill>
-                  <a:srgbClr val="5B6B82"/>
+                  <a:srgbClr val="0A2240"/>
                 </a:solidFill>
                 <a:latin typeface="Arial"/>
               </a:rPr>
@@ -23087,7 +22542,7 @@
             <a:fld id="{4B0E1F8A-6C1D-4E2A-9F3B-7A5C8D2E1F60}" type="slidenum">
               <a:rPr sz="1600" b="0" i="0">
                 <a:solidFill>
-                  <a:srgbClr val="5B6B82"/>
+                  <a:srgbClr val="0A2240"/>
                 </a:solidFill>
                 <a:latin typeface="Arial"/>
               </a:rPr>
@@ -23395,7 +22850,7 @@
             <a:fld id="{4B0E1F8A-6C1D-4E2A-9F3B-7A5C8D2E1F60}" type="slidenum">
               <a:rPr sz="1600" b="0" i="0">
                 <a:solidFill>
-                  <a:srgbClr val="5B6B82"/>
+                  <a:srgbClr val="0A2240"/>
                 </a:solidFill>
                 <a:latin typeface="Arial"/>
               </a:rPr>
@@ -24010,7 +23465,7 @@
             <a:fld id="{4B0E1F8A-6C1D-4E2A-9F3B-7A5C8D2E1F60}" type="slidenum">
               <a:rPr sz="1600" b="0" i="0">
                 <a:solidFill>
-                  <a:srgbClr val="5B6B82"/>
+                  <a:srgbClr val="0A2240"/>
                 </a:solidFill>
                 <a:latin typeface="Arial"/>
               </a:rPr>
@@ -24176,7 +23631,7 @@
             <a:r>
               <a:rPr sz="2500" b="0" i="0">
                 <a:solidFill>
-                  <a:srgbClr val="5B6B82"/>
+                  <a:srgbClr val="0A2240"/>
                 </a:solidFill>
                 <a:latin typeface="Arial"/>
               </a:rPr>
@@ -24281,7 +23736,7 @@
             <a:r>
               <a:rPr sz="2500" b="0" i="0">
                 <a:solidFill>
-                  <a:srgbClr val="5B6B82"/>
+                  <a:srgbClr val="0A2240"/>
                 </a:solidFill>
                 <a:latin typeface="Arial"/>
               </a:rPr>
@@ -24318,7 +23773,7 @@
             <a:fld id="{4B0E1F8A-6C1D-4E2A-9F3B-7A5C8D2E1F60}" type="slidenum">
               <a:rPr sz="1600" b="0" i="0">
                 <a:solidFill>
-                  <a:srgbClr val="5B6B82"/>
+                  <a:srgbClr val="0A2240"/>
                 </a:solidFill>
                 <a:latin typeface="Arial"/>
               </a:rPr>
@@ -24495,7 +23950,7 @@
             <a:fld id="{4B0E1F8A-6C1D-4E2A-9F3B-7A5C8D2E1F60}" type="slidenum">
               <a:rPr sz="1600" b="0" i="0">
                 <a:solidFill>
-                  <a:srgbClr val="5B6B82"/>
+                  <a:srgbClr val="0A2240"/>
                 </a:solidFill>
                 <a:latin typeface="Arial"/>
               </a:rPr>
@@ -24672,7 +24127,7 @@
             <a:fld id="{4B0E1F8A-6C1D-4E2A-9F3B-7A5C8D2E1F60}" type="slidenum">
               <a:rPr sz="1600" b="0" i="0">
                 <a:solidFill>
-                  <a:srgbClr val="5B6B82"/>
+                  <a:srgbClr val="0A2240"/>
                 </a:solidFill>
                 <a:latin typeface="Arial"/>
               </a:rPr>
@@ -24814,7 +24269,7 @@
             <a:fld id="{4B0E1F8A-6C1D-4E2A-9F3B-7A5C8D2E1F60}" type="slidenum">
               <a:rPr sz="1600" b="0" i="0">
                 <a:solidFill>
-                  <a:srgbClr val="5B6B82"/>
+                  <a:srgbClr val="0A2240"/>
                 </a:solidFill>
                 <a:latin typeface="Arial"/>
               </a:rPr>
@@ -25050,7 +24505,7 @@
             <a:r>
               <a:rPr sz="4200" b="1" i="0">
                 <a:solidFill>
-                  <a:srgbClr val="5B6B82"/>
+                  <a:srgbClr val="0A2240"/>
                 </a:solidFill>
                 <a:latin typeface="Arial"/>
               </a:rPr>
@@ -25087,7 +24542,7 @@
             <a:fld id="{4B0E1F8A-6C1D-4E2A-9F3B-7A5C8D2E1F60}" type="slidenum">
               <a:rPr sz="1600" b="0" i="0">
                 <a:solidFill>
-                  <a:srgbClr val="5B6B82"/>
+                  <a:srgbClr val="0A2240"/>
                 </a:solidFill>
                 <a:latin typeface="Arial"/>
               </a:rPr>
@@ -25325,7 +24780,7 @@
             <a:fld id="{4B0E1F8A-6C1D-4E2A-9F3B-7A5C8D2E1F60}" type="slidenum">
               <a:rPr sz="1600" b="0" i="0">
                 <a:solidFill>
-                  <a:srgbClr val="5B6B82"/>
+                  <a:srgbClr val="0A2240"/>
                 </a:solidFill>
                 <a:latin typeface="Arial"/>
               </a:rPr>
@@ -25421,7 +24876,7 @@
             <a:r>
               <a:rPr sz="4200" b="1" i="0">
                 <a:solidFill>
-                  <a:srgbClr val="123A6B"/>
+                  <a:srgbClr val="0072CE"/>
                 </a:solidFill>
                 <a:latin typeface="Arial"/>
               </a:rPr>
@@ -25456,7 +24911,7 @@
             <a:r>
               <a:rPr sz="4200" b="1" i="0">
                 <a:solidFill>
-                  <a:srgbClr val="123A6B"/>
+                  <a:srgbClr val="0072CE"/>
                 </a:solidFill>
                 <a:latin typeface="Arial"/>
               </a:rPr>
@@ -25526,7 +24981,7 @@
             <a:r>
               <a:rPr sz="4200" b="1" i="0">
                 <a:solidFill>
-                  <a:srgbClr val="123A6B"/>
+                  <a:srgbClr val="0072CE"/>
                 </a:solidFill>
                 <a:latin typeface="Arial"/>
               </a:rPr>
@@ -25561,7 +25016,7 @@
             <a:r>
               <a:rPr sz="4200" b="1" i="0">
                 <a:solidFill>
-                  <a:srgbClr val="123A6B"/>
+                  <a:srgbClr val="0072CE"/>
                 </a:solidFill>
                 <a:latin typeface="Arial"/>
               </a:rPr>
@@ -25631,7 +25086,7 @@
             <a:r>
               <a:rPr sz="4200" b="1" i="0">
                 <a:solidFill>
-                  <a:srgbClr val="123A6B"/>
+                  <a:srgbClr val="0072CE"/>
                 </a:solidFill>
                 <a:latin typeface="Arial"/>
               </a:rPr>
@@ -25666,7 +25121,7 @@
             <a:r>
               <a:rPr sz="4200" b="1" i="0">
                 <a:solidFill>
-                  <a:srgbClr val="123A6B"/>
+                  <a:srgbClr val="0072CE"/>
                 </a:solidFill>
                 <a:latin typeface="Arial"/>
               </a:rPr>
@@ -25738,7 +25193,7 @@
             <a:fld id="{4B0E1F8A-6C1D-4E2A-9F3B-7A5C8D2E1F60}" type="slidenum">
               <a:rPr sz="1600" b="0" i="0">
                 <a:solidFill>
-                  <a:srgbClr val="5B6B82"/>
+                  <a:srgbClr val="0A2240"/>
                 </a:solidFill>
                 <a:latin typeface="Arial"/>
               </a:rPr>
@@ -25834,7 +25289,7 @@
             <a:r>
               <a:rPr sz="3400" b="1" i="0">
                 <a:solidFill>
-                  <a:srgbClr val="5B6B82"/>
+                  <a:srgbClr val="0A2240"/>
                 </a:solidFill>
                 <a:latin typeface="Arial"/>
               </a:rPr>
@@ -25851,14 +25306,14 @@
         </p:nvSpPr>
         <p:spPr>
           <a:xfrm>
-            <a:off x="548640" y="2176271"/>
-            <a:ext cx="1650492" cy="54864"/>
+            <a:off x="457200" y="2176271"/>
+            <a:ext cx="2543361" cy="54864"/>
           </a:xfrm>
           <a:prstGeom prst="rect">
             <a:avLst/>
           </a:prstGeom>
           <a:solidFill>
-            <a:srgbClr val="5B6B82"/>
+            <a:srgbClr val="0A2240"/>
           </a:solidFill>
           <a:ln>
             <a:noFill/>
@@ -25930,8 +25385,8 @@
         </p:nvSpPr>
         <p:spPr>
           <a:xfrm>
-            <a:off x="6324600" y="2176271"/>
-            <a:ext cx="1650492" cy="54864"/>
+            <a:off x="6233160" y="2176271"/>
+            <a:ext cx="2712455" cy="54864"/>
           </a:xfrm>
           <a:prstGeom prst="rect">
             <a:avLst/>
@@ -26204,7 +25659,7 @@
             <a:fld id="{4B0E1F8A-6C1D-4E2A-9F3B-7A5C8D2E1F60}" type="slidenum">
               <a:rPr sz="1600" b="0" i="0">
                 <a:solidFill>
-                  <a:srgbClr val="5B6B82"/>
+                  <a:srgbClr val="0A2240"/>
                 </a:solidFill>
                 <a:latin typeface="Arial"/>
               </a:rPr>
@@ -26626,7 +26081,7 @@
             <a:fld id="{4B0E1F8A-6C1D-4E2A-9F3B-7A5C8D2E1F60}" type="slidenum">
               <a:rPr sz="1600" b="0" i="0">
                 <a:solidFill>
-                  <a:srgbClr val="5B6B82"/>
+                  <a:srgbClr val="0A2240"/>
                 </a:solidFill>
                 <a:latin typeface="Arial"/>
               </a:rPr>
@@ -26722,7 +26177,7 @@
             <a:r>
               <a:rPr sz="3400" b="1" i="0">
                 <a:solidFill>
-                  <a:srgbClr val="123A6B"/>
+                  <a:srgbClr val="0072CE"/>
                 </a:solidFill>
                 <a:latin typeface="Arial"/>
               </a:rPr>
@@ -26757,7 +26212,7 @@
             <a:r>
               <a:rPr sz="3400" b="1" i="0">
                 <a:solidFill>
-                  <a:srgbClr val="123A6B"/>
+                  <a:srgbClr val="0072CE"/>
                 </a:solidFill>
                 <a:latin typeface="Arial"/>
               </a:rPr>
@@ -26792,7 +26247,7 @@
             <a:r>
               <a:rPr sz="3400" b="1" i="0">
                 <a:solidFill>
-                  <a:srgbClr val="123A6B"/>
+                  <a:srgbClr val="0072CE"/>
                 </a:solidFill>
                 <a:latin typeface="Arial"/>
               </a:rPr>
@@ -27293,7 +26748,7 @@
             <a:fld id="{4B0E1F8A-6C1D-4E2A-9F3B-7A5C8D2E1F60}" type="slidenum">
               <a:rPr sz="1600" b="0" i="0">
                 <a:solidFill>
-                  <a:srgbClr val="5B6B82"/>
+                  <a:srgbClr val="0A2240"/>
                 </a:solidFill>
                 <a:latin typeface="Arial"/>
               </a:rPr>
@@ -27531,7 +26986,7 @@
             <a:fld id="{4B0E1F8A-6C1D-4E2A-9F3B-7A5C8D2E1F60}" type="slidenum">
               <a:rPr sz="1600" b="0" i="0">
                 <a:solidFill>
-                  <a:srgbClr val="5B6B82"/>
+                  <a:srgbClr val="0A2240"/>
                 </a:solidFill>
                 <a:latin typeface="Arial"/>
               </a:rPr>
@@ -27581,7 +27036,7 @@
             <a:avLst/>
           </a:prstGeom>
           <a:solidFill>
-            <a:srgbClr val="FF5F56"/>
+            <a:srgbClr val="FFFFFF"/>
           </a:solidFill>
           <a:ln>
             <a:noFill/>
@@ -27625,7 +27080,7 @@
             <a:avLst/>
           </a:prstGeom>
           <a:solidFill>
-            <a:srgbClr val="FFBD2E"/>
+            <a:srgbClr val="FFFFFF"/>
           </a:solidFill>
           <a:ln>
             <a:noFill/>
@@ -27669,7 +27124,7 @@
             <a:avLst/>
           </a:prstGeom>
           <a:solidFill>
-            <a:srgbClr val="27C93F"/>
+            <a:srgbClr val="FFFFFF"/>
           </a:solidFill>
           <a:ln>
             <a:noFill/>
@@ -27724,7 +27179,7 @@
             <a:r>
               <a:rPr sz="4200" b="0" i="0">
                 <a:solidFill>
-                  <a:srgbClr val="D4D4D4"/>
+                  <a:srgbClr val="FFFFFF"/>
                 </a:solidFill>
                 <a:latin typeface="Arial"/>
               </a:rPr>
@@ -27759,7 +27214,7 @@
             <a:r>
               <a:rPr sz="3400" b="0" i="0">
                 <a:solidFill>
-                  <a:srgbClr val="4EC9B0"/>
+                  <a:srgbClr val="569CD6"/>
                 </a:solidFill>
                 <a:latin typeface="Arial"/>
               </a:rPr>
@@ -27794,7 +27249,7 @@
             <a:r>
               <a:rPr sz="3400" b="0" i="0">
                 <a:solidFill>
-                  <a:srgbClr val="D4D4D4"/>
+                  <a:srgbClr val="FFFFFF"/>
                 </a:solidFill>
                 <a:latin typeface="Arial"/>
               </a:rPr>
@@ -27812,7 +27267,7 @@
         <p:spPr>
           <a:xfrm>
             <a:off x="457200" y="2356103"/>
-            <a:ext cx="422816" cy="518159"/>
+            <a:ext cx="4177704" cy="518159"/>
           </a:xfrm>
           <a:prstGeom prst="rect">
             <a:avLst/>
@@ -27829,11 +27284,11 @@
             <a:r>
               <a:rPr sz="3400" b="0" i="0">
                 <a:solidFill>
-                  <a:srgbClr val="D4D4D4"/>
-                </a:solidFill>
-                <a:latin typeface="Arial"/>
-              </a:rPr>
-              <a:t>  </a:t>
+                  <a:srgbClr val="FFFFFF"/>
+                </a:solidFill>
+                <a:latin typeface="Arial"/>
+              </a:rPr>
+              <a:t>  41,204 total</a:t>
             </a:r>
           </a:p>
         </p:txBody>
@@ -27846,8 +27301,8 @@
         </p:nvSpPr>
         <p:spPr>
           <a:xfrm>
-            <a:off x="697136" y="2356103"/>
-            <a:ext cx="951348" cy="518159"/>
+            <a:off x="457200" y="3392421"/>
+            <a:ext cx="6538436" cy="518159"/>
           </a:xfrm>
           <a:prstGeom prst="rect">
             <a:avLst/>
@@ -27864,11 +27319,11 @@
             <a:r>
               <a:rPr sz="3400" b="0" i="0">
                 <a:solidFill>
-                  <a:srgbClr val="B5CEA8"/>
-                </a:solidFill>
-                <a:latin typeface="Arial"/>
-              </a:rPr>
-              <a:t>41</a:t>
+                  <a:srgbClr val="FFFFFF"/>
+                </a:solidFill>
+                <a:latin typeface="Arial"/>
+              </a:rPr>
+              <a:t># ~55k tokens. It fits.</a:t>
             </a:r>
           </a:p>
         </p:txBody>
@@ -27881,146 +27336,6 @@
         </p:nvSpPr>
         <p:spPr>
           <a:xfrm>
-            <a:off x="1177429" y="2356103"/>
-            <a:ext cx="374828" cy="518159"/>
-          </a:xfrm>
-          <a:prstGeom prst="rect">
-            <a:avLst/>
-          </a:prstGeom>
-          <a:noFill/>
-        </p:spPr>
-        <p:txBody>
-          <a:bodyPr wrap="none" lIns="0" rIns="0">
-            <a:noAutofit/>
-          </a:bodyPr>
-          <a:lstStyle/>
-          <a:p>
-            <a:pPr algn="l"/>
-            <a:r>
-              <a:rPr sz="3400" b="0" i="0">
-                <a:solidFill>
-                  <a:srgbClr val="D4D4D4"/>
-                </a:solidFill>
-                <a:latin typeface="Arial"/>
-              </a:rPr>
-              <a:t>,</a:t>
-            </a:r>
-          </a:p>
-        </p:txBody>
-      </p:sp>
-      <p:sp>
-        <p:nvSpPr>
-          <p:cNvPr id="11" name="TextBox 10"/>
-          <p:cNvSpPr txBox="1"/>
-          <p:nvPr/>
-        </p:nvSpPr>
-        <p:spPr>
-          <a:xfrm>
-            <a:off x="1297397" y="2356103"/>
-            <a:ext cx="1335584" cy="518159"/>
-          </a:xfrm>
-          <a:prstGeom prst="rect">
-            <a:avLst/>
-          </a:prstGeom>
-          <a:noFill/>
-        </p:spPr>
-        <p:txBody>
-          <a:bodyPr wrap="none" lIns="0" rIns="0">
-            <a:noAutofit/>
-          </a:bodyPr>
-          <a:lstStyle/>
-          <a:p>
-            <a:pPr algn="l"/>
-            <a:r>
-              <a:rPr sz="3400" b="0" i="0">
-                <a:solidFill>
-                  <a:srgbClr val="B5CEA8"/>
-                </a:solidFill>
-                <a:latin typeface="Arial"/>
-              </a:rPr>
-              <a:t>204</a:t>
-            </a:r>
-          </a:p>
-        </p:txBody>
-      </p:sp>
-      <p:sp>
-        <p:nvSpPr>
-          <p:cNvPr id="12" name="TextBox 11"/>
-          <p:cNvSpPr txBox="1"/>
-          <p:nvPr/>
-        </p:nvSpPr>
-        <p:spPr>
-          <a:xfrm>
-            <a:off x="2017837" y="2356103"/>
-            <a:ext cx="1680686" cy="518159"/>
-          </a:xfrm>
-          <a:prstGeom prst="rect">
-            <a:avLst/>
-          </a:prstGeom>
-          <a:noFill/>
-        </p:spPr>
-        <p:txBody>
-          <a:bodyPr wrap="none" lIns="0" rIns="0">
-            <a:noAutofit/>
-          </a:bodyPr>
-          <a:lstStyle/>
-          <a:p>
-            <a:pPr algn="l"/>
-            <a:r>
-              <a:rPr sz="3400" b="0" i="0">
-                <a:solidFill>
-                  <a:srgbClr val="D4D4D4"/>
-                </a:solidFill>
-                <a:latin typeface="Arial"/>
-              </a:rPr>
-              <a:t> total</a:t>
-            </a:r>
-          </a:p>
-        </p:txBody>
-      </p:sp>
-      <p:sp>
-        <p:nvSpPr>
-          <p:cNvPr id="13" name="TextBox 12"/>
-          <p:cNvSpPr txBox="1"/>
-          <p:nvPr/>
-        </p:nvSpPr>
-        <p:spPr>
-          <a:xfrm>
-            <a:off x="457200" y="3392421"/>
-            <a:ext cx="6538436" cy="518159"/>
-          </a:xfrm>
-          <a:prstGeom prst="rect">
-            <a:avLst/>
-          </a:prstGeom>
-          <a:noFill/>
-        </p:spPr>
-        <p:txBody>
-          <a:bodyPr wrap="none" lIns="0" rIns="0">
-            <a:noAutofit/>
-          </a:bodyPr>
-          <a:lstStyle/>
-          <a:p>
-            <a:pPr algn="l"/>
-            <a:r>
-              <a:rPr sz="3400" b="0" i="0">
-                <a:solidFill>
-                  <a:srgbClr val="6A9955"/>
-                </a:solidFill>
-                <a:latin typeface="Arial"/>
-              </a:rPr>
-              <a:t># ~55k tokens. It fits.</a:t>
-            </a:r>
-          </a:p>
-        </p:txBody>
-      </p:sp>
-      <p:sp>
-        <p:nvSpPr>
-          <p:cNvPr id="14" name="TextBox 13"/>
-          <p:cNvSpPr txBox="1"/>
-          <p:nvPr/>
-        </p:nvSpPr>
-        <p:spPr>
-          <a:xfrm>
             <a:off x="457200" y="3910580"/>
             <a:ext cx="8811459" cy="518159"/>
           </a:xfrm>
@@ -28039,7 +27354,7 @@
             <a:r>
               <a:rPr sz="3400" b="0" i="0">
                 <a:solidFill>
-                  <a:srgbClr val="6A9955"/>
+                  <a:srgbClr val="FFFFFF"/>
                 </a:solidFill>
                 <a:latin typeface="Arial"/>
               </a:rPr>
@@ -28050,7 +27365,7 @@
       </p:sp>
       <p:sp>
         <p:nvSpPr>
-          <p:cNvPr id="15" name="TextBox 14"/>
+          <p:cNvPr id="11" name="TextBox 10"/>
           <p:cNvSpPr/>
           <p:nvPr>
             <p:ph type="sldNum" idx="12"/>
@@ -28076,7 +27391,7 @@
             <a:fld id="{4B0E1F8A-6C1D-4E2A-9F3B-7A5C8D2E1F60}" type="slidenum">
               <a:rPr sz="1600" b="0" i="0">
                 <a:solidFill>
-                  <a:srgbClr val="5B6B82"/>
+                  <a:srgbClr val="0A2240"/>
                 </a:solidFill>
                 <a:latin typeface="Arial"/>
               </a:rPr>
@@ -28314,7 +27629,7 @@
             <a:fld id="{4B0E1F8A-6C1D-4E2A-9F3B-7A5C8D2E1F60}" type="slidenum">
               <a:rPr sz="1600" b="0" i="0">
                 <a:solidFill>
-                  <a:srgbClr val="5B6B82"/>
+                  <a:srgbClr val="0A2240"/>
                 </a:solidFill>
                 <a:latin typeface="Arial"/>
               </a:rPr>
@@ -28454,7 +27769,7 @@
             <a:r>
               <a:rPr sz="3400" b="0" i="0">
                 <a:solidFill>
-                  <a:srgbClr val="5B6B82"/>
+                  <a:srgbClr val="0A2240"/>
                 </a:solidFill>
                 <a:latin typeface="Arial"/>
               </a:rPr>
@@ -28491,7 +27806,7 @@
             <a:fld id="{4B0E1F8A-6C1D-4E2A-9F3B-7A5C8D2E1F60}" type="slidenum">
               <a:rPr sz="1600" b="0" i="0">
                 <a:solidFill>
-                  <a:srgbClr val="5B6B82"/>
+                  <a:srgbClr val="0A2240"/>
                 </a:solidFill>
                 <a:latin typeface="Arial"/>
               </a:rPr>
@@ -28668,7 +27983,7 @@
             <a:fld id="{4B0E1F8A-6C1D-4E2A-9F3B-7A5C8D2E1F60}" type="slidenum">
               <a:rPr sz="1600" b="0" i="0">
                 <a:solidFill>
-                  <a:srgbClr val="5B6B82"/>
+                  <a:srgbClr val="0A2240"/>
                 </a:solidFill>
                 <a:latin typeface="Arial"/>
               </a:rPr>
@@ -28845,7 +28160,7 @@
             <a:fld id="{4B0E1F8A-6C1D-4E2A-9F3B-7A5C8D2E1F60}" type="slidenum">
               <a:rPr sz="1600" b="0" i="0">
                 <a:solidFill>
-                  <a:srgbClr val="5B6B82"/>
+                  <a:srgbClr val="0A2240"/>
                 </a:solidFill>
                 <a:latin typeface="Arial"/>
               </a:rPr>
@@ -29083,7 +28398,7 @@
             <a:fld id="{4B0E1F8A-6C1D-4E2A-9F3B-7A5C8D2E1F60}" type="slidenum">
               <a:rPr sz="1600" b="0" i="0">
                 <a:solidFill>
-                  <a:srgbClr val="5B6B82"/>
+                  <a:srgbClr val="0A2240"/>
                 </a:solidFill>
                 <a:latin typeface="Arial"/>
               </a:rPr>
@@ -29179,7 +28494,7 @@
             <a:r>
               <a:rPr sz="4200" b="1" i="0">
                 <a:solidFill>
-                  <a:srgbClr val="123A6B"/>
+                  <a:srgbClr val="0072CE"/>
                 </a:solidFill>
                 <a:latin typeface="Arial"/>
               </a:rPr>
@@ -29214,7 +28529,7 @@
             <a:r>
               <a:rPr sz="4200" b="1" i="0">
                 <a:solidFill>
-                  <a:srgbClr val="123A6B"/>
+                  <a:srgbClr val="0072CE"/>
                 </a:solidFill>
                 <a:latin typeface="Arial"/>
               </a:rPr>
@@ -29284,7 +28599,7 @@
             <a:r>
               <a:rPr sz="4200" b="1" i="0">
                 <a:solidFill>
-                  <a:srgbClr val="123A6B"/>
+                  <a:srgbClr val="0072CE"/>
                 </a:solidFill>
                 <a:latin typeface="Arial"/>
               </a:rPr>
@@ -29319,7 +28634,7 @@
             <a:r>
               <a:rPr sz="4200" b="1" i="0">
                 <a:solidFill>
-                  <a:srgbClr val="123A6B"/>
+                  <a:srgbClr val="0072CE"/>
                 </a:solidFill>
                 <a:latin typeface="Arial"/>
               </a:rPr>
@@ -29389,7 +28704,7 @@
             <a:r>
               <a:rPr sz="4200" b="1" i="0">
                 <a:solidFill>
-                  <a:srgbClr val="123A6B"/>
+                  <a:srgbClr val="0072CE"/>
                 </a:solidFill>
                 <a:latin typeface="Arial"/>
               </a:rPr>
@@ -29424,7 +28739,7 @@
             <a:r>
               <a:rPr sz="4200" b="1" i="0">
                 <a:solidFill>
-                  <a:srgbClr val="123A6B"/>
+                  <a:srgbClr val="0072CE"/>
                 </a:solidFill>
                 <a:latin typeface="Arial"/>
               </a:rPr>
@@ -29496,7 +28811,7 @@
             <a:fld id="{4B0E1F8A-6C1D-4E2A-9F3B-7A5C8D2E1F60}" type="slidenum">
               <a:rPr sz="1600" b="0" i="0">
                 <a:solidFill>
-                  <a:srgbClr val="5B6B82"/>
+                  <a:srgbClr val="0A2240"/>
                 </a:solidFill>
                 <a:latin typeface="Arial"/>
               </a:rPr>
@@ -29546,7 +28861,7 @@
             <a:avLst/>
           </a:prstGeom>
           <a:solidFill>
-            <a:srgbClr val="FF5F56"/>
+            <a:srgbClr val="FFFFFF"/>
           </a:solidFill>
           <a:ln>
             <a:noFill/>
@@ -29590,7 +28905,7 @@
             <a:avLst/>
           </a:prstGeom>
           <a:solidFill>
-            <a:srgbClr val="FFBD2E"/>
+            <a:srgbClr val="FFFFFF"/>
           </a:solidFill>
           <a:ln>
             <a:noFill/>
@@ -29634,7 +28949,7 @@
             <a:avLst/>
           </a:prstGeom>
           <a:solidFill>
-            <a:srgbClr val="27C93F"/>
+            <a:srgbClr val="FFFFFF"/>
           </a:solidFill>
           <a:ln>
             <a:noFill/>
@@ -29689,7 +29004,7 @@
             <a:r>
               <a:rPr sz="4200" b="0" i="0">
                 <a:solidFill>
-                  <a:srgbClr val="D4D4D4"/>
+                  <a:srgbClr val="FFFFFF"/>
                 </a:solidFill>
                 <a:latin typeface="Arial"/>
               </a:rPr>
@@ -29724,7 +29039,7 @@
             <a:r>
               <a:rPr sz="3400" b="0" i="0">
                 <a:solidFill>
-                  <a:srgbClr val="D4D4D4"/>
+                  <a:srgbClr val="FFFFFF"/>
                 </a:solidFill>
                 <a:latin typeface="Arial"/>
               </a:rPr>
@@ -29794,7 +29109,7 @@
             <a:r>
               <a:rPr sz="3400" b="0" i="0">
                 <a:solidFill>
-                  <a:srgbClr val="D4D4D4"/>
+                  <a:srgbClr val="FFFFFF"/>
                 </a:solidFill>
                 <a:latin typeface="Arial"/>
               </a:rPr>
@@ -29829,7 +29144,7 @@
             <a:r>
               <a:rPr sz="3400" b="0" i="0">
                 <a:solidFill>
-                  <a:srgbClr val="D4D4D4"/>
+                  <a:srgbClr val="FFFFFF"/>
                 </a:solidFill>
                 <a:latin typeface="Arial"/>
               </a:rPr>
@@ -29864,7 +29179,7 @@
             <a:r>
               <a:rPr sz="3400" b="0" i="0">
                 <a:solidFill>
-                  <a:srgbClr val="D4D4D4"/>
+                  <a:srgbClr val="FFFFFF"/>
                 </a:solidFill>
                 <a:latin typeface="Arial"/>
               </a:rPr>
@@ -29934,7 +29249,7 @@
             <a:r>
               <a:rPr sz="3400" b="0" i="0">
                 <a:solidFill>
-                  <a:srgbClr val="D4D4D4"/>
+                  <a:srgbClr val="FFFFFF"/>
                 </a:solidFill>
                 <a:latin typeface="Arial"/>
               </a:rPr>
@@ -29969,7 +29284,7 @@
             <a:r>
               <a:rPr sz="3400" b="0" i="0">
                 <a:solidFill>
-                  <a:srgbClr val="D4D4D4"/>
+                  <a:srgbClr val="FFFFFF"/>
                 </a:solidFill>
                 <a:latin typeface="Arial"/>
               </a:rPr>
@@ -30039,7 +29354,7 @@
             <a:r>
               <a:rPr sz="3400" b="0" i="0">
                 <a:solidFill>
-                  <a:srgbClr val="D4D4D4"/>
+                  <a:srgbClr val="FFFFFF"/>
                 </a:solidFill>
                 <a:latin typeface="Arial"/>
               </a:rPr>
@@ -30076,7 +29391,7 @@
             <a:fld id="{4B0E1F8A-6C1D-4E2A-9F3B-7A5C8D2E1F60}" type="slidenum">
               <a:rPr sz="1600" b="0" i="0">
                 <a:solidFill>
-                  <a:srgbClr val="5B6B82"/>
+                  <a:srgbClr val="0A2240"/>
                 </a:solidFill>
                 <a:latin typeface="Arial"/>
               </a:rPr>
@@ -30218,7 +29533,7 @@
             <a:fld id="{4B0E1F8A-6C1D-4E2A-9F3B-7A5C8D2E1F60}" type="slidenum">
               <a:rPr sz="1600" b="0" i="0">
                 <a:solidFill>
-                  <a:srgbClr val="5B6B82"/>
+                  <a:srgbClr val="0A2240"/>
                 </a:solidFill>
                 <a:latin typeface="Arial"/>
               </a:rPr>
@@ -30456,7 +29771,7 @@
             <a:fld id="{4B0E1F8A-6C1D-4E2A-9F3B-7A5C8D2E1F60}" type="slidenum">
               <a:rPr sz="1600" b="0" i="0">
                 <a:solidFill>
-                  <a:srgbClr val="5B6B82"/>
+                  <a:srgbClr val="0A2240"/>
                 </a:solidFill>
                 <a:latin typeface="Arial"/>
               </a:rPr>
@@ -30552,7 +29867,7 @@
             <a:r>
               <a:rPr sz="3400" b="1" i="0">
                 <a:solidFill>
-                  <a:srgbClr val="123A6B"/>
+                  <a:srgbClr val="0072CE"/>
                 </a:solidFill>
                 <a:latin typeface="Arial"/>
               </a:rPr>
@@ -30587,7 +29902,7 @@
             <a:r>
               <a:rPr sz="3400" b="1" i="0">
                 <a:solidFill>
-                  <a:srgbClr val="123A6B"/>
+                  <a:srgbClr val="0072CE"/>
                 </a:solidFill>
                 <a:latin typeface="Arial"/>
               </a:rPr>
@@ -30948,7 +30263,7 @@
             <a:fld id="{4B0E1F8A-6C1D-4E2A-9F3B-7A5C8D2E1F60}" type="slidenum">
               <a:rPr sz="1600" b="0" i="0">
                 <a:solidFill>
-                  <a:srgbClr val="5B6B82"/>
+                  <a:srgbClr val="0A2240"/>
                 </a:solidFill>
                 <a:latin typeface="Arial"/>
               </a:rPr>
@@ -31044,7 +30359,7 @@
             <a:r>
               <a:rPr sz="4200" b="1" i="0">
                 <a:solidFill>
-                  <a:srgbClr val="123A6B"/>
+                  <a:srgbClr val="0072CE"/>
                 </a:solidFill>
                 <a:latin typeface="Arial"/>
               </a:rPr>
@@ -31079,7 +30394,7 @@
             <a:r>
               <a:rPr sz="4200" b="1" i="0">
                 <a:solidFill>
-                  <a:srgbClr val="123A6B"/>
+                  <a:srgbClr val="0072CE"/>
                 </a:solidFill>
                 <a:latin typeface="Arial"/>
               </a:rPr>
@@ -31149,7 +30464,7 @@
             <a:r>
               <a:rPr sz="4200" b="1" i="0">
                 <a:solidFill>
-                  <a:srgbClr val="123A6B"/>
+                  <a:srgbClr val="0072CE"/>
                 </a:solidFill>
                 <a:latin typeface="Arial"/>
               </a:rPr>
@@ -31184,7 +30499,7 @@
             <a:r>
               <a:rPr sz="4200" b="1" i="0">
                 <a:solidFill>
-                  <a:srgbClr val="123A6B"/>
+                  <a:srgbClr val="0072CE"/>
                 </a:solidFill>
                 <a:latin typeface="Arial"/>
               </a:rPr>
@@ -31254,7 +30569,7 @@
             <a:r>
               <a:rPr sz="4200" b="1" i="0">
                 <a:solidFill>
-                  <a:srgbClr val="123A6B"/>
+                  <a:srgbClr val="0072CE"/>
                 </a:solidFill>
                 <a:latin typeface="Arial"/>
               </a:rPr>
@@ -31289,7 +30604,7 @@
             <a:r>
               <a:rPr sz="4200" b="1" i="0">
                 <a:solidFill>
-                  <a:srgbClr val="123A6B"/>
+                  <a:srgbClr val="0072CE"/>
                 </a:solidFill>
                 <a:latin typeface="Arial"/>
               </a:rPr>
@@ -31361,7 +30676,7 @@
             <a:fld id="{4B0E1F8A-6C1D-4E2A-9F3B-7A5C8D2E1F60}" type="slidenum">
               <a:rPr sz="1600" b="0" i="0">
                 <a:solidFill>
-                  <a:srgbClr val="5B6B82"/>
+                  <a:srgbClr val="0A2240"/>
                 </a:solidFill>
                 <a:latin typeface="Arial"/>
               </a:rPr>
@@ -31669,7 +30984,7 @@
             <a:fld id="{4B0E1F8A-6C1D-4E2A-9F3B-7A5C8D2E1F60}" type="slidenum">
               <a:rPr sz="1600" b="0" i="0">
                 <a:solidFill>
-                  <a:srgbClr val="5B6B82"/>
+                  <a:srgbClr val="0A2240"/>
                 </a:solidFill>
                 <a:latin typeface="Arial"/>
               </a:rPr>
@@ -31907,7 +31222,7 @@
             <a:fld id="{4B0E1F8A-6C1D-4E2A-9F3B-7A5C8D2E1F60}" type="slidenum">
               <a:rPr sz="1600" b="0" i="0">
                 <a:solidFill>
-                  <a:srgbClr val="5B6B82"/>
+                  <a:srgbClr val="0A2240"/>
                 </a:solidFill>
                 <a:latin typeface="Arial"/>
               </a:rPr>
@@ -32003,7 +31318,7 @@
             <a:r>
               <a:rPr sz="3400" b="1" i="0">
                 <a:solidFill>
-                  <a:srgbClr val="123A6B"/>
+                  <a:srgbClr val="0072CE"/>
                 </a:solidFill>
                 <a:latin typeface="Arial"/>
               </a:rPr>
@@ -32038,7 +31353,7 @@
             <a:r>
               <a:rPr sz="3400" b="1" i="0">
                 <a:solidFill>
-                  <a:srgbClr val="123A6B"/>
+                  <a:srgbClr val="0072CE"/>
                 </a:solidFill>
                 <a:latin typeface="Arial"/>
               </a:rPr>
@@ -32285,7 +31600,7 @@
             <a:fld id="{4B0E1F8A-6C1D-4E2A-9F3B-7A5C8D2E1F60}" type="slidenum">
               <a:rPr sz="1600" b="0" i="0">
                 <a:solidFill>
-                  <a:srgbClr val="5B6B82"/>
+                  <a:srgbClr val="0A2240"/>
                 </a:solidFill>
                 <a:latin typeface="Arial"/>
               </a:rPr>
@@ -32523,7 +31838,7 @@
             <a:fld id="{4B0E1F8A-6C1D-4E2A-9F3B-7A5C8D2E1F60}" type="slidenum">
               <a:rPr sz="1600" b="0" i="0">
                 <a:solidFill>
-                  <a:srgbClr val="5B6B82"/>
+                  <a:srgbClr val="0A2240"/>
                 </a:solidFill>
                 <a:latin typeface="Arial"/>
               </a:rPr>
@@ -32619,7 +31934,7 @@
             <a:r>
               <a:rPr sz="3400" b="1" i="0">
                 <a:solidFill>
-                  <a:srgbClr val="123A6B"/>
+                  <a:srgbClr val="0072CE"/>
                 </a:solidFill>
                 <a:latin typeface="Arial"/>
               </a:rPr>
@@ -32654,7 +31969,7 @@
             <a:r>
               <a:rPr sz="3400" b="1" i="0">
                 <a:solidFill>
-                  <a:srgbClr val="123A6B"/>
+                  <a:srgbClr val="0072CE"/>
                 </a:solidFill>
                 <a:latin typeface="Arial"/>
               </a:rPr>
@@ -33015,7 +32330,7 @@
             <a:fld id="{4B0E1F8A-6C1D-4E2A-9F3B-7A5C8D2E1F60}" type="slidenum">
               <a:rPr sz="1600" b="0" i="0">
                 <a:solidFill>
-                  <a:srgbClr val="5B6B82"/>
+                  <a:srgbClr val="0A2240"/>
                 </a:solidFill>
                 <a:latin typeface="Arial"/>
               </a:rPr>
@@ -33157,7 +32472,7 @@
             <a:fld id="{4B0E1F8A-6C1D-4E2A-9F3B-7A5C8D2E1F60}" type="slidenum">
               <a:rPr sz="1600" b="0" i="0">
                 <a:solidFill>
-                  <a:srgbClr val="5B6B82"/>
+                  <a:srgbClr val="0A2240"/>
                 </a:solidFill>
                 <a:latin typeface="Arial"/>
               </a:rPr>
@@ -33395,7 +32710,7 @@
             <a:fld id="{4B0E1F8A-6C1D-4E2A-9F3B-7A5C8D2E1F60}" type="slidenum">
               <a:rPr sz="1600" b="0" i="0">
                 <a:solidFill>
-                  <a:srgbClr val="5B6B82"/>
+                  <a:srgbClr val="0A2240"/>
                 </a:solidFill>
                 <a:latin typeface="Arial"/>
               </a:rPr>
@@ -33631,7 +32946,7 @@
             <a:r>
               <a:rPr sz="4200" b="1" i="0">
                 <a:solidFill>
-                  <a:srgbClr val="5B6B82"/>
+                  <a:srgbClr val="0A2240"/>
                 </a:solidFill>
                 <a:latin typeface="Arial"/>
               </a:rPr>
@@ -33668,7 +32983,7 @@
             <a:fld id="{4B0E1F8A-6C1D-4E2A-9F3B-7A5C8D2E1F60}" type="slidenum">
               <a:rPr sz="1600" b="0" i="0">
                 <a:solidFill>
-                  <a:srgbClr val="5B6B82"/>
+                  <a:srgbClr val="0A2240"/>
                 </a:solidFill>
                 <a:latin typeface="Arial"/>
               </a:rPr>
@@ -33764,7 +33079,7 @@
             <a:r>
               <a:rPr sz="4200" b="1" i="0">
                 <a:solidFill>
-                  <a:srgbClr val="123A6B"/>
+                  <a:srgbClr val="0072CE"/>
                 </a:solidFill>
                 <a:latin typeface="Arial"/>
               </a:rPr>
@@ -33782,13 +33097,13 @@
         <p:spPr>
           <a:xfrm>
             <a:off x="457200" y="2194560"/>
-            <a:ext cx="784098" cy="54864"/>
+            <a:ext cx="593303" cy="54864"/>
           </a:xfrm>
           <a:prstGeom prst="rect">
             <a:avLst/>
           </a:prstGeom>
           <a:solidFill>
-            <a:srgbClr val="123A6B"/>
+            <a:srgbClr val="0072CE"/>
           </a:solidFill>
           <a:ln>
             <a:noFill/>
@@ -33843,7 +33158,7 @@
             <a:r>
               <a:rPr sz="3400" b="1" i="0">
                 <a:solidFill>
-                  <a:srgbClr val="123A6B"/>
+                  <a:srgbClr val="0072CE"/>
                 </a:solidFill>
                 <a:latin typeface="Arial"/>
               </a:rPr>
@@ -33913,7 +33228,7 @@
             <a:r>
               <a:rPr sz="4200" b="1" i="0">
                 <a:solidFill>
-                  <a:srgbClr val="123A6B"/>
+                  <a:srgbClr val="0072CE"/>
                 </a:solidFill>
                 <a:latin typeface="Arial"/>
               </a:rPr>
@@ -33931,13 +33246,13 @@
         <p:spPr>
           <a:xfrm>
             <a:off x="3345180" y="2194560"/>
-            <a:ext cx="784098" cy="54864"/>
+            <a:ext cx="593303" cy="54864"/>
           </a:xfrm>
           <a:prstGeom prst="rect">
             <a:avLst/>
           </a:prstGeom>
           <a:solidFill>
-            <a:srgbClr val="123A6B"/>
+            <a:srgbClr val="0072CE"/>
           </a:solidFill>
           <a:ln>
             <a:noFill/>
@@ -33992,7 +33307,7 @@
             <a:r>
               <a:rPr sz="3400" b="1" i="0">
                 <a:solidFill>
-                  <a:srgbClr val="123A6B"/>
+                  <a:srgbClr val="0072CE"/>
                 </a:solidFill>
                 <a:latin typeface="Arial"/>
               </a:rPr>
@@ -34062,7 +33377,7 @@
             <a:r>
               <a:rPr sz="4200" b="1" i="0">
                 <a:solidFill>
-                  <a:srgbClr val="123A6B"/>
+                  <a:srgbClr val="0072CE"/>
                 </a:solidFill>
                 <a:latin typeface="Arial"/>
               </a:rPr>
@@ -34080,13 +33395,13 @@
         <p:spPr>
           <a:xfrm>
             <a:off x="6233160" y="2194560"/>
-            <a:ext cx="784098" cy="54864"/>
+            <a:ext cx="593303" cy="54864"/>
           </a:xfrm>
           <a:prstGeom prst="rect">
             <a:avLst/>
           </a:prstGeom>
           <a:solidFill>
-            <a:srgbClr val="123A6B"/>
+            <a:srgbClr val="0072CE"/>
           </a:solidFill>
           <a:ln>
             <a:noFill/>
@@ -34141,7 +33456,7 @@
             <a:r>
               <a:rPr sz="3400" b="1" i="0">
                 <a:solidFill>
-                  <a:srgbClr val="123A6B"/>
+                  <a:srgbClr val="0072CE"/>
                 </a:solidFill>
                 <a:latin typeface="Arial"/>
               </a:rPr>
@@ -34211,7 +33526,7 @@
             <a:r>
               <a:rPr sz="4200" b="1" i="0">
                 <a:solidFill>
-                  <a:srgbClr val="123A6B"/>
+                  <a:srgbClr val="0072CE"/>
                 </a:solidFill>
                 <a:latin typeface="Arial"/>
               </a:rPr>
@@ -34229,13 +33544,13 @@
         <p:spPr>
           <a:xfrm>
             <a:off x="9121140" y="2194560"/>
-            <a:ext cx="784098" cy="54864"/>
+            <a:ext cx="593303" cy="54864"/>
           </a:xfrm>
           <a:prstGeom prst="rect">
             <a:avLst/>
           </a:prstGeom>
           <a:solidFill>
-            <a:srgbClr val="123A6B"/>
+            <a:srgbClr val="0072CE"/>
           </a:solidFill>
           <a:ln>
             <a:noFill/>
@@ -34290,7 +33605,7 @@
             <a:r>
               <a:rPr sz="3400" b="1" i="0">
                 <a:solidFill>
-                  <a:srgbClr val="123A6B"/>
+                  <a:srgbClr val="0072CE"/>
                 </a:solidFill>
                 <a:latin typeface="Arial"/>
               </a:rPr>
@@ -34362,7 +33677,7 @@
             <a:fld id="{4B0E1F8A-6C1D-4E2A-9F3B-7A5C8D2E1F60}" type="slidenum">
               <a:rPr sz="1600" b="0" i="0">
                 <a:solidFill>
-                  <a:srgbClr val="5B6B82"/>
+                  <a:srgbClr val="0A2240"/>
                 </a:solidFill>
                 <a:latin typeface="Arial"/>
               </a:rPr>
@@ -34502,7 +33817,7 @@
             <a:r>
               <a:rPr sz="3400" b="0" i="0">
                 <a:solidFill>
-                  <a:srgbClr val="5B6B82"/>
+                  <a:srgbClr val="0A2240"/>
                 </a:solidFill>
                 <a:latin typeface="Arial"/>
               </a:rPr>
@@ -34539,7 +33854,7 @@
             <a:fld id="{4B0E1F8A-6C1D-4E2A-9F3B-7A5C8D2E1F60}" type="slidenum">
               <a:rPr sz="1600" b="0" i="0">
                 <a:solidFill>
-                  <a:srgbClr val="5B6B82"/>
+                  <a:srgbClr val="0A2240"/>
                 </a:solidFill>
                 <a:latin typeface="Arial"/>
               </a:rPr>
@@ -34716,7 +34031,7 @@
             <a:fld id="{4B0E1F8A-6C1D-4E2A-9F3B-7A5C8D2E1F60}" type="slidenum">
               <a:rPr sz="1600" b="0" i="0">
                 <a:solidFill>
-                  <a:srgbClr val="5B6B82"/>
+                  <a:srgbClr val="0A2240"/>
                 </a:solidFill>
                 <a:latin typeface="Arial"/>
               </a:rPr>
@@ -34893,7 +34208,7 @@
             <a:fld id="{4B0E1F8A-6C1D-4E2A-9F3B-7A5C8D2E1F60}" type="slidenum">
               <a:rPr sz="1600" b="0" i="0">
                 <a:solidFill>
-                  <a:srgbClr val="5B6B82"/>
+                  <a:srgbClr val="0A2240"/>
                 </a:solidFill>
                 <a:latin typeface="Arial"/>
               </a:rPr>
